--- a/presentation.pptx
+++ b/presentation.pptx
@@ -15,12 +15,13 @@
     <p:sldId id="263" r:id="rId9"/>
     <p:sldId id="264" r:id="rId10"/>
     <p:sldId id="265" r:id="rId11"/>
-    <p:sldId id="266" r:id="rId12"/>
-    <p:sldId id="267" r:id="rId13"/>
-    <p:sldId id="268" r:id="rId14"/>
-    <p:sldId id="269" r:id="rId15"/>
-    <p:sldId id="270" r:id="rId16"/>
-    <p:sldId id="271" r:id="rId17"/>
+    <p:sldId id="274" r:id="rId12"/>
+    <p:sldId id="266" r:id="rId13"/>
+    <p:sldId id="272" r:id="rId14"/>
+    <p:sldId id="273" r:id="rId15"/>
+    <p:sldId id="269" r:id="rId16"/>
+    <p:sldId id="270" r:id="rId17"/>
+    <p:sldId id="271" r:id="rId18"/>
   </p:sldIdLst>
   <p:sldSz cx="12192000" cy="6858000"/>
   <p:notesSz cx="6858000" cy="9144000"/>
@@ -136,6 +137,998 @@
     </p:ext>
   </p:extLst>
 </p:presentation>
+</file>
+
+<file path=ppt/revisionInfo.xml><?xml version="1.0" encoding="utf-8"?>
+<p1510:revInfo xmlns:a="http://schemas.openxmlformats.org/drawingml/2006/main" xmlns:r="http://schemas.openxmlformats.org/officeDocument/2006/relationships" xmlns:p1510="http://schemas.microsoft.com/office/powerpoint/2015/10/main">
+  <p1510:revLst>
+    <p1510:client id="{3D3096D2-0977-4CC9-B332-391136FB2B4E}" v="104" dt="2026-06-19T12:02:08.897"/>
+  </p1510:revLst>
+</p1510:revInfo>
+</file>
+
+<file path=ppt/changesInfos/changesInfo1.xml><?xml version="1.0" encoding="utf-8"?>
+<pc:chgInfo xmlns:a="http://schemas.openxmlformats.org/drawingml/2006/main" xmlns:r="http://schemas.openxmlformats.org/officeDocument/2006/relationships" xmlns:ac="http://schemas.microsoft.com/office/drawing/2013/main/command" xmlns:pc="http://schemas.microsoft.com/office/powerpoint/2013/main/command">
+  <pc:docChgLst>
+    <pc:chgData name="Henri Vasserot" userId="0e3ffa8a8ba4be21" providerId="LiveId" clId="{6648135A-1893-4340-8820-2F0DD70CB280}"/>
+    <pc:docChg chg="undo custSel addSld delSld modSld sldOrd">
+      <pc:chgData name="Henri Vasserot" userId="0e3ffa8a8ba4be21" providerId="LiveId" clId="{6648135A-1893-4340-8820-2F0DD70CB280}" dt="2026-06-19T12:06:19.861" v="416" actId="207"/>
+      <pc:docMkLst>
+        <pc:docMk/>
+      </pc:docMkLst>
+      <pc:sldChg chg="modSp mod">
+        <pc:chgData name="Henri Vasserot" userId="0e3ffa8a8ba4be21" providerId="LiveId" clId="{6648135A-1893-4340-8820-2F0DD70CB280}" dt="2026-06-19T12:06:19.861" v="416" actId="207"/>
+        <pc:sldMkLst>
+          <pc:docMk/>
+          <pc:sldMk cId="0" sldId="260"/>
+        </pc:sldMkLst>
+        <pc:spChg chg="mod">
+          <ac:chgData name="Henri Vasserot" userId="0e3ffa8a8ba4be21" providerId="LiveId" clId="{6648135A-1893-4340-8820-2F0DD70CB280}" dt="2026-06-19T12:06:19.861" v="416" actId="207"/>
+          <ac:spMkLst>
+            <pc:docMk/>
+            <pc:sldMk cId="0" sldId="260"/>
+            <ac:spMk id="8" creationId="{00000000-0000-0000-0000-000000000000}"/>
+          </ac:spMkLst>
+        </pc:spChg>
+      </pc:sldChg>
+      <pc:sldChg chg="addSp delSp modSp mod">
+        <pc:chgData name="Henri Vasserot" userId="0e3ffa8a8ba4be21" providerId="LiveId" clId="{6648135A-1893-4340-8820-2F0DD70CB280}" dt="2026-06-18T22:41:41.542" v="72" actId="14100"/>
+        <pc:sldMkLst>
+          <pc:docMk/>
+          <pc:sldMk cId="0" sldId="261"/>
+        </pc:sldMkLst>
+        <pc:spChg chg="mod">
+          <ac:chgData name="Henri Vasserot" userId="0e3ffa8a8ba4be21" providerId="LiveId" clId="{6648135A-1893-4340-8820-2F0DD70CB280}" dt="2026-06-18T22:38:11.780" v="35" actId="20577"/>
+          <ac:spMkLst>
+            <pc:docMk/>
+            <pc:sldMk cId="0" sldId="261"/>
+            <ac:spMk id="11" creationId="{00000000-0000-0000-0000-000000000000}"/>
+          </ac:spMkLst>
+        </pc:spChg>
+        <pc:spChg chg="mod">
+          <ac:chgData name="Henri Vasserot" userId="0e3ffa8a8ba4be21" providerId="LiveId" clId="{6648135A-1893-4340-8820-2F0DD70CB280}" dt="2026-06-18T22:38:17.266" v="39" actId="20577"/>
+          <ac:spMkLst>
+            <pc:docMk/>
+            <pc:sldMk cId="0" sldId="261"/>
+            <ac:spMk id="14" creationId="{00000000-0000-0000-0000-000000000000}"/>
+          </ac:spMkLst>
+        </pc:spChg>
+        <pc:spChg chg="mod">
+          <ac:chgData name="Henri Vasserot" userId="0e3ffa8a8ba4be21" providerId="LiveId" clId="{6648135A-1893-4340-8820-2F0DD70CB280}" dt="2026-06-18T22:36:59.117" v="10" actId="113"/>
+          <ac:spMkLst>
+            <pc:docMk/>
+            <pc:sldMk cId="0" sldId="261"/>
+            <ac:spMk id="16" creationId="{00000000-0000-0000-0000-000000000000}"/>
+          </ac:spMkLst>
+        </pc:spChg>
+        <pc:spChg chg="mod">
+          <ac:chgData name="Henri Vasserot" userId="0e3ffa8a8ba4be21" providerId="LiveId" clId="{6648135A-1893-4340-8820-2F0DD70CB280}" dt="2026-06-18T22:38:25.191" v="45" actId="20577"/>
+          <ac:spMkLst>
+            <pc:docMk/>
+            <pc:sldMk cId="0" sldId="261"/>
+            <ac:spMk id="17" creationId="{00000000-0000-0000-0000-000000000000}"/>
+          </ac:spMkLst>
+        </pc:spChg>
+        <pc:spChg chg="mod">
+          <ac:chgData name="Henri Vasserot" userId="0e3ffa8a8ba4be21" providerId="LiveId" clId="{6648135A-1893-4340-8820-2F0DD70CB280}" dt="2026-06-18T22:35:29.080" v="2" actId="113"/>
+          <ac:spMkLst>
+            <pc:docMk/>
+            <pc:sldMk cId="0" sldId="261"/>
+            <ac:spMk id="18" creationId="{00000000-0000-0000-0000-000000000000}"/>
+          </ac:spMkLst>
+        </pc:spChg>
+        <pc:picChg chg="add del mod">
+          <ac:chgData name="Henri Vasserot" userId="0e3ffa8a8ba4be21" providerId="LiveId" clId="{6648135A-1893-4340-8820-2F0DD70CB280}" dt="2026-06-18T22:41:04.164" v="60" actId="478"/>
+          <ac:picMkLst>
+            <pc:docMk/>
+            <pc:sldMk cId="0" sldId="261"/>
+            <ac:picMk id="21" creationId="{F99660FE-0253-512E-7EEB-9C0EB2F28B89}"/>
+          </ac:picMkLst>
+        </pc:picChg>
+        <pc:picChg chg="add del mod">
+          <ac:chgData name="Henri Vasserot" userId="0e3ffa8a8ba4be21" providerId="LiveId" clId="{6648135A-1893-4340-8820-2F0DD70CB280}" dt="2026-06-18T22:41:05.975" v="61" actId="478"/>
+          <ac:picMkLst>
+            <pc:docMk/>
+            <pc:sldMk cId="0" sldId="261"/>
+            <ac:picMk id="23" creationId="{91CD67E6-553E-B971-BA2F-8A717AE38CB9}"/>
+          </ac:picMkLst>
+        </pc:picChg>
+        <pc:picChg chg="add del mod">
+          <ac:chgData name="Henri Vasserot" userId="0e3ffa8a8ba4be21" providerId="LiveId" clId="{6648135A-1893-4340-8820-2F0DD70CB280}" dt="2026-06-18T22:40:09.326" v="54" actId="478"/>
+          <ac:picMkLst>
+            <pc:docMk/>
+            <pc:sldMk cId="0" sldId="261"/>
+            <ac:picMk id="25" creationId="{90F5827F-7015-964A-2365-A64318AA4201}"/>
+          </ac:picMkLst>
+        </pc:picChg>
+        <pc:picChg chg="add mod">
+          <ac:chgData name="Henri Vasserot" userId="0e3ffa8a8ba4be21" providerId="LiveId" clId="{6648135A-1893-4340-8820-2F0DD70CB280}" dt="2026-06-18T22:41:20.852" v="66" actId="1076"/>
+          <ac:picMkLst>
+            <pc:docMk/>
+            <pc:sldMk cId="0" sldId="261"/>
+            <ac:picMk id="27" creationId="{86163F6E-92A3-9393-740F-727C3CB2D4EA}"/>
+          </ac:picMkLst>
+        </pc:picChg>
+        <pc:picChg chg="add mod">
+          <ac:chgData name="Henri Vasserot" userId="0e3ffa8a8ba4be21" providerId="LiveId" clId="{6648135A-1893-4340-8820-2F0DD70CB280}" dt="2026-06-18T22:41:41.542" v="72" actId="14100"/>
+          <ac:picMkLst>
+            <pc:docMk/>
+            <pc:sldMk cId="0" sldId="261"/>
+            <ac:picMk id="29" creationId="{7120DDA0-2D2A-2469-AD7E-2007696943F2}"/>
+          </ac:picMkLst>
+        </pc:picChg>
+      </pc:sldChg>
+      <pc:sldChg chg="addSp delSp modSp mod setBg">
+        <pc:chgData name="Henri Vasserot" userId="0e3ffa8a8ba4be21" providerId="LiveId" clId="{6648135A-1893-4340-8820-2F0DD70CB280}" dt="2026-06-18T22:52:54.840" v="124" actId="1076"/>
+        <pc:sldMkLst>
+          <pc:docMk/>
+          <pc:sldMk cId="0" sldId="262"/>
+        </pc:sldMkLst>
+        <pc:spChg chg="del">
+          <ac:chgData name="Henri Vasserot" userId="0e3ffa8a8ba4be21" providerId="LiveId" clId="{6648135A-1893-4340-8820-2F0DD70CB280}" dt="2026-06-18T22:49:34.002" v="86" actId="478"/>
+          <ac:spMkLst>
+            <pc:docMk/>
+            <pc:sldMk cId="0" sldId="262"/>
+            <ac:spMk id="2" creationId="{00000000-0000-0000-0000-000000000000}"/>
+          </ac:spMkLst>
+        </pc:spChg>
+        <pc:spChg chg="del">
+          <ac:chgData name="Henri Vasserot" userId="0e3ffa8a8ba4be21" providerId="LiveId" clId="{6648135A-1893-4340-8820-2F0DD70CB280}" dt="2026-06-18T22:49:34.002" v="86" actId="478"/>
+          <ac:spMkLst>
+            <pc:docMk/>
+            <pc:sldMk cId="0" sldId="262"/>
+            <ac:spMk id="5" creationId="{00000000-0000-0000-0000-000000000000}"/>
+          </ac:spMkLst>
+        </pc:spChg>
+        <pc:spChg chg="del">
+          <ac:chgData name="Henri Vasserot" userId="0e3ffa8a8ba4be21" providerId="LiveId" clId="{6648135A-1893-4340-8820-2F0DD70CB280}" dt="2026-06-18T22:49:34.002" v="86" actId="478"/>
+          <ac:spMkLst>
+            <pc:docMk/>
+            <pc:sldMk cId="0" sldId="262"/>
+            <ac:spMk id="7" creationId="{00000000-0000-0000-0000-000000000000}"/>
+          </ac:spMkLst>
+        </pc:spChg>
+        <pc:spChg chg="del">
+          <ac:chgData name="Henri Vasserot" userId="0e3ffa8a8ba4be21" providerId="LiveId" clId="{6648135A-1893-4340-8820-2F0DD70CB280}" dt="2026-06-18T22:49:34.002" v="86" actId="478"/>
+          <ac:spMkLst>
+            <pc:docMk/>
+            <pc:sldMk cId="0" sldId="262"/>
+            <ac:spMk id="8" creationId="{00000000-0000-0000-0000-000000000000}"/>
+          </ac:spMkLst>
+        </pc:spChg>
+        <pc:spChg chg="del">
+          <ac:chgData name="Henri Vasserot" userId="0e3ffa8a8ba4be21" providerId="LiveId" clId="{6648135A-1893-4340-8820-2F0DD70CB280}" dt="2026-06-18T22:49:34.002" v="86" actId="478"/>
+          <ac:spMkLst>
+            <pc:docMk/>
+            <pc:sldMk cId="0" sldId="262"/>
+            <ac:spMk id="9" creationId="{00000000-0000-0000-0000-000000000000}"/>
+          </ac:spMkLst>
+        </pc:spChg>
+        <pc:spChg chg="del">
+          <ac:chgData name="Henri Vasserot" userId="0e3ffa8a8ba4be21" providerId="LiveId" clId="{6648135A-1893-4340-8820-2F0DD70CB280}" dt="2026-06-18T22:49:34.002" v="86" actId="478"/>
+          <ac:spMkLst>
+            <pc:docMk/>
+            <pc:sldMk cId="0" sldId="262"/>
+            <ac:spMk id="10" creationId="{00000000-0000-0000-0000-000000000000}"/>
+          </ac:spMkLst>
+        </pc:spChg>
+        <pc:spChg chg="del">
+          <ac:chgData name="Henri Vasserot" userId="0e3ffa8a8ba4be21" providerId="LiveId" clId="{6648135A-1893-4340-8820-2F0DD70CB280}" dt="2026-06-18T22:49:34.002" v="86" actId="478"/>
+          <ac:spMkLst>
+            <pc:docMk/>
+            <pc:sldMk cId="0" sldId="262"/>
+            <ac:spMk id="11" creationId="{00000000-0000-0000-0000-000000000000}"/>
+          </ac:spMkLst>
+        </pc:spChg>
+        <pc:spChg chg="del">
+          <ac:chgData name="Henri Vasserot" userId="0e3ffa8a8ba4be21" providerId="LiveId" clId="{6648135A-1893-4340-8820-2F0DD70CB280}" dt="2026-06-18T22:49:34.002" v="86" actId="478"/>
+          <ac:spMkLst>
+            <pc:docMk/>
+            <pc:sldMk cId="0" sldId="262"/>
+            <ac:spMk id="13" creationId="{00000000-0000-0000-0000-000000000000}"/>
+          </ac:spMkLst>
+        </pc:spChg>
+        <pc:spChg chg="del">
+          <ac:chgData name="Henri Vasserot" userId="0e3ffa8a8ba4be21" providerId="LiveId" clId="{6648135A-1893-4340-8820-2F0DD70CB280}" dt="2026-06-18T22:49:34.002" v="86" actId="478"/>
+          <ac:spMkLst>
+            <pc:docMk/>
+            <pc:sldMk cId="0" sldId="262"/>
+            <ac:spMk id="14" creationId="{00000000-0000-0000-0000-000000000000}"/>
+          </ac:spMkLst>
+        </pc:spChg>
+        <pc:spChg chg="del">
+          <ac:chgData name="Henri Vasserot" userId="0e3ffa8a8ba4be21" providerId="LiveId" clId="{6648135A-1893-4340-8820-2F0DD70CB280}" dt="2026-06-18T22:49:34.002" v="86" actId="478"/>
+          <ac:spMkLst>
+            <pc:docMk/>
+            <pc:sldMk cId="0" sldId="262"/>
+            <ac:spMk id="15" creationId="{00000000-0000-0000-0000-000000000000}"/>
+          </ac:spMkLst>
+        </pc:spChg>
+        <pc:spChg chg="add mod">
+          <ac:chgData name="Henri Vasserot" userId="0e3ffa8a8ba4be21" providerId="LiveId" clId="{6648135A-1893-4340-8820-2F0DD70CB280}" dt="2026-06-18T22:52:51.963" v="123"/>
+          <ac:spMkLst>
+            <pc:docMk/>
+            <pc:sldMk cId="0" sldId="262"/>
+            <ac:spMk id="19" creationId="{6FFD9FBA-AB8B-4CCA-ED2C-F94B153C9B55}"/>
+          </ac:spMkLst>
+        </pc:spChg>
+        <pc:spChg chg="add del">
+          <ac:chgData name="Henri Vasserot" userId="0e3ffa8a8ba4be21" providerId="LiveId" clId="{6648135A-1893-4340-8820-2F0DD70CB280}" dt="2026-06-18T22:49:49.258" v="93" actId="26606"/>
+          <ac:spMkLst>
+            <pc:docMk/>
+            <pc:sldMk cId="0" sldId="262"/>
+            <ac:spMk id="20" creationId="{AB8C311F-7253-4AED-9701-7FC0708C41C7}"/>
+          </ac:spMkLst>
+        </pc:spChg>
+        <pc:spChg chg="add del">
+          <ac:chgData name="Henri Vasserot" userId="0e3ffa8a8ba4be21" providerId="LiveId" clId="{6648135A-1893-4340-8820-2F0DD70CB280}" dt="2026-06-18T22:50:48.771" v="107" actId="26606"/>
+          <ac:spMkLst>
+            <pc:docMk/>
+            <pc:sldMk cId="0" sldId="262"/>
+            <ac:spMk id="21" creationId="{AF2A46FC-A8BE-4771-BE51-D9123E91856E}"/>
+          </ac:spMkLst>
+        </pc:spChg>
+        <pc:spChg chg="add del">
+          <ac:chgData name="Henri Vasserot" userId="0e3ffa8a8ba4be21" providerId="LiveId" clId="{6648135A-1893-4340-8820-2F0DD70CB280}" dt="2026-06-18T22:49:45.592" v="89" actId="26606"/>
+          <ac:spMkLst>
+            <pc:docMk/>
+            <pc:sldMk cId="0" sldId="262"/>
+            <ac:spMk id="23" creationId="{42A4FC2C-047E-45A5-965D-8E1E3BF09BC6}"/>
+          </ac:spMkLst>
+        </pc:spChg>
+        <pc:spChg chg="add del">
+          <ac:chgData name="Henri Vasserot" userId="0e3ffa8a8ba4be21" providerId="LiveId" clId="{6648135A-1893-4340-8820-2F0DD70CB280}" dt="2026-06-18T22:50:50.195" v="109" actId="26606"/>
+          <ac:spMkLst>
+            <pc:docMk/>
+            <pc:sldMk cId="0" sldId="262"/>
+            <ac:spMk id="24" creationId="{42A4FC2C-047E-45A5-965D-8E1E3BF09BC6}"/>
+          </ac:spMkLst>
+        </pc:spChg>
+        <pc:spChg chg="add del">
+          <ac:chgData name="Henri Vasserot" userId="0e3ffa8a8ba4be21" providerId="LiveId" clId="{6648135A-1893-4340-8820-2F0DD70CB280}" dt="2026-06-18T22:49:49.258" v="93" actId="26606"/>
+          <ac:spMkLst>
+            <pc:docMk/>
+            <pc:sldMk cId="0" sldId="262"/>
+            <ac:spMk id="25" creationId="{E2384209-CB15-4CDF-9D31-C44FD9A3F20D}"/>
+          </ac:spMkLst>
+        </pc:spChg>
+        <pc:spChg chg="add del">
+          <ac:chgData name="Henri Vasserot" userId="0e3ffa8a8ba4be21" providerId="LiveId" clId="{6648135A-1893-4340-8820-2F0DD70CB280}" dt="2026-06-18T22:51:04.229" v="115" actId="26606"/>
+          <ac:spMkLst>
+            <pc:docMk/>
+            <pc:sldMk cId="0" sldId="262"/>
+            <ac:spMk id="26" creationId="{AF2A46FC-A8BE-4771-BE51-D9123E91856E}"/>
+          </ac:spMkLst>
+        </pc:spChg>
+        <pc:spChg chg="add del">
+          <ac:chgData name="Henri Vasserot" userId="0e3ffa8a8ba4be21" providerId="LiveId" clId="{6648135A-1893-4340-8820-2F0DD70CB280}" dt="2026-06-18T22:49:49.258" v="93" actId="26606"/>
+          <ac:spMkLst>
+            <pc:docMk/>
+            <pc:sldMk cId="0" sldId="262"/>
+            <ac:spMk id="27" creationId="{2633B3B5-CC90-43F0-8714-D31D1F3F0209}"/>
+          </ac:spMkLst>
+        </pc:spChg>
+        <pc:spChg chg="add del">
+          <ac:chgData name="Henri Vasserot" userId="0e3ffa8a8ba4be21" providerId="LiveId" clId="{6648135A-1893-4340-8820-2F0DD70CB280}" dt="2026-06-18T22:51:02.860" v="112" actId="26606"/>
+          <ac:spMkLst>
+            <pc:docMk/>
+            <pc:sldMk cId="0" sldId="262"/>
+            <ac:spMk id="28" creationId="{AF2A46FC-A8BE-4771-BE51-D9123E91856E}"/>
+          </ac:spMkLst>
+        </pc:spChg>
+        <pc:spChg chg="add del">
+          <ac:chgData name="Henri Vasserot" userId="0e3ffa8a8ba4be21" providerId="LiveId" clId="{6648135A-1893-4340-8820-2F0DD70CB280}" dt="2026-06-18T22:49:49.258" v="93" actId="26606"/>
+          <ac:spMkLst>
+            <pc:docMk/>
+            <pc:sldMk cId="0" sldId="262"/>
+            <ac:spMk id="29" creationId="{A8D57A06-A426-446D-B02C-A2DC6B62E45E}"/>
+          </ac:spMkLst>
+        </pc:spChg>
+        <pc:spChg chg="add">
+          <ac:chgData name="Henri Vasserot" userId="0e3ffa8a8ba4be21" providerId="LiveId" clId="{6648135A-1893-4340-8820-2F0DD70CB280}" dt="2026-06-18T22:51:04.229" v="115" actId="26606"/>
+          <ac:spMkLst>
+            <pc:docMk/>
+            <pc:sldMk cId="0" sldId="262"/>
+            <ac:spMk id="30" creationId="{AF2A46FC-A8BE-4771-BE51-D9123E91856E}"/>
+          </ac:spMkLst>
+        </pc:spChg>
+        <pc:spChg chg="add del">
+          <ac:chgData name="Henri Vasserot" userId="0e3ffa8a8ba4be21" providerId="LiveId" clId="{6648135A-1893-4340-8820-2F0DD70CB280}" dt="2026-06-18T22:49:51.036" v="95" actId="26606"/>
+          <ac:spMkLst>
+            <pc:docMk/>
+            <pc:sldMk cId="0" sldId="262"/>
+            <ac:spMk id="31" creationId="{32BC26D8-82FB-445E-AA49-62A77D7C1EE0}"/>
+          </ac:spMkLst>
+        </pc:spChg>
+        <pc:spChg chg="add del">
+          <ac:chgData name="Henri Vasserot" userId="0e3ffa8a8ba4be21" providerId="LiveId" clId="{6648135A-1893-4340-8820-2F0DD70CB280}" dt="2026-06-18T22:49:51.036" v="95" actId="26606"/>
+          <ac:spMkLst>
+            <pc:docMk/>
+            <pc:sldMk cId="0" sldId="262"/>
+            <ac:spMk id="32" creationId="{CB44330D-EA18-4254-AA95-EB49948539B8}"/>
+          </ac:spMkLst>
+        </pc:spChg>
+        <pc:spChg chg="add del">
+          <ac:chgData name="Henri Vasserot" userId="0e3ffa8a8ba4be21" providerId="LiveId" clId="{6648135A-1893-4340-8820-2F0DD70CB280}" dt="2026-06-18T22:52:46.269" v="121" actId="22"/>
+          <ac:spMkLst>
+            <pc:docMk/>
+            <pc:sldMk cId="0" sldId="262"/>
+            <ac:spMk id="33" creationId="{3712335E-3454-3DF4-50D5-19848525C72A}"/>
+          </ac:spMkLst>
+        </pc:spChg>
+        <pc:picChg chg="add del mod">
+          <ac:chgData name="Henri Vasserot" userId="0e3ffa8a8ba4be21" providerId="LiveId" clId="{6648135A-1893-4340-8820-2F0DD70CB280}" dt="2026-06-18T22:49:29.404" v="85" actId="478"/>
+          <ac:picMkLst>
+            <pc:docMk/>
+            <pc:sldMk cId="0" sldId="262"/>
+            <ac:picMk id="17" creationId="{A26383B2-C7CF-7F28-A66E-296207350C92}"/>
+          </ac:picMkLst>
+        </pc:picChg>
+        <pc:picChg chg="add mod">
+          <ac:chgData name="Henri Vasserot" userId="0e3ffa8a8ba4be21" providerId="LiveId" clId="{6648135A-1893-4340-8820-2F0DD70CB280}" dt="2026-06-18T22:52:54.840" v="124" actId="1076"/>
+          <ac:picMkLst>
+            <pc:docMk/>
+            <pc:sldMk cId="0" sldId="262"/>
+            <ac:picMk id="18" creationId="{F211FBB0-D978-8C71-B1E4-6ECEE140D4FD}"/>
+          </ac:picMkLst>
+        </pc:picChg>
+      </pc:sldChg>
+      <pc:sldChg chg="addSp delSp modSp mod">
+        <pc:chgData name="Henri Vasserot" userId="0e3ffa8a8ba4be21" providerId="LiveId" clId="{6648135A-1893-4340-8820-2F0DD70CB280}" dt="2026-06-18T23:00:58.778" v="146" actId="1076"/>
+        <pc:sldMkLst>
+          <pc:docMk/>
+          <pc:sldMk cId="0" sldId="263"/>
+        </pc:sldMkLst>
+        <pc:spChg chg="del">
+          <ac:chgData name="Henri Vasserot" userId="0e3ffa8a8ba4be21" providerId="LiveId" clId="{6648135A-1893-4340-8820-2F0DD70CB280}" dt="2026-06-18T22:57:45.049" v="125" actId="478"/>
+          <ac:spMkLst>
+            <pc:docMk/>
+            <pc:sldMk cId="0" sldId="263"/>
+            <ac:spMk id="11" creationId="{00000000-0000-0000-0000-000000000000}"/>
+          </ac:spMkLst>
+        </pc:spChg>
+        <pc:spChg chg="del mod">
+          <ac:chgData name="Henri Vasserot" userId="0e3ffa8a8ba4be21" providerId="LiveId" clId="{6648135A-1893-4340-8820-2F0DD70CB280}" dt="2026-06-18T22:57:53.104" v="129" actId="478"/>
+          <ac:spMkLst>
+            <pc:docMk/>
+            <pc:sldMk cId="0" sldId="263"/>
+            <ac:spMk id="12" creationId="{00000000-0000-0000-0000-000000000000}"/>
+          </ac:spMkLst>
+        </pc:spChg>
+        <pc:spChg chg="del mod">
+          <ac:chgData name="Henri Vasserot" userId="0e3ffa8a8ba4be21" providerId="LiveId" clId="{6648135A-1893-4340-8820-2F0DD70CB280}" dt="2026-06-18T22:57:49.814" v="127" actId="478"/>
+          <ac:spMkLst>
+            <pc:docMk/>
+            <pc:sldMk cId="0" sldId="263"/>
+            <ac:spMk id="13" creationId="{00000000-0000-0000-0000-000000000000}"/>
+          </ac:spMkLst>
+        </pc:spChg>
+        <pc:spChg chg="add mod">
+          <ac:chgData name="Henri Vasserot" userId="0e3ffa8a8ba4be21" providerId="LiveId" clId="{6648135A-1893-4340-8820-2F0DD70CB280}" dt="2026-06-18T23:00:58.778" v="146" actId="1076"/>
+          <ac:spMkLst>
+            <pc:docMk/>
+            <pc:sldMk cId="0" sldId="263"/>
+            <ac:spMk id="17" creationId="{818EE878-3848-C39C-BFA5-BF25516DD87D}"/>
+          </ac:spMkLst>
+        </pc:spChg>
+        <pc:picChg chg="add mod">
+          <ac:chgData name="Henri Vasserot" userId="0e3ffa8a8ba4be21" providerId="LiveId" clId="{6648135A-1893-4340-8820-2F0DD70CB280}" dt="2026-06-18T22:58:30.930" v="136" actId="1076"/>
+          <ac:picMkLst>
+            <pc:docMk/>
+            <pc:sldMk cId="0" sldId="263"/>
+            <ac:picMk id="16" creationId="{5EC6DBC4-3E24-0F48-064A-DA20C6EE1CCD}"/>
+          </ac:picMkLst>
+        </pc:picChg>
+      </pc:sldChg>
+      <pc:sldChg chg="addSp delSp modSp mod">
+        <pc:chgData name="Henri Vasserot" userId="0e3ffa8a8ba4be21" providerId="LiveId" clId="{6648135A-1893-4340-8820-2F0DD70CB280}" dt="2026-06-19T11:15:54.913" v="202" actId="14100"/>
+        <pc:sldMkLst>
+          <pc:docMk/>
+          <pc:sldMk cId="0" sldId="264"/>
+        </pc:sldMkLst>
+        <pc:spChg chg="mod">
+          <ac:chgData name="Henri Vasserot" userId="0e3ffa8a8ba4be21" providerId="LiveId" clId="{6648135A-1893-4340-8820-2F0DD70CB280}" dt="2026-06-19T05:29:02.023" v="149" actId="14100"/>
+          <ac:spMkLst>
+            <pc:docMk/>
+            <pc:sldMk cId="0" sldId="264"/>
+            <ac:spMk id="9" creationId="{00000000-0000-0000-0000-000000000000}"/>
+          </ac:spMkLst>
+        </pc:spChg>
+        <pc:spChg chg="mod">
+          <ac:chgData name="Henri Vasserot" userId="0e3ffa8a8ba4be21" providerId="LiveId" clId="{6648135A-1893-4340-8820-2F0DD70CB280}" dt="2026-06-19T05:30:48.097" v="158" actId="113"/>
+          <ac:spMkLst>
+            <pc:docMk/>
+            <pc:sldMk cId="0" sldId="264"/>
+            <ac:spMk id="10" creationId="{00000000-0000-0000-0000-000000000000}"/>
+          </ac:spMkLst>
+        </pc:spChg>
+        <pc:spChg chg="mod">
+          <ac:chgData name="Henri Vasserot" userId="0e3ffa8a8ba4be21" providerId="LiveId" clId="{6648135A-1893-4340-8820-2F0DD70CB280}" dt="2026-06-19T05:31:50.541" v="166" actId="1076"/>
+          <ac:spMkLst>
+            <pc:docMk/>
+            <pc:sldMk cId="0" sldId="264"/>
+            <ac:spMk id="11" creationId="{00000000-0000-0000-0000-000000000000}"/>
+          </ac:spMkLst>
+        </pc:spChg>
+        <pc:spChg chg="mod">
+          <ac:chgData name="Henri Vasserot" userId="0e3ffa8a8ba4be21" providerId="LiveId" clId="{6648135A-1893-4340-8820-2F0DD70CB280}" dt="2026-06-19T05:29:28.522" v="153" actId="1076"/>
+          <ac:spMkLst>
+            <pc:docMk/>
+            <pc:sldMk cId="0" sldId="264"/>
+            <ac:spMk id="12" creationId="{00000000-0000-0000-0000-000000000000}"/>
+          </ac:spMkLst>
+        </pc:spChg>
+        <pc:spChg chg="mod">
+          <ac:chgData name="Henri Vasserot" userId="0e3ffa8a8ba4be21" providerId="LiveId" clId="{6648135A-1893-4340-8820-2F0DD70CB280}" dt="2026-06-19T05:31:04.613" v="161" actId="113"/>
+          <ac:spMkLst>
+            <pc:docMk/>
+            <pc:sldMk cId="0" sldId="264"/>
+            <ac:spMk id="13" creationId="{00000000-0000-0000-0000-000000000000}"/>
+          </ac:spMkLst>
+        </pc:spChg>
+        <pc:spChg chg="mod">
+          <ac:chgData name="Henri Vasserot" userId="0e3ffa8a8ba4be21" providerId="LiveId" clId="{6648135A-1893-4340-8820-2F0DD70CB280}" dt="2026-06-19T11:14:05.218" v="189" actId="1076"/>
+          <ac:spMkLst>
+            <pc:docMk/>
+            <pc:sldMk cId="0" sldId="264"/>
+            <ac:spMk id="14" creationId="{00000000-0000-0000-0000-000000000000}"/>
+          </ac:spMkLst>
+        </pc:spChg>
+        <pc:spChg chg="mod">
+          <ac:chgData name="Henri Vasserot" userId="0e3ffa8a8ba4be21" providerId="LiveId" clId="{6648135A-1893-4340-8820-2F0DD70CB280}" dt="2026-06-19T05:30:02.772" v="154" actId="1076"/>
+          <ac:spMkLst>
+            <pc:docMk/>
+            <pc:sldMk cId="0" sldId="264"/>
+            <ac:spMk id="15" creationId="{00000000-0000-0000-0000-000000000000}"/>
+          </ac:spMkLst>
+        </pc:spChg>
+        <pc:spChg chg="mod">
+          <ac:chgData name="Henri Vasserot" userId="0e3ffa8a8ba4be21" providerId="LiveId" clId="{6648135A-1893-4340-8820-2F0DD70CB280}" dt="2026-06-19T05:31:22.923" v="164" actId="113"/>
+          <ac:spMkLst>
+            <pc:docMk/>
+            <pc:sldMk cId="0" sldId="264"/>
+            <ac:spMk id="16" creationId="{00000000-0000-0000-0000-000000000000}"/>
+          </ac:spMkLst>
+        </pc:spChg>
+        <pc:spChg chg="mod">
+          <ac:chgData name="Henri Vasserot" userId="0e3ffa8a8ba4be21" providerId="LiveId" clId="{6648135A-1893-4340-8820-2F0DD70CB280}" dt="2026-06-19T11:14:13.562" v="190" actId="1076"/>
+          <ac:spMkLst>
+            <pc:docMk/>
+            <pc:sldMk cId="0" sldId="264"/>
+            <ac:spMk id="17" creationId="{00000000-0000-0000-0000-000000000000}"/>
+          </ac:spMkLst>
+        </pc:spChg>
+        <pc:spChg chg="mod">
+          <ac:chgData name="Henri Vasserot" userId="0e3ffa8a8ba4be21" providerId="LiveId" clId="{6648135A-1893-4340-8820-2F0DD70CB280}" dt="2026-06-19T05:29:28.522" v="153" actId="1076"/>
+          <ac:spMkLst>
+            <pc:docMk/>
+            <pc:sldMk cId="0" sldId="264"/>
+            <ac:spMk id="18" creationId="{00000000-0000-0000-0000-000000000000}"/>
+          </ac:spMkLst>
+        </pc:spChg>
+        <pc:spChg chg="mod">
+          <ac:chgData name="Henri Vasserot" userId="0e3ffa8a8ba4be21" providerId="LiveId" clId="{6648135A-1893-4340-8820-2F0DD70CB280}" dt="2026-06-19T05:30:02.772" v="154" actId="1076"/>
+          <ac:spMkLst>
+            <pc:docMk/>
+            <pc:sldMk cId="0" sldId="264"/>
+            <ac:spMk id="19" creationId="{00000000-0000-0000-0000-000000000000}"/>
+          </ac:spMkLst>
+        </pc:spChg>
+        <pc:spChg chg="del mod">
+          <ac:chgData name="Henri Vasserot" userId="0e3ffa8a8ba4be21" providerId="LiveId" clId="{6648135A-1893-4340-8820-2F0DD70CB280}" dt="2026-06-19T05:35:36.290" v="184" actId="478"/>
+          <ac:spMkLst>
+            <pc:docMk/>
+            <pc:sldMk cId="0" sldId="264"/>
+            <ac:spMk id="22" creationId="{00000000-0000-0000-0000-000000000000}"/>
+          </ac:spMkLst>
+        </pc:spChg>
+        <pc:spChg chg="add mod">
+          <ac:chgData name="Henri Vasserot" userId="0e3ffa8a8ba4be21" providerId="LiveId" clId="{6648135A-1893-4340-8820-2F0DD70CB280}" dt="2026-06-19T05:30:30.842" v="156" actId="1076"/>
+          <ac:spMkLst>
+            <pc:docMk/>
+            <pc:sldMk cId="0" sldId="264"/>
+            <ac:spMk id="24" creationId="{B1ED8F8D-D3AF-3054-AC3F-737C9C851578}"/>
+          </ac:spMkLst>
+        </pc:spChg>
+        <pc:spChg chg="add mod">
+          <ac:chgData name="Henri Vasserot" userId="0e3ffa8a8ba4be21" providerId="LiveId" clId="{6648135A-1893-4340-8820-2F0DD70CB280}" dt="2026-06-19T05:30:30.842" v="156" actId="1076"/>
+          <ac:spMkLst>
+            <pc:docMk/>
+            <pc:sldMk cId="0" sldId="264"/>
+            <ac:spMk id="25" creationId="{3AA95E3A-060A-CCAB-9C4E-D0D8419290D4}"/>
+          </ac:spMkLst>
+        </pc:spChg>
+        <pc:spChg chg="add mod">
+          <ac:chgData name="Henri Vasserot" userId="0e3ffa8a8ba4be21" providerId="LiveId" clId="{6648135A-1893-4340-8820-2F0DD70CB280}" dt="2026-06-19T11:14:29.115" v="191" actId="1076"/>
+          <ac:spMkLst>
+            <pc:docMk/>
+            <pc:sldMk cId="0" sldId="264"/>
+            <ac:spMk id="26" creationId="{ACC0D238-9858-F126-3F0A-68F04603EEB1}"/>
+          </ac:spMkLst>
+        </pc:spChg>
+        <pc:spChg chg="add mod">
+          <ac:chgData name="Henri Vasserot" userId="0e3ffa8a8ba4be21" providerId="LiveId" clId="{6648135A-1893-4340-8820-2F0DD70CB280}" dt="2026-06-19T05:30:30.842" v="156" actId="1076"/>
+          <ac:spMkLst>
+            <pc:docMk/>
+            <pc:sldMk cId="0" sldId="264"/>
+            <ac:spMk id="27" creationId="{E1DDD6EF-0731-8B72-DFAD-6DE035D6956E}"/>
+          </ac:spMkLst>
+        </pc:spChg>
+        <pc:picChg chg="add mod">
+          <ac:chgData name="Henri Vasserot" userId="0e3ffa8a8ba4be21" providerId="LiveId" clId="{6648135A-1893-4340-8820-2F0DD70CB280}" dt="2026-06-19T11:14:44.516" v="193" actId="1076"/>
+          <ac:picMkLst>
+            <pc:docMk/>
+            <pc:sldMk cId="0" sldId="264"/>
+            <ac:picMk id="29" creationId="{13FC966D-AB15-B5F6-4CBC-23C04BBFEDDD}"/>
+          </ac:picMkLst>
+        </pc:picChg>
+        <pc:picChg chg="add mod">
+          <ac:chgData name="Henri Vasserot" userId="0e3ffa8a8ba4be21" providerId="LiveId" clId="{6648135A-1893-4340-8820-2F0DD70CB280}" dt="2026-06-19T05:34:05.975" v="177" actId="1076"/>
+          <ac:picMkLst>
+            <pc:docMk/>
+            <pc:sldMk cId="0" sldId="264"/>
+            <ac:picMk id="31" creationId="{567D1311-1E2D-C0F9-F826-977BDCDCB5A5}"/>
+          </ac:picMkLst>
+        </pc:picChg>
+        <pc:picChg chg="add mod">
+          <ac:chgData name="Henri Vasserot" userId="0e3ffa8a8ba4be21" providerId="LiveId" clId="{6648135A-1893-4340-8820-2F0DD70CB280}" dt="2026-06-19T11:14:55.074" v="195" actId="1076"/>
+          <ac:picMkLst>
+            <pc:docMk/>
+            <pc:sldMk cId="0" sldId="264"/>
+            <ac:picMk id="33" creationId="{C5EDD997-494E-3F73-A6E5-FB6E8D182E72}"/>
+          </ac:picMkLst>
+        </pc:picChg>
+        <pc:picChg chg="add mod">
+          <ac:chgData name="Henri Vasserot" userId="0e3ffa8a8ba4be21" providerId="LiveId" clId="{6648135A-1893-4340-8820-2F0DD70CB280}" dt="2026-06-19T11:15:06.223" v="197" actId="1076"/>
+          <ac:picMkLst>
+            <pc:docMk/>
+            <pc:sldMk cId="0" sldId="264"/>
+            <ac:picMk id="35" creationId="{5E39E336-2D17-DB91-4D6A-3B0D67AB0D60}"/>
+          </ac:picMkLst>
+        </pc:picChg>
+        <pc:picChg chg="add mod">
+          <ac:chgData name="Henri Vasserot" userId="0e3ffa8a8ba4be21" providerId="LiveId" clId="{6648135A-1893-4340-8820-2F0DD70CB280}" dt="2026-06-19T11:15:54.913" v="202" actId="14100"/>
+          <ac:picMkLst>
+            <pc:docMk/>
+            <pc:sldMk cId="0" sldId="264"/>
+            <ac:picMk id="37" creationId="{72279742-4410-A184-BDBE-AB1CC60DE69C}"/>
+          </ac:picMkLst>
+        </pc:picChg>
+        <pc:picChg chg="add mod">
+          <ac:chgData name="Henri Vasserot" userId="0e3ffa8a8ba4be21" providerId="LiveId" clId="{6648135A-1893-4340-8820-2F0DD70CB280}" dt="2026-06-19T11:15:43.672" v="200" actId="1076"/>
+          <ac:picMkLst>
+            <pc:docMk/>
+            <pc:sldMk cId="0" sldId="264"/>
+            <ac:picMk id="39" creationId="{01B00390-1753-4E14-B8D9-682D9391569B}"/>
+          </ac:picMkLst>
+        </pc:picChg>
+      </pc:sldChg>
+      <pc:sldChg chg="addSp modSp mod">
+        <pc:chgData name="Henri Vasserot" userId="0e3ffa8a8ba4be21" providerId="LiveId" clId="{6648135A-1893-4340-8820-2F0DD70CB280}" dt="2026-06-19T11:25:30.009" v="267" actId="20577"/>
+        <pc:sldMkLst>
+          <pc:docMk/>
+          <pc:sldMk cId="0" sldId="265"/>
+        </pc:sldMkLst>
+        <pc:spChg chg="mod">
+          <ac:chgData name="Henri Vasserot" userId="0e3ffa8a8ba4be21" providerId="LiveId" clId="{6648135A-1893-4340-8820-2F0DD70CB280}" dt="2026-06-19T11:17:55.544" v="204" actId="113"/>
+          <ac:spMkLst>
+            <pc:docMk/>
+            <pc:sldMk cId="0" sldId="265"/>
+            <ac:spMk id="7" creationId="{00000000-0000-0000-0000-000000000000}"/>
+          </ac:spMkLst>
+        </pc:spChg>
+        <pc:spChg chg="mod">
+          <ac:chgData name="Henri Vasserot" userId="0e3ffa8a8ba4be21" providerId="LiveId" clId="{6648135A-1893-4340-8820-2F0DD70CB280}" dt="2026-06-19T11:19:56.715" v="207" actId="113"/>
+          <ac:spMkLst>
+            <pc:docMk/>
+            <pc:sldMk cId="0" sldId="265"/>
+            <ac:spMk id="13" creationId="{00000000-0000-0000-0000-000000000000}"/>
+          </ac:spMkLst>
+        </pc:spChg>
+        <pc:spChg chg="mod">
+          <ac:chgData name="Henri Vasserot" userId="0e3ffa8a8ba4be21" providerId="LiveId" clId="{6648135A-1893-4340-8820-2F0DD70CB280}" dt="2026-06-19T11:25:30.009" v="267" actId="20577"/>
+          <ac:spMkLst>
+            <pc:docMk/>
+            <pc:sldMk cId="0" sldId="265"/>
+            <ac:spMk id="14" creationId="{00000000-0000-0000-0000-000000000000}"/>
+          </ac:spMkLst>
+        </pc:spChg>
+        <pc:spChg chg="add mod">
+          <ac:chgData name="Henri Vasserot" userId="0e3ffa8a8ba4be21" providerId="LiveId" clId="{6648135A-1893-4340-8820-2F0DD70CB280}" dt="2026-06-19T11:21:44.359" v="215" actId="113"/>
+          <ac:spMkLst>
+            <pc:docMk/>
+            <pc:sldMk cId="0" sldId="265"/>
+            <ac:spMk id="16" creationId="{79CF10F3-DDCE-0D3B-0902-FD1910B7B82D}"/>
+          </ac:spMkLst>
+        </pc:spChg>
+        <pc:spChg chg="add mod">
+          <ac:chgData name="Henri Vasserot" userId="0e3ffa8a8ba4be21" providerId="LiveId" clId="{6648135A-1893-4340-8820-2F0DD70CB280}" dt="2026-06-19T11:22:46.912" v="222" actId="1076"/>
+          <ac:spMkLst>
+            <pc:docMk/>
+            <pc:sldMk cId="0" sldId="265"/>
+            <ac:spMk id="17" creationId="{25C38BC1-C685-68B8-6969-42BC3508BFCA}"/>
+          </ac:spMkLst>
+        </pc:spChg>
+      </pc:sldChg>
+      <pc:sldChg chg="addSp delSp modSp mod">
+        <pc:chgData name="Henri Vasserot" userId="0e3ffa8a8ba4be21" providerId="LiveId" clId="{6648135A-1893-4340-8820-2F0DD70CB280}" dt="2026-06-19T11:40:11.909" v="330" actId="478"/>
+        <pc:sldMkLst>
+          <pc:docMk/>
+          <pc:sldMk cId="0" sldId="266"/>
+        </pc:sldMkLst>
+        <pc:spChg chg="del">
+          <ac:chgData name="Henri Vasserot" userId="0e3ffa8a8ba4be21" providerId="LiveId" clId="{6648135A-1893-4340-8820-2F0DD70CB280}" dt="2026-06-19T11:28:39.062" v="277" actId="478"/>
+          <ac:spMkLst>
+            <pc:docMk/>
+            <pc:sldMk cId="0" sldId="266"/>
+            <ac:spMk id="11" creationId="{00000000-0000-0000-0000-000000000000}"/>
+          </ac:spMkLst>
+        </pc:spChg>
+        <pc:spChg chg="del">
+          <ac:chgData name="Henri Vasserot" userId="0e3ffa8a8ba4be21" providerId="LiveId" clId="{6648135A-1893-4340-8820-2F0DD70CB280}" dt="2026-06-19T11:30:04.475" v="281" actId="478"/>
+          <ac:spMkLst>
+            <pc:docMk/>
+            <pc:sldMk cId="0" sldId="266"/>
+            <ac:spMk id="12" creationId="{00000000-0000-0000-0000-000000000000}"/>
+          </ac:spMkLst>
+        </pc:spChg>
+        <pc:picChg chg="del">
+          <ac:chgData name="Henri Vasserot" userId="0e3ffa8a8ba4be21" providerId="LiveId" clId="{6648135A-1893-4340-8820-2F0DD70CB280}" dt="2026-06-19T11:22:57.918" v="223" actId="478"/>
+          <ac:picMkLst>
+            <pc:docMk/>
+            <pc:sldMk cId="0" sldId="266"/>
+            <ac:picMk id="9" creationId="{00000000-0000-0000-0000-000000000000}"/>
+          </ac:picMkLst>
+        </pc:picChg>
+        <pc:picChg chg="del">
+          <ac:chgData name="Henri Vasserot" userId="0e3ffa8a8ba4be21" providerId="LiveId" clId="{6648135A-1893-4340-8820-2F0DD70CB280}" dt="2026-06-19T11:23:00.240" v="224" actId="478"/>
+          <ac:picMkLst>
+            <pc:docMk/>
+            <pc:sldMk cId="0" sldId="266"/>
+            <ac:picMk id="10" creationId="{00000000-0000-0000-0000-000000000000}"/>
+          </ac:picMkLst>
+        </pc:picChg>
+        <pc:picChg chg="add mod">
+          <ac:chgData name="Henri Vasserot" userId="0e3ffa8a8ba4be21" providerId="LiveId" clId="{6648135A-1893-4340-8820-2F0DD70CB280}" dt="2026-06-19T11:31:04.009" v="288" actId="14100"/>
+          <ac:picMkLst>
+            <pc:docMk/>
+            <pc:sldMk cId="0" sldId="266"/>
+            <ac:picMk id="15" creationId="{F3DAF047-69D4-8FCC-9237-75E40CE0483F}"/>
+          </ac:picMkLst>
+        </pc:picChg>
+        <pc:picChg chg="add del mod">
+          <ac:chgData name="Henri Vasserot" userId="0e3ffa8a8ba4be21" providerId="LiveId" clId="{6648135A-1893-4340-8820-2F0DD70CB280}" dt="2026-06-19T11:40:11.909" v="330" actId="478"/>
+          <ac:picMkLst>
+            <pc:docMk/>
+            <pc:sldMk cId="0" sldId="266"/>
+            <ac:picMk id="17" creationId="{62D54DCD-F579-8F86-43DC-A689797A7DF1}"/>
+          </ac:picMkLst>
+        </pc:picChg>
+        <pc:picChg chg="add mod">
+          <ac:chgData name="Henri Vasserot" userId="0e3ffa8a8ba4be21" providerId="LiveId" clId="{6648135A-1893-4340-8820-2F0DD70CB280}" dt="2026-06-19T11:29:14.943" v="279" actId="1076"/>
+          <ac:picMkLst>
+            <pc:docMk/>
+            <pc:sldMk cId="0" sldId="266"/>
+            <ac:picMk id="19" creationId="{2FB52941-BA07-3CBB-4CB7-17CE1C488A69}"/>
+          </ac:picMkLst>
+        </pc:picChg>
+        <pc:picChg chg="add mod">
+          <ac:chgData name="Henri Vasserot" userId="0e3ffa8a8ba4be21" providerId="LiveId" clId="{6648135A-1893-4340-8820-2F0DD70CB280}" dt="2026-06-19T11:30:57.163" v="287" actId="1076"/>
+          <ac:picMkLst>
+            <pc:docMk/>
+            <pc:sldMk cId="0" sldId="266"/>
+            <ac:picMk id="21" creationId="{2F69C162-1D0B-67AC-9A32-E0137A0CFD37}"/>
+          </ac:picMkLst>
+        </pc:picChg>
+      </pc:sldChg>
+      <pc:sldChg chg="del">
+        <pc:chgData name="Henri Vasserot" userId="0e3ffa8a8ba4be21" providerId="LiveId" clId="{6648135A-1893-4340-8820-2F0DD70CB280}" dt="2026-06-19T11:32:35.434" v="292" actId="2696"/>
+        <pc:sldMkLst>
+          <pc:docMk/>
+          <pc:sldMk cId="0" sldId="267"/>
+        </pc:sldMkLst>
+      </pc:sldChg>
+      <pc:sldChg chg="del">
+        <pc:chgData name="Henri Vasserot" userId="0e3ffa8a8ba4be21" providerId="LiveId" clId="{6648135A-1893-4340-8820-2F0DD70CB280}" dt="2026-06-19T11:32:38.228" v="293" actId="2696"/>
+        <pc:sldMkLst>
+          <pc:docMk/>
+          <pc:sldMk cId="0" sldId="268"/>
+        </pc:sldMkLst>
+      </pc:sldChg>
+      <pc:sldChg chg="modSp mod">
+        <pc:chgData name="Henri Vasserot" userId="0e3ffa8a8ba4be21" providerId="LiveId" clId="{6648135A-1893-4340-8820-2F0DD70CB280}" dt="2026-06-19T11:59:13.943" v="394" actId="20577"/>
+        <pc:sldMkLst>
+          <pc:docMk/>
+          <pc:sldMk cId="0" sldId="269"/>
+        </pc:sldMkLst>
+        <pc:spChg chg="mod">
+          <ac:chgData name="Henri Vasserot" userId="0e3ffa8a8ba4be21" providerId="LiveId" clId="{6648135A-1893-4340-8820-2F0DD70CB280}" dt="2026-06-19T11:59:13.943" v="394" actId="20577"/>
+          <ac:spMkLst>
+            <pc:docMk/>
+            <pc:sldMk cId="0" sldId="269"/>
+            <ac:spMk id="11" creationId="{00000000-0000-0000-0000-000000000000}"/>
+          </ac:spMkLst>
+        </pc:spChg>
+        <pc:spChg chg="mod">
+          <ac:chgData name="Henri Vasserot" userId="0e3ffa8a8ba4be21" providerId="LiveId" clId="{6648135A-1893-4340-8820-2F0DD70CB280}" dt="2026-06-19T11:59:09.110" v="392" actId="20577"/>
+          <ac:spMkLst>
+            <pc:docMk/>
+            <pc:sldMk cId="0" sldId="269"/>
+            <ac:spMk id="14" creationId="{00000000-0000-0000-0000-000000000000}"/>
+          </ac:spMkLst>
+        </pc:spChg>
+      </pc:sldChg>
+      <pc:sldChg chg="addSp modSp mod">
+        <pc:chgData name="Henri Vasserot" userId="0e3ffa8a8ba4be21" providerId="LiveId" clId="{6648135A-1893-4340-8820-2F0DD70CB280}" dt="2026-06-19T12:03:10.943" v="414" actId="1076"/>
+        <pc:sldMkLst>
+          <pc:docMk/>
+          <pc:sldMk cId="0" sldId="270"/>
+        </pc:sldMkLst>
+        <pc:spChg chg="mod">
+          <ac:chgData name="Henri Vasserot" userId="0e3ffa8a8ba4be21" providerId="LiveId" clId="{6648135A-1893-4340-8820-2F0DD70CB280}" dt="2026-06-19T12:03:04.416" v="413" actId="20577"/>
+          <ac:spMkLst>
+            <pc:docMk/>
+            <pc:sldMk cId="0" sldId="270"/>
+            <ac:spMk id="11" creationId="{00000000-0000-0000-0000-000000000000}"/>
+          </ac:spMkLst>
+        </pc:spChg>
+        <pc:spChg chg="mod">
+          <ac:chgData name="Henri Vasserot" userId="0e3ffa8a8ba4be21" providerId="LiveId" clId="{6648135A-1893-4340-8820-2F0DD70CB280}" dt="2026-06-19T12:00:49.728" v="399" actId="20577"/>
+          <ac:spMkLst>
+            <pc:docMk/>
+            <pc:sldMk cId="0" sldId="270"/>
+            <ac:spMk id="14" creationId="{00000000-0000-0000-0000-000000000000}"/>
+          </ac:spMkLst>
+        </pc:spChg>
+        <pc:spChg chg="add mod">
+          <ac:chgData name="Henri Vasserot" userId="0e3ffa8a8ba4be21" providerId="LiveId" clId="{6648135A-1893-4340-8820-2F0DD70CB280}" dt="2026-06-19T12:01:51.801" v="403" actId="1076"/>
+          <ac:spMkLst>
+            <pc:docMk/>
+            <pc:sldMk cId="0" sldId="270"/>
+            <ac:spMk id="17" creationId="{92446EC3-7CF0-2C58-8A60-1B91DB3CDFB1}"/>
+          </ac:spMkLst>
+        </pc:spChg>
+        <pc:picChg chg="add mod">
+          <ac:chgData name="Henri Vasserot" userId="0e3ffa8a8ba4be21" providerId="LiveId" clId="{6648135A-1893-4340-8820-2F0DD70CB280}" dt="2026-06-19T12:03:10.943" v="414" actId="1076"/>
+          <ac:picMkLst>
+            <pc:docMk/>
+            <pc:sldMk cId="0" sldId="270"/>
+            <ac:picMk id="19" creationId="{2E791DB8-A7E8-C835-3AFC-1285497681C5}"/>
+          </ac:picMkLst>
+        </pc:picChg>
+      </pc:sldChg>
+      <pc:sldChg chg="addSp delSp modSp add mod">
+        <pc:chgData name="Henri Vasserot" userId="0e3ffa8a8ba4be21" providerId="LiveId" clId="{6648135A-1893-4340-8820-2F0DD70CB280}" dt="2026-06-19T11:38:07.772" v="321" actId="1076"/>
+        <pc:sldMkLst>
+          <pc:docMk/>
+          <pc:sldMk cId="3612442224" sldId="272"/>
+        </pc:sldMkLst>
+        <pc:spChg chg="mod">
+          <ac:chgData name="Henri Vasserot" userId="0e3ffa8a8ba4be21" providerId="LiveId" clId="{6648135A-1893-4340-8820-2F0DD70CB280}" dt="2026-06-19T11:34:03.593" v="296" actId="113"/>
+          <ac:spMkLst>
+            <pc:docMk/>
+            <pc:sldMk cId="3612442224" sldId="272"/>
+            <ac:spMk id="7" creationId="{CF78AF6D-2AAB-067F-826A-5E482A500F5A}"/>
+          </ac:spMkLst>
+        </pc:spChg>
+        <pc:spChg chg="add mod">
+          <ac:chgData name="Henri Vasserot" userId="0e3ffa8a8ba4be21" providerId="LiveId" clId="{6648135A-1893-4340-8820-2F0DD70CB280}" dt="2026-06-19T11:36:10.163" v="312" actId="113"/>
+          <ac:spMkLst>
+            <pc:docMk/>
+            <pc:sldMk cId="3612442224" sldId="272"/>
+            <ac:spMk id="11" creationId="{F0A05157-4E1C-60AE-9DD8-35D2F0A8DA63}"/>
+          </ac:spMkLst>
+        </pc:spChg>
+        <pc:picChg chg="add mod">
+          <ac:chgData name="Henri Vasserot" userId="0e3ffa8a8ba4be21" providerId="LiveId" clId="{6648135A-1893-4340-8820-2F0DD70CB280}" dt="2026-06-19T11:38:00.343" v="319" actId="1076"/>
+          <ac:picMkLst>
+            <pc:docMk/>
+            <pc:sldMk cId="3612442224" sldId="272"/>
+            <ac:picMk id="10" creationId="{A72D92F6-97B5-04E9-3BFE-8586AB4D849F}"/>
+          </ac:picMkLst>
+        </pc:picChg>
+        <pc:picChg chg="add mod">
+          <ac:chgData name="Henri Vasserot" userId="0e3ffa8a8ba4be21" providerId="LiveId" clId="{6648135A-1893-4340-8820-2F0DD70CB280}" dt="2026-06-19T11:38:07.772" v="321" actId="1076"/>
+          <ac:picMkLst>
+            <pc:docMk/>
+            <pc:sldMk cId="3612442224" sldId="272"/>
+            <ac:picMk id="14" creationId="{6B9EA206-E23C-56EB-9E96-F7DDA29E9B4E}"/>
+          </ac:picMkLst>
+        </pc:picChg>
+        <pc:picChg chg="del">
+          <ac:chgData name="Henri Vasserot" userId="0e3ffa8a8ba4be21" providerId="LiveId" clId="{6648135A-1893-4340-8820-2F0DD70CB280}" dt="2026-06-19T11:34:53.603" v="303" actId="478"/>
+          <ac:picMkLst>
+            <pc:docMk/>
+            <pc:sldMk cId="3612442224" sldId="272"/>
+            <ac:picMk id="15" creationId="{F777550C-784B-F85C-A95E-97FEFA3FDBD1}"/>
+          </ac:picMkLst>
+        </pc:picChg>
+        <pc:picChg chg="del">
+          <ac:chgData name="Henri Vasserot" userId="0e3ffa8a8ba4be21" providerId="LiveId" clId="{6648135A-1893-4340-8820-2F0DD70CB280}" dt="2026-06-19T11:33:48.444" v="294" actId="478"/>
+          <ac:picMkLst>
+            <pc:docMk/>
+            <pc:sldMk cId="3612442224" sldId="272"/>
+            <ac:picMk id="17" creationId="{7D1F0D2F-EFB0-3A06-1DA9-62F42AD67730}"/>
+          </ac:picMkLst>
+        </pc:picChg>
+        <pc:picChg chg="del">
+          <ac:chgData name="Henri Vasserot" userId="0e3ffa8a8ba4be21" providerId="LiveId" clId="{6648135A-1893-4340-8820-2F0DD70CB280}" dt="2026-06-19T11:34:46.260" v="299" actId="478"/>
+          <ac:picMkLst>
+            <pc:docMk/>
+            <pc:sldMk cId="3612442224" sldId="272"/>
+            <ac:picMk id="19" creationId="{0B2BA9C1-4852-CA32-0105-7D01552CF1C8}"/>
+          </ac:picMkLst>
+        </pc:picChg>
+        <pc:picChg chg="del">
+          <ac:chgData name="Henri Vasserot" userId="0e3ffa8a8ba4be21" providerId="LiveId" clId="{6648135A-1893-4340-8820-2F0DD70CB280}" dt="2026-06-19T11:34:55.460" v="304" actId="478"/>
+          <ac:picMkLst>
+            <pc:docMk/>
+            <pc:sldMk cId="3612442224" sldId="272"/>
+            <ac:picMk id="21" creationId="{612283A3-376A-793A-9C8C-34ACFE132E00}"/>
+          </ac:picMkLst>
+        </pc:picChg>
+      </pc:sldChg>
+      <pc:sldChg chg="addSp delSp modSp add mod ord">
+        <pc:chgData name="Henri Vasserot" userId="0e3ffa8a8ba4be21" providerId="LiveId" clId="{6648135A-1893-4340-8820-2F0DD70CB280}" dt="2026-06-19T11:55:49.262" v="384" actId="1076"/>
+        <pc:sldMkLst>
+          <pc:docMk/>
+          <pc:sldMk cId="3045275682" sldId="273"/>
+        </pc:sldMkLst>
+        <pc:spChg chg="mod">
+          <ac:chgData name="Henri Vasserot" userId="0e3ffa8a8ba4be21" providerId="LiveId" clId="{6648135A-1893-4340-8820-2F0DD70CB280}" dt="2026-06-19T11:39:23.056" v="326" actId="113"/>
+          <ac:spMkLst>
+            <pc:docMk/>
+            <pc:sldMk cId="3045275682" sldId="273"/>
+            <ac:spMk id="7" creationId="{A1F7082B-7C49-6729-5B6C-FB9FE666301C}"/>
+          </ac:spMkLst>
+        </pc:spChg>
+        <pc:spChg chg="mod">
+          <ac:chgData name="Henri Vasserot" userId="0e3ffa8a8ba4be21" providerId="LiveId" clId="{6648135A-1893-4340-8820-2F0DD70CB280}" dt="2026-06-19T11:48:43.714" v="368"/>
+          <ac:spMkLst>
+            <pc:docMk/>
+            <pc:sldMk cId="3045275682" sldId="273"/>
+            <ac:spMk id="8" creationId="{EA6376E3-1A07-2F72-C525-9F2CC978F00D}"/>
+          </ac:spMkLst>
+        </pc:spChg>
+        <pc:picChg chg="add mod">
+          <ac:chgData name="Henri Vasserot" userId="0e3ffa8a8ba4be21" providerId="LiveId" clId="{6648135A-1893-4340-8820-2F0DD70CB280}" dt="2026-06-19T11:52:52.047" v="376" actId="1076"/>
+          <ac:picMkLst>
+            <pc:docMk/>
+            <pc:sldMk cId="3045275682" sldId="273"/>
+            <ac:picMk id="10" creationId="{C807F026-A4C4-2A8F-0155-9B05CA4FE5EC}"/>
+          </ac:picMkLst>
+        </pc:picChg>
+        <pc:picChg chg="add del mod">
+          <ac:chgData name="Henri Vasserot" userId="0e3ffa8a8ba4be21" providerId="LiveId" clId="{6648135A-1893-4340-8820-2F0DD70CB280}" dt="2026-06-19T11:52:26.648" v="369" actId="478"/>
+          <ac:picMkLst>
+            <pc:docMk/>
+            <pc:sldMk cId="3045275682" sldId="273"/>
+            <ac:picMk id="12" creationId="{CCAA13BA-F946-C0F0-FA8E-A78A030F1718}"/>
+          </ac:picMkLst>
+        </pc:picChg>
+        <pc:picChg chg="del">
+          <ac:chgData name="Henri Vasserot" userId="0e3ffa8a8ba4be21" providerId="LiveId" clId="{6648135A-1893-4340-8820-2F0DD70CB280}" dt="2026-06-19T11:40:20.474" v="332" actId="478"/>
+          <ac:picMkLst>
+            <pc:docMk/>
+            <pc:sldMk cId="3045275682" sldId="273"/>
+            <ac:picMk id="15" creationId="{26F07871-59A1-AFDF-12ED-69BA000A8D65}"/>
+          </ac:picMkLst>
+        </pc:picChg>
+        <pc:picChg chg="add mod">
+          <ac:chgData name="Henri Vasserot" userId="0e3ffa8a8ba4be21" providerId="LiveId" clId="{6648135A-1893-4340-8820-2F0DD70CB280}" dt="2026-06-19T11:52:32.491" v="371" actId="1076"/>
+          <ac:picMkLst>
+            <pc:docMk/>
+            <pc:sldMk cId="3045275682" sldId="273"/>
+            <ac:picMk id="16" creationId="{D67F825E-A4ED-CAEE-12C6-ABD738E1A25B}"/>
+          </ac:picMkLst>
+        </pc:picChg>
+        <pc:picChg chg="del">
+          <ac:chgData name="Henri Vasserot" userId="0e3ffa8a8ba4be21" providerId="LiveId" clId="{6648135A-1893-4340-8820-2F0DD70CB280}" dt="2026-06-19T11:40:18.859" v="331" actId="478"/>
+          <ac:picMkLst>
+            <pc:docMk/>
+            <pc:sldMk cId="3045275682" sldId="273"/>
+            <ac:picMk id="17" creationId="{5392930B-2188-C209-5C71-EE84A20FCCAD}"/>
+          </ac:picMkLst>
+        </pc:picChg>
+        <pc:picChg chg="del">
+          <ac:chgData name="Henri Vasserot" userId="0e3ffa8a8ba4be21" providerId="LiveId" clId="{6648135A-1893-4340-8820-2F0DD70CB280}" dt="2026-06-19T11:42:43.498" v="337" actId="478"/>
+          <ac:picMkLst>
+            <pc:docMk/>
+            <pc:sldMk cId="3045275682" sldId="273"/>
+            <ac:picMk id="19" creationId="{E767924B-79CF-65C3-F31C-370E696E162D}"/>
+          </ac:picMkLst>
+        </pc:picChg>
+        <pc:picChg chg="add mod">
+          <ac:chgData name="Henri Vasserot" userId="0e3ffa8a8ba4be21" providerId="LiveId" clId="{6648135A-1893-4340-8820-2F0DD70CB280}" dt="2026-06-19T11:55:05.584" v="380" actId="1076"/>
+          <ac:picMkLst>
+            <pc:docMk/>
+            <pc:sldMk cId="3045275682" sldId="273"/>
+            <ac:picMk id="20" creationId="{6252D39E-271F-B0DA-BB9D-8C041F836750}"/>
+          </ac:picMkLst>
+        </pc:picChg>
+        <pc:picChg chg="del">
+          <ac:chgData name="Henri Vasserot" userId="0e3ffa8a8ba4be21" providerId="LiveId" clId="{6648135A-1893-4340-8820-2F0DD70CB280}" dt="2026-06-19T11:42:41.723" v="336" actId="478"/>
+          <ac:picMkLst>
+            <pc:docMk/>
+            <pc:sldMk cId="3045275682" sldId="273"/>
+            <ac:picMk id="21" creationId="{5DC92861-6066-49F8-DE60-CC9660C04A0F}"/>
+          </ac:picMkLst>
+        </pc:picChg>
+        <pc:picChg chg="add mod">
+          <ac:chgData name="Henri Vasserot" userId="0e3ffa8a8ba4be21" providerId="LiveId" clId="{6648135A-1893-4340-8820-2F0DD70CB280}" dt="2026-06-19T11:55:49.262" v="384" actId="1076"/>
+          <ac:picMkLst>
+            <pc:docMk/>
+            <pc:sldMk cId="3045275682" sldId="273"/>
+            <ac:picMk id="23" creationId="{19EE9E78-C84C-A717-9CE7-EB829C16F0F5}"/>
+          </ac:picMkLst>
+        </pc:picChg>
+      </pc:sldChg>
+      <pc:sldChg chg="addSp delSp modSp add mod ord">
+        <pc:chgData name="Henri Vasserot" userId="0e3ffa8a8ba4be21" providerId="LiveId" clId="{6648135A-1893-4340-8820-2F0DD70CB280}" dt="2026-06-19T11:45:25.794" v="361" actId="1076"/>
+        <pc:sldMkLst>
+          <pc:docMk/>
+          <pc:sldMk cId="1739076269" sldId="274"/>
+        </pc:sldMkLst>
+        <pc:spChg chg="mod">
+          <ac:chgData name="Henri Vasserot" userId="0e3ffa8a8ba4be21" providerId="LiveId" clId="{6648135A-1893-4340-8820-2F0DD70CB280}" dt="2026-06-19T11:44:26.349" v="350" actId="113"/>
+          <ac:spMkLst>
+            <pc:docMk/>
+            <pc:sldMk cId="1739076269" sldId="274"/>
+            <ac:spMk id="7" creationId="{F1870C9D-BF75-E58F-BF97-C50FAEBA7191}"/>
+          </ac:spMkLst>
+        </pc:spChg>
+        <pc:picChg chg="add mod">
+          <ac:chgData name="Henri Vasserot" userId="0e3ffa8a8ba4be21" providerId="LiveId" clId="{6648135A-1893-4340-8820-2F0DD70CB280}" dt="2026-06-19T11:44:48.343" v="357" actId="1076"/>
+          <ac:picMkLst>
+            <pc:docMk/>
+            <pc:sldMk cId="1739076269" sldId="274"/>
+            <ac:picMk id="10" creationId="{F55B1466-64B2-E056-BC2A-FB1C6DF132FE}"/>
+          </ac:picMkLst>
+        </pc:picChg>
+        <pc:picChg chg="add mod modCrop">
+          <ac:chgData name="Henri Vasserot" userId="0e3ffa8a8ba4be21" providerId="LiveId" clId="{6648135A-1893-4340-8820-2F0DD70CB280}" dt="2026-06-19T11:45:25.794" v="361" actId="1076"/>
+          <ac:picMkLst>
+            <pc:docMk/>
+            <pc:sldMk cId="1739076269" sldId="274"/>
+            <ac:picMk id="11" creationId="{958DB98A-5283-5A5D-84C8-4BE681C33F33}"/>
+          </ac:picMkLst>
+        </pc:picChg>
+        <pc:picChg chg="del">
+          <ac:chgData name="Henri Vasserot" userId="0e3ffa8a8ba4be21" providerId="LiveId" clId="{6648135A-1893-4340-8820-2F0DD70CB280}" dt="2026-06-19T11:44:30.136" v="352" actId="478"/>
+          <ac:picMkLst>
+            <pc:docMk/>
+            <pc:sldMk cId="1739076269" sldId="274"/>
+            <ac:picMk id="15" creationId="{1B3C31E8-9035-E726-A702-82595BEACBAA}"/>
+          </ac:picMkLst>
+        </pc:picChg>
+        <pc:picChg chg="del">
+          <ac:chgData name="Henri Vasserot" userId="0e3ffa8a8ba4be21" providerId="LiveId" clId="{6648135A-1893-4340-8820-2F0DD70CB280}" dt="2026-06-19T11:44:28.355" v="351" actId="478"/>
+          <ac:picMkLst>
+            <pc:docMk/>
+            <pc:sldMk cId="1739076269" sldId="274"/>
+            <ac:picMk id="17" creationId="{5D08401B-06D2-1E59-C2AF-1017D1B2A30B}"/>
+          </ac:picMkLst>
+        </pc:picChg>
+        <pc:picChg chg="del">
+          <ac:chgData name="Henri Vasserot" userId="0e3ffa8a8ba4be21" providerId="LiveId" clId="{6648135A-1893-4340-8820-2F0DD70CB280}" dt="2026-06-19T11:44:31.590" v="353" actId="478"/>
+          <ac:picMkLst>
+            <pc:docMk/>
+            <pc:sldMk cId="1739076269" sldId="274"/>
+            <ac:picMk id="19" creationId="{46A75427-F7D5-9A7D-4BE4-F6591BFB0EDF}"/>
+          </ac:picMkLst>
+        </pc:picChg>
+        <pc:picChg chg="del">
+          <ac:chgData name="Henri Vasserot" userId="0e3ffa8a8ba4be21" providerId="LiveId" clId="{6648135A-1893-4340-8820-2F0DD70CB280}" dt="2026-06-19T11:44:33.392" v="354" actId="478"/>
+          <ac:picMkLst>
+            <pc:docMk/>
+            <pc:sldMk cId="1739076269" sldId="274"/>
+            <ac:picMk id="21" creationId="{A71F9F13-6AB2-6857-B4B2-D2C2E1D67415}"/>
+          </ac:picMkLst>
+        </pc:picChg>
+      </pc:sldChg>
+    </pc:docChg>
+  </pc:docChgLst>
+</pc:chgInfo>
 </file>
 
 <file path=ppt/slideLayouts/slideLayout1.xml><?xml version="1.0" encoding="utf-8"?>
@@ -3572,7 +4565,7 @@
         <p:spPr>
           <a:xfrm>
             <a:off x="658368" y="621792"/>
-            <a:ext cx="10789920" cy="502920"/>
+            <a:ext cx="10789920" cy="523220"/>
           </a:xfrm>
           <a:prstGeom prst="rect">
             <a:avLst/>
@@ -3585,16 +4578,16 @@
           </a:bodyPr>
           <a:lstStyle/>
           <a:p>
-            <a:pPr algn="l"/>
-            <a:r>
-              <a:rPr sz="2800" b="1" i="0">
-                <a:solidFill>
-                  <a:srgbClr val="232D37"/>
-                </a:solidFill>
-                <a:latin typeface="Aptos"/>
-              </a:rPr>
-              <a:t>Implémentation Python</a:t>
-            </a:r>
+            <a:r>
+              <a:rPr lang="fr-FR" sz="2800" b="1" dirty="0"/>
+              <a:t>Validation empirique du théorème</a:t>
+            </a:r>
+            <a:endParaRPr sz="2800" b="1" i="0" dirty="0">
+              <a:solidFill>
+                <a:srgbClr val="232D37"/>
+              </a:solidFill>
+              <a:latin typeface="Aptos"/>
+            </a:endParaRPr>
           </a:p>
         </p:txBody>
       </p:sp>
@@ -3798,7 +4791,7 @@
           <a:lstStyle/>
           <a:p>
             <a:pPr algn="ctr"/>
-            <a:endParaRPr/>
+            <a:endParaRPr dirty="0"/>
           </a:p>
         </p:txBody>
       </p:sp>
@@ -3811,7 +4804,7 @@
         <p:spPr>
           <a:xfrm>
             <a:off x="6336792" y="1545336"/>
-            <a:ext cx="4882896" cy="256032"/>
+            <a:ext cx="4882896" cy="307777"/>
           </a:xfrm>
           <a:prstGeom prst="rect">
             <a:avLst/>
@@ -3824,29 +4817,194 @@
           </a:bodyPr>
           <a:lstStyle/>
           <a:p>
-            <a:pPr algn="l"/>
-            <a:r>
-              <a:rPr sz="1300" b="1" i="0">
-                <a:solidFill>
-                  <a:srgbClr val="232D37"/>
-                </a:solidFill>
-                <a:latin typeface="Aptos"/>
-              </a:rPr>
-              <a:t>Classe centrale : PolyaUrn</a:t>
-            </a:r>
-          </a:p>
-        </p:txBody>
-      </p:sp>
-      <p:sp>
-        <p:nvSpPr>
-          <p:cNvPr id="14" name="TextBox 13"/>
+            <a:r>
+              <a:rPr lang="fr-FR" sz="1400" b="1" dirty="0"/>
+              <a:t>Objectifs des simulations</a:t>
+            </a:r>
+            <a:endParaRPr sz="1300" b="1" i="0" dirty="0">
+              <a:solidFill>
+                <a:srgbClr val="232D37"/>
+              </a:solidFill>
+              <a:latin typeface="Aptos"/>
+            </a:endParaRPr>
+          </a:p>
+        </p:txBody>
+      </p:sp>
+      <mc:AlternateContent xmlns:mc="http://schemas.openxmlformats.org/markup-compatibility/2006">
+        <mc:Choice xmlns:a14="http://schemas.microsoft.com/office/drawing/2010/main" Requires="a14">
+          <p:sp>
+            <p:nvSpPr>
+              <p:cNvPr id="14" name="TextBox 13"/>
+              <p:cNvSpPr txBox="1"/>
+              <p:nvPr/>
+            </p:nvSpPr>
+            <p:spPr>
+              <a:xfrm>
+                <a:off x="6492240" y="1874519"/>
+                <a:ext cx="4617720" cy="1354217"/>
+              </a:xfrm>
+              <a:prstGeom prst="rect">
+                <a:avLst/>
+              </a:prstGeom>
+              <a:noFill/>
+            </p:spPr>
+            <p:txBody>
+              <a:bodyPr wrap="square">
+                <a:spAutoFit/>
+              </a:bodyPr>
+              <a:lstStyle/>
+              <a:p>
+                <a:pPr>
+                  <a:spcAft>
+                    <a:spcPts val="600"/>
+                  </a:spcAft>
+                  <a:defRPr sz="1800">
+                    <a:solidFill>
+                      <a:srgbClr val="232D37"/>
+                    </a:solidFill>
+                    <a:latin typeface="Aptos"/>
+                  </a:defRPr>
+                </a:pPr>
+                <a:r>
+                  <a:rPr lang="fr-FR" dirty="0"/>
+                  <a:t>Estimer </a:t>
+                </a:r>
+                <a14:m>
+                  <m:oMath xmlns:m="http://schemas.openxmlformats.org/officeDocument/2006/math">
+                    <m:r>
+                      <a:rPr lang="fr-FR" i="1"/>
+                      <m:t>𝑃</m:t>
+                    </m:r>
+                    <m:d>
+                      <m:dPr>
+                        <m:ctrlPr>
+                          <a:rPr lang="fr-FR" i="1"/>
+                        </m:ctrlPr>
+                      </m:dPr>
+                      <m:e>
+                        <m:sSub>
+                          <m:sSubPr>
+                            <m:ctrlPr>
+                              <a:rPr lang="fr-FR" i="1"/>
+                            </m:ctrlPr>
+                          </m:sSubPr>
+                          <m:e>
+                            <m:r>
+                              <a:rPr lang="fr-FR" i="1"/>
+                              <m:t>𝐴</m:t>
+                            </m:r>
+                          </m:e>
+                          <m:sub>
+                            <m:r>
+                              <a:rPr lang="fr-FR" i="1"/>
+                              <m:t>𝑇</m:t>
+                            </m:r>
+                          </m:sub>
+                        </m:sSub>
+                      </m:e>
+                    </m:d>
+                    <m:r>
+                      <a:rPr lang="es-ES" b="0" i="0" smtClean="0">
+                        <a:latin typeface="Cambria Math" panose="02040503050406030204" pitchFamily="18" charset="0"/>
+                      </a:rPr>
+                      <m:t> </m:t>
+                    </m:r>
+                  </m:oMath>
+                </a14:m>
+                <a:r>
+                  <a:rPr lang="fr-FR" dirty="0"/>
+                  <a:t>- horizon fini</a:t>
+                </a:r>
+              </a:p>
+              <a:p>
+                <a:pPr>
+                  <a:spcAft>
+                    <a:spcPts val="600"/>
+                  </a:spcAft>
+                  <a:defRPr sz="1800">
+                    <a:solidFill>
+                      <a:srgbClr val="232D37"/>
+                    </a:solidFill>
+                    <a:latin typeface="Aptos"/>
+                  </a:defRPr>
+                </a:pPr>
+                <a:r>
+                  <a:rPr lang="fr-FR" dirty="0"/>
+                  <a:t>Étudier la sensibilité aux paramètres. </a:t>
+                </a:r>
+              </a:p>
+              <a:p>
+                <a:pPr>
+                  <a:spcAft>
+                    <a:spcPts val="600"/>
+                  </a:spcAft>
+                  <a:defRPr sz="1800">
+                    <a:solidFill>
+                      <a:srgbClr val="232D37"/>
+                    </a:solidFill>
+                    <a:latin typeface="Aptos"/>
+                  </a:defRPr>
+                </a:pPr>
+                <a:r>
+                  <a:rPr lang="fr-FR" dirty="0"/>
+                  <a:t>Vérifier la cohérence avec les prédictions théoriques.</a:t>
+                </a:r>
+                <a:endParaRPr dirty="0">
+                  <a:latin typeface="Aptos"/>
+                </a:endParaRPr>
+              </a:p>
+            </p:txBody>
+          </p:sp>
+        </mc:Choice>
+        <mc:Fallback>
+          <p:sp>
+            <p:nvSpPr>
+              <p:cNvPr id="14" name="TextBox 13"/>
+              <p:cNvSpPr txBox="1">
+                <a:spLocks noRot="1" noChangeAspect="1" noMove="1" noResize="1" noEditPoints="1" noAdjustHandles="1" noChangeArrowheads="1" noChangeShapeType="1" noTextEdit="1"/>
+              </p:cNvSpPr>
+              <p:nvPr/>
+            </p:nvSpPr>
+            <p:spPr>
+              <a:xfrm>
+                <a:off x="6492240" y="1874519"/>
+                <a:ext cx="4617720" cy="1354217"/>
+              </a:xfrm>
+              <a:prstGeom prst="rect">
+                <a:avLst/>
+              </a:prstGeom>
+              <a:blipFill>
+                <a:blip r:embed="rId3"/>
+                <a:stretch>
+                  <a:fillRect l="-1055" t="-1794" b="-6278"/>
+                </a:stretch>
+              </a:blipFill>
+            </p:spPr>
+            <p:txBody>
+              <a:bodyPr/>
+              <a:lstStyle/>
+              <a:p>
+                <a:r>
+                  <a:rPr lang="fr-FR">
+                    <a:noFill/>
+                  </a:rPr>
+                  <a:t> </a:t>
+                </a:r>
+              </a:p>
+            </p:txBody>
+          </p:sp>
+        </mc:Fallback>
+      </mc:AlternateContent>
+      <p:sp>
+        <p:nvSpPr>
+          <p:cNvPr id="15" name="TextBox 14"/>
           <p:cNvSpPr txBox="1"/>
           <p:nvPr/>
         </p:nvSpPr>
         <p:spPr>
           <a:xfrm>
-            <a:off x="6492240" y="1874519"/>
-            <a:ext cx="4617720" cy="2651760"/>
+            <a:off x="11448288" y="6510528"/>
+            <a:ext cx="411480" cy="201168"/>
           </a:xfrm>
           <a:prstGeom prst="rect">
             <a:avLst/>
@@ -3859,112 +5017,35 @@
           </a:bodyPr>
           <a:lstStyle/>
           <a:p>
-            <a:pPr>
-              <a:spcAft>
-                <a:spcPts val="600"/>
-              </a:spcAft>
-              <a:defRPr sz="1800">
-                <a:solidFill>
-                  <a:srgbClr val="232D37"/>
-                </a:solidFill>
-                <a:latin typeface="Aptos"/>
-              </a:defRPr>
-            </a:pPr>
-            <a:r>
-              <a:rPr>
-                <a:latin typeface="Aptos"/>
-              </a:rPr>
-              <a:t>simulation des urnes</a:t>
-            </a:r>
-          </a:p>
-          <a:p>
-            <a:pPr>
-              <a:spcAft>
-                <a:spcPts val="600"/>
-              </a:spcAft>
-              <a:defRPr sz="1800">
-                <a:solidFill>
-                  <a:srgbClr val="232D37"/>
-                </a:solidFill>
-                <a:latin typeface="Aptos"/>
-              </a:defRPr>
-            </a:pPr>
-            <a:r>
-              <a:rPr>
-                <a:latin typeface="Aptos"/>
-              </a:rPr>
-              <a:t>stockage des trajectoires</a:t>
-            </a:r>
-          </a:p>
-          <a:p>
-            <a:pPr>
-              <a:spcAft>
-                <a:spcPts val="600"/>
-              </a:spcAft>
-              <a:defRPr sz="1800">
-                <a:solidFill>
-                  <a:srgbClr val="232D37"/>
-                </a:solidFill>
-                <a:latin typeface="Aptos"/>
-              </a:defRPr>
-            </a:pPr>
-            <a:r>
-              <a:rPr>
-                <a:latin typeface="Aptos"/>
-              </a:rPr>
-              <a:t>détection de domination sur horizon fini</a:t>
-            </a:r>
-          </a:p>
-          <a:p>
-            <a:pPr>
-              <a:spcAft>
-                <a:spcPts val="600"/>
-              </a:spcAft>
-              <a:defRPr sz="1800">
-                <a:solidFill>
-                  <a:srgbClr val="232D37"/>
-                </a:solidFill>
-                <a:latin typeface="Aptos"/>
-              </a:defRPr>
-            </a:pPr>
-            <a:r>
-              <a:rPr>
-                <a:latin typeface="Aptos"/>
-              </a:rPr>
-              <a:t>calcul de temps de stabilisation empirique</a:t>
-            </a:r>
-          </a:p>
-          <a:p>
-            <a:pPr>
-              <a:spcAft>
-                <a:spcPts val="600"/>
-              </a:spcAft>
-              <a:defRPr sz="1800">
-                <a:solidFill>
-                  <a:srgbClr val="232D37"/>
-                </a:solidFill>
-                <a:latin typeface="Aptos"/>
-              </a:defRPr>
-            </a:pPr>
-            <a:r>
-              <a:rPr>
-                <a:latin typeface="Aptos"/>
-              </a:rPr>
-              <a:t>répétition Monte Carlo</a:t>
-            </a:r>
-          </a:p>
-        </p:txBody>
-      </p:sp>
-      <p:sp>
-        <p:nvSpPr>
-          <p:cNvPr id="15" name="TextBox 14"/>
+            <a:pPr algn="r"/>
+            <a:r>
+              <a:rPr sz="850" b="0" i="0">
+                <a:solidFill>
+                  <a:srgbClr val="6E7882"/>
+                </a:solidFill>
+                <a:latin typeface="Aptos"/>
+              </a:rPr>
+              <a:t>10</a:t>
+            </a:r>
+          </a:p>
+        </p:txBody>
+      </p:sp>
+      <p:sp>
+        <p:nvSpPr>
+          <p:cNvPr id="16" name="TextBox 12">
+            <a:extLst>
+              <a:ext uri="{FF2B5EF4-FFF2-40B4-BE49-F238E27FC236}">
+                <a16:creationId xmlns:a16="http://schemas.microsoft.com/office/drawing/2014/main" id="{79CF10F3-DDCE-0D3B-0902-FD1910B7B82D}"/>
+              </a:ext>
+            </a:extLst>
+          </p:cNvPr>
           <p:cNvSpPr txBox="1"/>
           <p:nvPr/>
         </p:nvSpPr>
         <p:spPr>
           <a:xfrm>
-            <a:off x="11448288" y="6510528"/>
-            <a:ext cx="411480" cy="201168"/>
+            <a:off x="6336792" y="3768887"/>
+            <a:ext cx="4882896" cy="369332"/>
           </a:xfrm>
           <a:prstGeom prst="rect">
             <a:avLst/>
@@ -3977,15 +5058,72 @@
           </a:bodyPr>
           <a:lstStyle/>
           <a:p>
-            <a:pPr algn="r"/>
-            <a:r>
-              <a:rPr sz="850" b="0" i="0">
-                <a:solidFill>
-                  <a:srgbClr val="6E7882"/>
-                </a:solidFill>
-                <a:latin typeface="Aptos"/>
-              </a:rPr>
-              <a:t>10</a:t>
+            <a:r>
+              <a:rPr lang="fr-FR" sz="1400" b="1" dirty="0"/>
+              <a:t>Classe centrale : </a:t>
+            </a:r>
+            <a:r>
+              <a:rPr lang="fr-FR" b="1" dirty="0" err="1"/>
+              <a:t>PolyaUrn</a:t>
+            </a:r>
+            <a:endParaRPr sz="1300" b="1" i="0" dirty="0">
+              <a:solidFill>
+                <a:srgbClr val="232D37"/>
+              </a:solidFill>
+              <a:latin typeface="Aptos"/>
+            </a:endParaRPr>
+          </a:p>
+        </p:txBody>
+      </p:sp>
+      <p:sp>
+        <p:nvSpPr>
+          <p:cNvPr id="17" name="ZoneTexte 16">
+            <a:extLst>
+              <a:ext uri="{FF2B5EF4-FFF2-40B4-BE49-F238E27FC236}">
+                <a16:creationId xmlns:a16="http://schemas.microsoft.com/office/drawing/2014/main" id="{25C38BC1-C685-68B8-6969-42BC3508BFCA}"/>
+              </a:ext>
+            </a:extLst>
+          </p:cNvPr>
+          <p:cNvSpPr txBox="1"/>
+          <p:nvPr/>
+        </p:nvSpPr>
+        <p:spPr>
+          <a:xfrm>
+            <a:off x="6492240" y="4136899"/>
+            <a:ext cx="4096314" cy="1200329"/>
+          </a:xfrm>
+          <a:prstGeom prst="rect">
+            <a:avLst/>
+          </a:prstGeom>
+          <a:noFill/>
+        </p:spPr>
+        <p:txBody>
+          <a:bodyPr wrap="none" rtlCol="0">
+            <a:spAutoFit/>
+          </a:bodyPr>
+          <a:lstStyle/>
+          <a:p>
+            <a:r>
+              <a:rPr lang="fr-FR" dirty="0"/>
+              <a:t>Simulation d'une urne généralisée. </a:t>
+            </a:r>
+          </a:p>
+          <a:p>
+            <a:r>
+              <a:rPr lang="fr-FR" dirty="0"/>
+              <a:t>Détection de domination sur horizon fini. </a:t>
+            </a:r>
+          </a:p>
+          <a:p>
+            <a:r>
+              <a:rPr lang="fr-FR" dirty="0"/>
+              <a:t>Répétitions Monte-Carlo. </a:t>
+            </a:r>
+          </a:p>
+          <a:p>
+            <a:r>
+              <a:rPr lang="fr-FR" dirty="0"/>
+              <a:t>Analyse statistique des trajectoires.</a:t>
             </a:r>
           </a:p>
         </p:txBody>
@@ -4003,7 +5141,13 @@
   <p:cSld>
     <p:spTree>
       <p:nvGrpSpPr>
-        <p:cNvPr id="1" name=""/>
+        <p:cNvPr id="1" name="">
+          <a:extLst>
+            <a:ext uri="{FF2B5EF4-FFF2-40B4-BE49-F238E27FC236}">
+              <a16:creationId xmlns:a16="http://schemas.microsoft.com/office/drawing/2014/main" id="{F6C46CB6-302A-BA48-B3B8-8A702089C78C}"/>
+            </a:ext>
+          </a:extLst>
+        </p:cNvPr>
         <p:cNvGrpSpPr/>
         <p:nvPr/>
       </p:nvGrpSpPr>
@@ -4017,7 +5161,13 @@
       </p:grpSpPr>
       <p:sp>
         <p:nvSpPr>
-          <p:cNvPr id="2" name="Rectangle 1"/>
+          <p:cNvPr id="2" name="Rectangle 1">
+            <a:extLst>
+              <a:ext uri="{FF2B5EF4-FFF2-40B4-BE49-F238E27FC236}">
+                <a16:creationId xmlns:a16="http://schemas.microsoft.com/office/drawing/2014/main" id="{6E208FCF-CC4A-AE13-E7E5-AEF75049484E}"/>
+              </a:ext>
+            </a:extLst>
+          </p:cNvPr>
           <p:cNvSpPr/>
           <p:nvPr/>
         </p:nvSpPr>
@@ -4061,7 +5211,13 @@
       </p:sp>
       <p:sp>
         <p:nvSpPr>
-          <p:cNvPr id="3" name="TextBox 2"/>
+          <p:cNvPr id="3" name="TextBox 2">
+            <a:extLst>
+              <a:ext uri="{FF2B5EF4-FFF2-40B4-BE49-F238E27FC236}">
+                <a16:creationId xmlns:a16="http://schemas.microsoft.com/office/drawing/2014/main" id="{051238E8-3DBB-0909-5F74-0868BDEA338C}"/>
+              </a:ext>
+            </a:extLst>
+          </p:cNvPr>
           <p:cNvSpPr txBox="1"/>
           <p:nvPr/>
         </p:nvSpPr>
@@ -4096,7 +5252,13 @@
       </p:sp>
       <p:sp>
         <p:nvSpPr>
-          <p:cNvPr id="4" name="Rectangle 3"/>
+          <p:cNvPr id="4" name="Rectangle 3">
+            <a:extLst>
+              <a:ext uri="{FF2B5EF4-FFF2-40B4-BE49-F238E27FC236}">
+                <a16:creationId xmlns:a16="http://schemas.microsoft.com/office/drawing/2014/main" id="{EDB5E64B-4EF8-9730-5CD0-4BC8B40F842A}"/>
+              </a:ext>
+            </a:extLst>
+          </p:cNvPr>
           <p:cNvSpPr/>
           <p:nvPr/>
         </p:nvSpPr>
@@ -4140,7 +5302,13 @@
       </p:sp>
       <p:sp>
         <p:nvSpPr>
-          <p:cNvPr id="5" name="TextBox 4"/>
+          <p:cNvPr id="5" name="TextBox 4">
+            <a:extLst>
+              <a:ext uri="{FF2B5EF4-FFF2-40B4-BE49-F238E27FC236}">
+                <a16:creationId xmlns:a16="http://schemas.microsoft.com/office/drawing/2014/main" id="{88AB69F0-A9D1-ABC7-FC7C-411B3C567948}"/>
+              </a:ext>
+            </a:extLst>
+          </p:cNvPr>
           <p:cNvSpPr txBox="1"/>
           <p:nvPr/>
         </p:nvSpPr>
@@ -4175,7 +5343,13 @@
       </p:sp>
       <p:pic>
         <p:nvPicPr>
-          <p:cNvPr id="6" name="Picture 5" descr="LOGO_AMU.png"/>
+          <p:cNvPr id="6" name="Picture 5" descr="LOGO_AMU.png">
+            <a:extLst>
+              <a:ext uri="{FF2B5EF4-FFF2-40B4-BE49-F238E27FC236}">
+                <a16:creationId xmlns:a16="http://schemas.microsoft.com/office/drawing/2014/main" id="{EE885CB5-0D67-367D-540B-D7B48CEAB300}"/>
+              </a:ext>
+            </a:extLst>
+          </p:cNvPr>
           <p:cNvPicPr>
             <a:picLocks noChangeAspect="1"/>
           </p:cNvPicPr>
@@ -4199,14 +5373,20 @@
       </p:pic>
       <p:sp>
         <p:nvSpPr>
-          <p:cNvPr id="7" name="TextBox 6"/>
+          <p:cNvPr id="7" name="TextBox 6">
+            <a:extLst>
+              <a:ext uri="{FF2B5EF4-FFF2-40B4-BE49-F238E27FC236}">
+                <a16:creationId xmlns:a16="http://schemas.microsoft.com/office/drawing/2014/main" id="{F1870C9D-BF75-E58F-BF97-C50FAEBA7191}"/>
+              </a:ext>
+            </a:extLst>
+          </p:cNvPr>
           <p:cNvSpPr txBox="1"/>
           <p:nvPr/>
         </p:nvSpPr>
         <p:spPr>
           <a:xfrm>
             <a:off x="658368" y="621792"/>
-            <a:ext cx="10789920" cy="502920"/>
+            <a:ext cx="10789920" cy="954107"/>
           </a:xfrm>
           <a:prstGeom prst="rect">
             <a:avLst/>
@@ -4219,22 +5399,40 @@
           </a:bodyPr>
           <a:lstStyle/>
           <a:p>
+            <a:r>
+              <a:rPr sz="2800" b="1" i="0" dirty="0">
+                <a:solidFill>
+                  <a:srgbClr val="232D37"/>
+                </a:solidFill>
+                <a:latin typeface="Aptos"/>
+              </a:rPr>
+              <a:t>Simulations : </a:t>
+            </a:r>
+            <a:r>
+              <a:rPr lang="fr-FR" sz="2800" b="1" dirty="0"/>
+              <a:t>Trajectoire d'une urne de Pólya généralisée</a:t>
+            </a:r>
+          </a:p>
+          <a:p>
             <a:pPr algn="l"/>
-            <a:r>
-              <a:rPr sz="2800" b="1" i="0">
-                <a:solidFill>
-                  <a:srgbClr val="232D37"/>
-                </a:solidFill>
-                <a:latin typeface="Aptos"/>
-              </a:rPr>
-              <a:t>Simulations : trajectoires individuelles</a:t>
-            </a:r>
-          </a:p>
-        </p:txBody>
-      </p:sp>
-      <p:sp>
-        <p:nvSpPr>
-          <p:cNvPr id="8" name="TextBox 7"/>
+            <a:endParaRPr sz="2800" b="1" i="0" dirty="0">
+              <a:solidFill>
+                <a:srgbClr val="232D37"/>
+              </a:solidFill>
+              <a:latin typeface="Aptos"/>
+            </a:endParaRPr>
+          </a:p>
+        </p:txBody>
+      </p:sp>
+      <p:sp>
+        <p:nvSpPr>
+          <p:cNvPr id="8" name="TextBox 7">
+            <a:extLst>
+              <a:ext uri="{FF2B5EF4-FFF2-40B4-BE49-F238E27FC236}">
+                <a16:creationId xmlns:a16="http://schemas.microsoft.com/office/drawing/2014/main" id="{E4511B5C-75A6-DEB6-8491-632CA032AAEC}"/>
+              </a:ext>
+            </a:extLst>
+          </p:cNvPr>
           <p:cNvSpPr txBox="1"/>
           <p:nvPr/>
         </p:nvSpPr>
@@ -4256,20 +5454,109 @@
           <a:p>
             <a:pPr algn="l"/>
             <a:r>
-              <a:rPr sz="1400" b="0" i="0">
+              <a:rPr sz="1400" b="0" i="0" dirty="0" err="1">
                 <a:solidFill>
                   <a:srgbClr val="5F6973"/>
                 </a:solidFill>
                 <a:latin typeface="Aptos"/>
               </a:rPr>
-              <a:t>Visualiser la dynamique du renforcement</a:t>
+              <a:t>Visualiser</a:t>
+            </a:r>
+            <a:r>
+              <a:rPr sz="1400" b="0" i="0" dirty="0">
+                <a:solidFill>
+                  <a:srgbClr val="5F6973"/>
+                </a:solidFill>
+                <a:latin typeface="Aptos"/>
+              </a:rPr>
+              <a:t> la </a:t>
+            </a:r>
+            <a:r>
+              <a:rPr sz="1400" b="0" i="0" dirty="0" err="1">
+                <a:solidFill>
+                  <a:srgbClr val="5F6973"/>
+                </a:solidFill>
+                <a:latin typeface="Aptos"/>
+              </a:rPr>
+              <a:t>dynamique</a:t>
+            </a:r>
+            <a:r>
+              <a:rPr sz="1400" b="0" i="0" dirty="0">
+                <a:solidFill>
+                  <a:srgbClr val="5F6973"/>
+                </a:solidFill>
+                <a:latin typeface="Aptos"/>
+              </a:rPr>
+              <a:t> du </a:t>
+            </a:r>
+            <a:r>
+              <a:rPr sz="1400" b="0" i="0" dirty="0" err="1">
+                <a:solidFill>
+                  <a:srgbClr val="5F6973"/>
+                </a:solidFill>
+                <a:latin typeface="Aptos"/>
+              </a:rPr>
+              <a:t>renforcement</a:t>
+            </a:r>
+            <a:endParaRPr sz="1400" b="0" i="0" dirty="0">
+              <a:solidFill>
+                <a:srgbClr val="5F6973"/>
+              </a:solidFill>
+              <a:latin typeface="Aptos"/>
+            </a:endParaRPr>
+          </a:p>
+        </p:txBody>
+      </p:sp>
+      <p:sp>
+        <p:nvSpPr>
+          <p:cNvPr id="13" name="TextBox 12">
+            <a:extLst>
+              <a:ext uri="{FF2B5EF4-FFF2-40B4-BE49-F238E27FC236}">
+                <a16:creationId xmlns:a16="http://schemas.microsoft.com/office/drawing/2014/main" id="{32728943-129A-F1B0-2E67-BCFB5FDB64AD}"/>
+              </a:ext>
+            </a:extLst>
+          </p:cNvPr>
+          <p:cNvSpPr txBox="1"/>
+          <p:nvPr/>
+        </p:nvSpPr>
+        <p:spPr>
+          <a:xfrm>
+            <a:off x="11448288" y="6510528"/>
+            <a:ext cx="411480" cy="201168"/>
+          </a:xfrm>
+          <a:prstGeom prst="rect">
+            <a:avLst/>
+          </a:prstGeom>
+          <a:noFill/>
+        </p:spPr>
+        <p:txBody>
+          <a:bodyPr wrap="square">
+            <a:spAutoFit/>
+          </a:bodyPr>
+          <a:lstStyle/>
+          <a:p>
+            <a:pPr algn="r"/>
+            <a:r>
+              <a:rPr sz="850" b="0" i="0">
+                <a:solidFill>
+                  <a:srgbClr val="6E7882"/>
+                </a:solidFill>
+                <a:latin typeface="Aptos"/>
+              </a:rPr>
+              <a:t>11</a:t>
             </a:r>
           </a:p>
         </p:txBody>
       </p:sp>
       <p:pic>
         <p:nvPicPr>
-          <p:cNvPr id="9" name="Picture 8" descr="traj_counts.png"/>
+          <p:cNvPr id="10" name="Image 9">
+            <a:extLst>
+              <a:ext uri="{FF2B5EF4-FFF2-40B4-BE49-F238E27FC236}">
+                <a16:creationId xmlns:a16="http://schemas.microsoft.com/office/drawing/2014/main" id="{F55B1466-64B2-E056-BC2A-FB1C6DF132FE}"/>
+              </a:ext>
+            </a:extLst>
+          </p:cNvPr>
           <p:cNvPicPr>
             <a:picLocks noChangeAspect="1"/>
           </p:cNvPicPr>
@@ -4283,8 +5570,8 @@
         </p:blipFill>
         <p:spPr>
           <a:xfrm>
-            <a:off x="822960" y="1234440"/>
-            <a:ext cx="5394960" cy="3021178"/>
+            <a:off x="5392791" y="1284727"/>
+            <a:ext cx="6361189" cy="4288545"/>
           </a:xfrm>
           <a:prstGeom prst="rect">
             <a:avLst/>
@@ -4293,7 +5580,13 @@
       </p:pic>
       <p:pic>
         <p:nvPicPr>
-          <p:cNvPr id="10" name="Picture 9" descr="multi_prop.png"/>
+          <p:cNvPr id="11" name="Image 10">
+            <a:extLst>
+              <a:ext uri="{FF2B5EF4-FFF2-40B4-BE49-F238E27FC236}">
+                <a16:creationId xmlns:a16="http://schemas.microsoft.com/office/drawing/2014/main" id="{958DB98A-5283-5A5D-84C8-4BE681C33F33}"/>
+              </a:ext>
+            </a:extLst>
+          </p:cNvPr>
           <p:cNvPicPr>
             <a:picLocks noChangeAspect="1"/>
           </p:cNvPicPr>
@@ -4301,122 +5594,27 @@
         </p:nvPicPr>
         <p:blipFill>
           <a:blip r:embed="rId4"/>
+          <a:srcRect b="60540"/>
           <a:stretch>
             <a:fillRect/>
           </a:stretch>
         </p:blipFill>
         <p:spPr>
           <a:xfrm>
-            <a:off x="6400800" y="1234440"/>
-            <a:ext cx="5074920" cy="2841955"/>
+            <a:off x="438020" y="3282891"/>
+            <a:ext cx="4884843" cy="583389"/>
           </a:xfrm>
           <a:prstGeom prst="rect">
             <a:avLst/>
           </a:prstGeom>
         </p:spPr>
       </p:pic>
-      <p:sp>
-        <p:nvSpPr>
-          <p:cNvPr id="11" name="TextBox 10"/>
-          <p:cNvSpPr txBox="1"/>
-          <p:nvPr/>
-        </p:nvSpPr>
-        <p:spPr>
-          <a:xfrm>
-            <a:off x="914400" y="5349240"/>
-            <a:ext cx="5212080" cy="502920"/>
-          </a:xfrm>
-          <a:prstGeom prst="rect">
-            <a:avLst/>
-          </a:prstGeom>
-          <a:noFill/>
-        </p:spPr>
-        <p:txBody>
-          <a:bodyPr wrap="square">
-            <a:spAutoFit/>
-          </a:bodyPr>
-          <a:lstStyle/>
-          <a:p>
-            <a:pPr algn="l"/>
-            <a:r>
-              <a:rPr sz="1500" b="0" i="0">
-                <a:solidFill>
-                  <a:srgbClr val="5F6973"/>
-                </a:solidFill>
-                <a:latin typeface="Aptos"/>
-              </a:rPr>
-              <a:t>Les trajectoires illustrent l’effet cumulatif : les tirages modifient l’état, puis l’état modifie les probabilités futures.</a:t>
-            </a:r>
-          </a:p>
-        </p:txBody>
-      </p:sp>
-      <p:sp>
-        <p:nvSpPr>
-          <p:cNvPr id="12" name="TextBox 11"/>
-          <p:cNvSpPr txBox="1"/>
-          <p:nvPr/>
-        </p:nvSpPr>
-        <p:spPr>
-          <a:xfrm>
-            <a:off x="6492240" y="5349240"/>
-            <a:ext cx="4892040" cy="502920"/>
-          </a:xfrm>
-          <a:prstGeom prst="rect">
-            <a:avLst/>
-          </a:prstGeom>
-          <a:noFill/>
-        </p:spPr>
-        <p:txBody>
-          <a:bodyPr wrap="square">
-            <a:spAutoFit/>
-          </a:bodyPr>
-          <a:lstStyle/>
-          <a:p>
-            <a:r>
-              <a:rPr>
-                <a:latin typeface="Aptos"/>
-              </a:rPr>
-              <a:t>La ligne 1/2 matérialise la frontière de majorité dans la proportion noire.</a:t>
-            </a:r>
-          </a:p>
-        </p:txBody>
-      </p:sp>
-      <p:sp>
-        <p:nvSpPr>
-          <p:cNvPr id="13" name="TextBox 12"/>
-          <p:cNvSpPr txBox="1"/>
-          <p:nvPr/>
-        </p:nvSpPr>
-        <p:spPr>
-          <a:xfrm>
-            <a:off x="11448288" y="6510528"/>
-            <a:ext cx="411480" cy="201168"/>
-          </a:xfrm>
-          <a:prstGeom prst="rect">
-            <a:avLst/>
-          </a:prstGeom>
-          <a:noFill/>
-        </p:spPr>
-        <p:txBody>
-          <a:bodyPr wrap="square">
-            <a:spAutoFit/>
-          </a:bodyPr>
-          <a:lstStyle/>
-          <a:p>
-            <a:pPr algn="r"/>
-            <a:r>
-              <a:rPr sz="850" b="0" i="0">
-                <a:solidFill>
-                  <a:srgbClr val="6E7882"/>
-                </a:solidFill>
-                <a:latin typeface="Aptos"/>
-              </a:rPr>
-              <a:t>11</a:t>
-            </a:r>
-          </a:p>
-        </p:txBody>
-      </p:sp>
     </p:spTree>
+    <p:extLst>
+      <p:ext uri="{BB962C8B-B14F-4D97-AF65-F5344CB8AC3E}">
+        <p14:creationId xmlns:p14="http://schemas.microsoft.com/office/powerpoint/2010/main" val="1739076269"/>
+      </p:ext>
+    </p:extLst>
   </p:cSld>
   <p:clrMapOvr>
     <a:masterClrMapping/>
@@ -4653,7 +5851,7 @@
                 </a:solidFill>
                 <a:latin typeface="Aptos"/>
               </a:rPr>
-              <a:t>Monte Carlo : domination jusqu’à un horizon fini</a:t>
+              <a:t>Simulations : trajectoires individuelles</a:t>
             </a:r>
           </a:p>
         </p:txBody>
@@ -4680,18 +5878,63 @@
           </a:bodyPr>
           <a:lstStyle/>
           <a:p>
-            <a:r>
-              <a:rPr>
-                <a:latin typeface="Aptos"/>
-              </a:rPr>
-              <a:t>Estimer P(A_T), pas prouver P(A)</a:t>
+            <a:pPr algn="l"/>
+            <a:r>
+              <a:rPr sz="1400" b="0" i="0">
+                <a:solidFill>
+                  <a:srgbClr val="5F6973"/>
+                </a:solidFill>
+                <a:latin typeface="Aptos"/>
+              </a:rPr>
+              <a:t>Visualiser la dynamique du renforcement</a:t>
+            </a:r>
+          </a:p>
+        </p:txBody>
+      </p:sp>
+      <p:sp>
+        <p:nvSpPr>
+          <p:cNvPr id="13" name="TextBox 12"/>
+          <p:cNvSpPr txBox="1"/>
+          <p:nvPr/>
+        </p:nvSpPr>
+        <p:spPr>
+          <a:xfrm>
+            <a:off x="11448288" y="6510528"/>
+            <a:ext cx="411480" cy="201168"/>
+          </a:xfrm>
+          <a:prstGeom prst="rect">
+            <a:avLst/>
+          </a:prstGeom>
+          <a:noFill/>
+        </p:spPr>
+        <p:txBody>
+          <a:bodyPr wrap="square">
+            <a:spAutoFit/>
+          </a:bodyPr>
+          <a:lstStyle/>
+          <a:p>
+            <a:pPr algn="r"/>
+            <a:r>
+              <a:rPr sz="850" b="0" i="0">
+                <a:solidFill>
+                  <a:srgbClr val="6E7882"/>
+                </a:solidFill>
+                <a:latin typeface="Aptos"/>
+              </a:rPr>
+              <a:t>11</a:t>
             </a:r>
           </a:p>
         </p:txBody>
       </p:sp>
       <p:pic>
         <p:nvPicPr>
-          <p:cNvPr id="9" name="Picture 8" descr="formula_mc.png"/>
+          <p:cNvPr id="15" name="Image 14">
+            <a:extLst>
+              <a:ext uri="{FF2B5EF4-FFF2-40B4-BE49-F238E27FC236}">
+                <a16:creationId xmlns:a16="http://schemas.microsoft.com/office/drawing/2014/main" id="{F3DAF047-69D4-8FCC-9237-75E40CE0483F}"/>
+              </a:ext>
+            </a:extLst>
+          </p:cNvPr>
           <p:cNvPicPr>
             <a:picLocks noChangeAspect="1"/>
           </p:cNvPicPr>
@@ -4705,8 +5948,8 @@
         </p:blipFill>
         <p:spPr>
           <a:xfrm>
-            <a:off x="1097280" y="1234440"/>
-            <a:ext cx="9875520" cy="1112224"/>
+            <a:off x="5830664" y="1399032"/>
+            <a:ext cx="5378033" cy="3282696"/>
           </a:xfrm>
           <a:prstGeom prst="rect">
             <a:avLst/>
@@ -4715,7 +5958,13 @@
       </p:pic>
       <p:pic>
         <p:nvPicPr>
-          <p:cNvPr id="10" name="Picture 9" descr="monte_carlo_ci.png"/>
+          <p:cNvPr id="17" name="Image 16">
+            <a:extLst>
+              <a:ext uri="{FF2B5EF4-FFF2-40B4-BE49-F238E27FC236}">
+                <a16:creationId xmlns:a16="http://schemas.microsoft.com/office/drawing/2014/main" id="{62D54DCD-F579-8F86-43DC-A689797A7DF1}"/>
+              </a:ext>
+            </a:extLst>
+          </p:cNvPr>
           <p:cNvPicPr>
             <a:picLocks noChangeAspect="1"/>
           </p:cNvPicPr>
@@ -4729,220 +5978,74 @@
         </p:blipFill>
         <p:spPr>
           <a:xfrm>
-            <a:off x="868680" y="2514600"/>
-            <a:ext cx="5303520" cy="2969971"/>
+            <a:off x="304429" y="1399032"/>
+            <a:ext cx="5345604" cy="3262902"/>
           </a:xfrm>
           <a:prstGeom prst="rect">
             <a:avLst/>
           </a:prstGeom>
         </p:spPr>
       </p:pic>
-      <p:sp>
-        <p:nvSpPr>
-          <p:cNvPr id="11" name="Rounded Rectangle 10"/>
-          <p:cNvSpPr/>
-          <p:nvPr/>
-        </p:nvSpPr>
-        <p:spPr>
-          <a:xfrm>
-            <a:off x="6446520" y="2606040"/>
-            <a:ext cx="4892040" cy="2697480"/>
-          </a:xfrm>
-          <a:prstGeom prst="roundRect">
-            <a:avLst/>
-          </a:prstGeom>
-          <a:solidFill>
-            <a:srgbClr val="F0F4F7"/>
-          </a:solidFill>
-          <a:ln>
-            <a:solidFill>
-              <a:srgbClr val="D2DAE1"/>
-            </a:solidFill>
-          </a:ln>
-        </p:spPr>
-        <p:style>
-          <a:lnRef idx="1">
-            <a:schemeClr val="accent1"/>
-          </a:lnRef>
-          <a:fillRef idx="3">
-            <a:schemeClr val="accent1"/>
-          </a:fillRef>
-          <a:effectRef idx="2">
-            <a:schemeClr val="accent1"/>
-          </a:effectRef>
-          <a:fontRef idx="minor">
-            <a:schemeClr val="lt1"/>
-          </a:fontRef>
-        </p:style>
-        <p:txBody>
-          <a:bodyPr rtlCol="0" anchor="ctr"/>
-          <a:lstStyle/>
-          <a:p>
-            <a:pPr algn="ctr"/>
-            <a:endParaRPr/>
-          </a:p>
-        </p:txBody>
-      </p:sp>
-      <p:sp>
-        <p:nvSpPr>
-          <p:cNvPr id="12" name="TextBox 11"/>
-          <p:cNvSpPr txBox="1"/>
-          <p:nvPr/>
-        </p:nvSpPr>
-        <p:spPr>
-          <a:xfrm>
-            <a:off x="6611112" y="2734056"/>
-            <a:ext cx="4562855" cy="256032"/>
-          </a:xfrm>
-          <a:prstGeom prst="rect">
-            <a:avLst/>
-          </a:prstGeom>
-          <a:noFill/>
-        </p:spPr>
-        <p:txBody>
-          <a:bodyPr wrap="square">
-            <a:spAutoFit/>
-          </a:bodyPr>
-          <a:lstStyle/>
-          <a:p>
-            <a:pPr algn="l"/>
-            <a:r>
-              <a:rPr sz="1300" b="1" i="0">
-                <a:solidFill>
-                  <a:srgbClr val="232D37"/>
-                </a:solidFill>
-                <a:latin typeface="Aptos"/>
-              </a:rPr>
-              <a:t>Régime expérimental</a:t>
-            </a:r>
-          </a:p>
-        </p:txBody>
-      </p:sp>
-      <p:sp>
-        <p:nvSpPr>
-          <p:cNvPr id="13" name="TextBox 12"/>
-          <p:cNvSpPr txBox="1"/>
-          <p:nvPr/>
-        </p:nvSpPr>
-        <p:spPr>
-          <a:xfrm>
-            <a:off x="6766560" y="3063240"/>
-            <a:ext cx="4297680" cy="1554480"/>
-          </a:xfrm>
-          <a:prstGeom prst="rect">
-            <a:avLst/>
-          </a:prstGeom>
-          <a:noFill/>
-        </p:spPr>
-        <p:txBody>
-          <a:bodyPr wrap="square">
-            <a:spAutoFit/>
-          </a:bodyPr>
-          <a:lstStyle/>
-          <a:p>
-            <a:r>
-              <a:rPr>
-                <a:latin typeface="Aptos"/>
-              </a:rPr>
-              <a:t>(B₀,W₀,m_b,m_w) = (10,5,2,1)</a:t>
-            </a:r>
-          </a:p>
-          <a:p>
-            <a:r>
-              <a:rPr>
-                <a:latin typeface="Aptos"/>
-              </a:rPr>
-              <a:t>M = 1000 simulations indépendantes</a:t>
-            </a:r>
-          </a:p>
-          <a:p>
-            <a:r>
-              <a:rPr>
-                <a:latin typeface="Aptos"/>
-              </a:rPr>
-              <a:t>T = 1000 tirages</a:t>
-            </a:r>
-          </a:p>
-          <a:p>
-            <a:r>
-              <a:rPr>
-                <a:latin typeface="Aptos"/>
-              </a:rPr>
-              <a:t>estimation reportée : p̂_T,M ≈ 0,972</a:t>
-            </a:r>
-          </a:p>
-        </p:txBody>
-      </p:sp>
-      <p:sp>
-        <p:nvSpPr>
-          <p:cNvPr id="14" name="TextBox 13"/>
-          <p:cNvSpPr txBox="1"/>
-          <p:nvPr/>
-        </p:nvSpPr>
-        <p:spPr>
-          <a:xfrm>
-            <a:off x="6766560" y="4983480"/>
-            <a:ext cx="4297680" cy="411480"/>
-          </a:xfrm>
-          <a:prstGeom prst="rect">
-            <a:avLst/>
-          </a:prstGeom>
-          <a:noFill/>
-        </p:spPr>
-        <p:txBody>
-          <a:bodyPr wrap="square">
-            <a:spAutoFit/>
-          </a:bodyPr>
-          <a:lstStyle/>
-          <a:p>
-            <a:pPr algn="l"/>
-            <a:r>
-              <a:rPr sz="1500" b="0" i="0">
-                <a:solidFill>
-                  <a:srgbClr val="5F6973"/>
-                </a:solidFill>
-                <a:latin typeface="Aptos"/>
-              </a:rPr>
-              <a:t>Interprétation : régime fortement favorable au noir, cohérent avec le théorème.</a:t>
-            </a:r>
-          </a:p>
-        </p:txBody>
-      </p:sp>
-      <p:sp>
-        <p:nvSpPr>
-          <p:cNvPr id="15" name="TextBox 14"/>
-          <p:cNvSpPr txBox="1"/>
-          <p:nvPr/>
-        </p:nvSpPr>
-        <p:spPr>
-          <a:xfrm>
-            <a:off x="11448288" y="6510528"/>
-            <a:ext cx="411480" cy="201168"/>
-          </a:xfrm>
-          <a:prstGeom prst="rect">
-            <a:avLst/>
-          </a:prstGeom>
-          <a:noFill/>
-        </p:spPr>
-        <p:txBody>
-          <a:bodyPr wrap="square">
-            <a:spAutoFit/>
-          </a:bodyPr>
-          <a:lstStyle/>
-          <a:p>
-            <a:pPr algn="r"/>
-            <a:r>
-              <a:rPr sz="850" b="0" i="0">
-                <a:solidFill>
-                  <a:srgbClr val="6E7882"/>
-                </a:solidFill>
-                <a:latin typeface="Aptos"/>
-              </a:rPr>
-              <a:t>12</a:t>
-            </a:r>
-          </a:p>
-        </p:txBody>
-      </p:sp>
+      <p:pic>
+        <p:nvPicPr>
+          <p:cNvPr id="19" name="Image 18">
+            <a:extLst>
+              <a:ext uri="{FF2B5EF4-FFF2-40B4-BE49-F238E27FC236}">
+                <a16:creationId xmlns:a16="http://schemas.microsoft.com/office/drawing/2014/main" id="{2FB52941-BA07-3CBB-4CB7-17CE1C488A69}"/>
+              </a:ext>
+            </a:extLst>
+          </p:cNvPr>
+          <p:cNvPicPr>
+            <a:picLocks noChangeAspect="1"/>
+          </p:cNvPicPr>
+          <p:nvPr/>
+        </p:nvPicPr>
+        <p:blipFill>
+          <a:blip r:embed="rId5"/>
+          <a:stretch>
+            <a:fillRect/>
+          </a:stretch>
+        </p:blipFill>
+        <p:spPr>
+          <a:xfrm>
+            <a:off x="765190" y="4670932"/>
+            <a:ext cx="4884843" cy="1478408"/>
+          </a:xfrm>
+          <a:prstGeom prst="rect">
+            <a:avLst/>
+          </a:prstGeom>
+        </p:spPr>
+      </p:pic>
+      <p:pic>
+        <p:nvPicPr>
+          <p:cNvPr id="21" name="Image 20">
+            <a:extLst>
+              <a:ext uri="{FF2B5EF4-FFF2-40B4-BE49-F238E27FC236}">
+                <a16:creationId xmlns:a16="http://schemas.microsoft.com/office/drawing/2014/main" id="{2F69C162-1D0B-67AC-9A32-E0137A0CFD37}"/>
+              </a:ext>
+            </a:extLst>
+          </p:cNvPr>
+          <p:cNvPicPr>
+            <a:picLocks noChangeAspect="1"/>
+          </p:cNvPicPr>
+          <p:nvPr/>
+        </p:nvPicPr>
+        <p:blipFill>
+          <a:blip r:embed="rId6"/>
+          <a:stretch>
+            <a:fillRect/>
+          </a:stretch>
+        </p:blipFill>
+        <p:spPr>
+          <a:xfrm>
+            <a:off x="6336229" y="5284362"/>
+            <a:ext cx="5112059" cy="906126"/>
+          </a:xfrm>
+          <a:prstGeom prst="rect">
+            <a:avLst/>
+          </a:prstGeom>
+        </p:spPr>
+      </p:pic>
     </p:spTree>
   </p:cSld>
   <p:clrMapOvr>
@@ -4956,7 +6059,13 @@
   <p:cSld>
     <p:spTree>
       <p:nvGrpSpPr>
-        <p:cNvPr id="1" name=""/>
+        <p:cNvPr id="1" name="">
+          <a:extLst>
+            <a:ext uri="{FF2B5EF4-FFF2-40B4-BE49-F238E27FC236}">
+              <a16:creationId xmlns:a16="http://schemas.microsoft.com/office/drawing/2014/main" id="{285E7B60-C334-2C61-B9F4-4046649502A5}"/>
+            </a:ext>
+          </a:extLst>
+        </p:cNvPr>
         <p:cNvGrpSpPr/>
         <p:nvPr/>
       </p:nvGrpSpPr>
@@ -4970,7 +6079,13 @@
       </p:grpSpPr>
       <p:sp>
         <p:nvSpPr>
-          <p:cNvPr id="2" name="Rectangle 1"/>
+          <p:cNvPr id="2" name="Rectangle 1">
+            <a:extLst>
+              <a:ext uri="{FF2B5EF4-FFF2-40B4-BE49-F238E27FC236}">
+                <a16:creationId xmlns:a16="http://schemas.microsoft.com/office/drawing/2014/main" id="{7A3313CC-6B55-F0B4-A966-762A0B9645D8}"/>
+              </a:ext>
+            </a:extLst>
+          </p:cNvPr>
           <p:cNvSpPr/>
           <p:nvPr/>
         </p:nvSpPr>
@@ -5014,7 +6129,13 @@
       </p:sp>
       <p:sp>
         <p:nvSpPr>
-          <p:cNvPr id="3" name="TextBox 2"/>
+          <p:cNvPr id="3" name="TextBox 2">
+            <a:extLst>
+              <a:ext uri="{FF2B5EF4-FFF2-40B4-BE49-F238E27FC236}">
+                <a16:creationId xmlns:a16="http://schemas.microsoft.com/office/drawing/2014/main" id="{423DCFFC-7912-0298-99E6-E0EB15153D37}"/>
+              </a:ext>
+            </a:extLst>
+          </p:cNvPr>
           <p:cNvSpPr txBox="1"/>
           <p:nvPr/>
         </p:nvSpPr>
@@ -5049,7 +6170,13 @@
       </p:sp>
       <p:sp>
         <p:nvSpPr>
-          <p:cNvPr id="4" name="Rectangle 3"/>
+          <p:cNvPr id="4" name="Rectangle 3">
+            <a:extLst>
+              <a:ext uri="{FF2B5EF4-FFF2-40B4-BE49-F238E27FC236}">
+                <a16:creationId xmlns:a16="http://schemas.microsoft.com/office/drawing/2014/main" id="{13706574-5E33-F824-A105-D11FE8EAD5E9}"/>
+              </a:ext>
+            </a:extLst>
+          </p:cNvPr>
           <p:cNvSpPr/>
           <p:nvPr/>
         </p:nvSpPr>
@@ -5093,7 +6220,13 @@
       </p:sp>
       <p:sp>
         <p:nvSpPr>
-          <p:cNvPr id="5" name="TextBox 4"/>
+          <p:cNvPr id="5" name="TextBox 4">
+            <a:extLst>
+              <a:ext uri="{FF2B5EF4-FFF2-40B4-BE49-F238E27FC236}">
+                <a16:creationId xmlns:a16="http://schemas.microsoft.com/office/drawing/2014/main" id="{000FEE96-D01A-6EDE-9CBF-D6B8EE014D9C}"/>
+              </a:ext>
+            </a:extLst>
+          </p:cNvPr>
           <p:cNvSpPr txBox="1"/>
           <p:nvPr/>
         </p:nvSpPr>
@@ -5128,7 +6261,13 @@
       </p:sp>
       <p:pic>
         <p:nvPicPr>
-          <p:cNvPr id="6" name="Picture 5" descr="LOGO_AMU.png"/>
+          <p:cNvPr id="6" name="Picture 5" descr="LOGO_AMU.png">
+            <a:extLst>
+              <a:ext uri="{FF2B5EF4-FFF2-40B4-BE49-F238E27FC236}">
+                <a16:creationId xmlns:a16="http://schemas.microsoft.com/office/drawing/2014/main" id="{AC4A90C5-EDCF-402A-AC4E-64B2867AA4E4}"/>
+              </a:ext>
+            </a:extLst>
+          </p:cNvPr>
           <p:cNvPicPr>
             <a:picLocks noChangeAspect="1"/>
           </p:cNvPicPr>
@@ -5152,14 +6291,20 @@
       </p:pic>
       <p:sp>
         <p:nvSpPr>
-          <p:cNvPr id="7" name="TextBox 6"/>
+          <p:cNvPr id="7" name="TextBox 6">
+            <a:extLst>
+              <a:ext uri="{FF2B5EF4-FFF2-40B4-BE49-F238E27FC236}">
+                <a16:creationId xmlns:a16="http://schemas.microsoft.com/office/drawing/2014/main" id="{CF78AF6D-2AAB-067F-826A-5E482A500F5A}"/>
+              </a:ext>
+            </a:extLst>
+          </p:cNvPr>
           <p:cNvSpPr txBox="1"/>
           <p:nvPr/>
         </p:nvSpPr>
         <p:spPr>
           <a:xfrm>
             <a:off x="658368" y="621792"/>
-            <a:ext cx="10789920" cy="502920"/>
+            <a:ext cx="10789920" cy="523220"/>
           </a:xfrm>
           <a:prstGeom prst="rect">
             <a:avLst/>
@@ -5172,22 +6317,28 @@
           </a:bodyPr>
           <a:lstStyle/>
           <a:p>
-            <a:pPr algn="l"/>
-            <a:r>
-              <a:rPr sz="2800" b="1" i="0">
-                <a:solidFill>
-                  <a:srgbClr val="232D37"/>
-                </a:solidFill>
-                <a:latin typeface="Aptos"/>
-              </a:rPr>
-              <a:t>Sensibilité aux paramètres</a:t>
-            </a:r>
-          </a:p>
-        </p:txBody>
-      </p:sp>
-      <p:sp>
-        <p:nvSpPr>
-          <p:cNvPr id="8" name="TextBox 7"/>
+            <a:r>
+              <a:rPr lang="fr-FR" sz="2800" b="1" dirty="0"/>
+              <a:t>Monte Carlo : domination jusqu'à un horizon fini</a:t>
+            </a:r>
+            <a:endParaRPr sz="2800" b="1" i="0" dirty="0">
+              <a:solidFill>
+                <a:srgbClr val="232D37"/>
+              </a:solidFill>
+              <a:latin typeface="Aptos"/>
+            </a:endParaRPr>
+          </a:p>
+        </p:txBody>
+      </p:sp>
+      <p:sp>
+        <p:nvSpPr>
+          <p:cNvPr id="8" name="TextBox 7">
+            <a:extLst>
+              <a:ext uri="{FF2B5EF4-FFF2-40B4-BE49-F238E27FC236}">
+                <a16:creationId xmlns:a16="http://schemas.microsoft.com/office/drawing/2014/main" id="{CEE9B923-A318-FF64-6CC7-69C123840806}"/>
+              </a:ext>
+            </a:extLst>
+          </p:cNvPr>
           <p:cNvSpPr txBox="1"/>
           <p:nvPr/>
         </p:nvSpPr>
@@ -5215,14 +6366,61 @@
                 </a:solidFill>
                 <a:latin typeface="Aptos"/>
               </a:rPr>
-              <a:t>Avantage initial et renforcement blanc</a:t>
+              <a:t>Visualiser la dynamique du renforcement</a:t>
+            </a:r>
+          </a:p>
+        </p:txBody>
+      </p:sp>
+      <p:sp>
+        <p:nvSpPr>
+          <p:cNvPr id="13" name="TextBox 12">
+            <a:extLst>
+              <a:ext uri="{FF2B5EF4-FFF2-40B4-BE49-F238E27FC236}">
+                <a16:creationId xmlns:a16="http://schemas.microsoft.com/office/drawing/2014/main" id="{3F625A36-8B8B-E549-5D65-EA0D632318CC}"/>
+              </a:ext>
+            </a:extLst>
+          </p:cNvPr>
+          <p:cNvSpPr txBox="1"/>
+          <p:nvPr/>
+        </p:nvSpPr>
+        <p:spPr>
+          <a:xfrm>
+            <a:off x="11448288" y="6510528"/>
+            <a:ext cx="411480" cy="201168"/>
+          </a:xfrm>
+          <a:prstGeom prst="rect">
+            <a:avLst/>
+          </a:prstGeom>
+          <a:noFill/>
+        </p:spPr>
+        <p:txBody>
+          <a:bodyPr wrap="square">
+            <a:spAutoFit/>
+          </a:bodyPr>
+          <a:lstStyle/>
+          <a:p>
+            <a:pPr algn="r"/>
+            <a:r>
+              <a:rPr sz="850" b="0" i="0">
+                <a:solidFill>
+                  <a:srgbClr val="6E7882"/>
+                </a:solidFill>
+                <a:latin typeface="Aptos"/>
+              </a:rPr>
+              <a:t>11</a:t>
             </a:r>
           </a:p>
         </p:txBody>
       </p:sp>
       <p:pic>
         <p:nvPicPr>
-          <p:cNvPr id="9" name="Picture 8" descr="sensitivity_initial.png"/>
+          <p:cNvPr id="10" name="Image 9">
+            <a:extLst>
+              <a:ext uri="{FF2B5EF4-FFF2-40B4-BE49-F238E27FC236}">
+                <a16:creationId xmlns:a16="http://schemas.microsoft.com/office/drawing/2014/main" id="{A72D92F6-97B5-04E9-3BFE-8586AB4D849F}"/>
+              </a:ext>
+            </a:extLst>
+          </p:cNvPr>
           <p:cNvPicPr>
             <a:picLocks noChangeAspect="1"/>
           </p:cNvPicPr>
@@ -5236,136 +6434,233 @@
         </p:blipFill>
         <p:spPr>
           <a:xfrm>
-            <a:off x="822960" y="1325880"/>
-            <a:ext cx="5212080" cy="2918765"/>
+            <a:off x="1304298" y="2239775"/>
+            <a:ext cx="3163395" cy="2857963"/>
           </a:xfrm>
           <a:prstGeom prst="rect">
             <a:avLst/>
           </a:prstGeom>
         </p:spPr>
       </p:pic>
+      <mc:AlternateContent xmlns:mc="http://schemas.openxmlformats.org/markup-compatibility/2006">
+        <mc:Choice xmlns:a14="http://schemas.microsoft.com/office/drawing/2010/main" Requires="a14">
+          <p:sp>
+            <p:nvSpPr>
+              <p:cNvPr id="11" name="ZoneTexte 10">
+                <a:extLst>
+                  <a:ext uri="{FF2B5EF4-FFF2-40B4-BE49-F238E27FC236}">
+                    <a16:creationId xmlns:a16="http://schemas.microsoft.com/office/drawing/2014/main" id="{F0A05157-4E1C-60AE-9DD8-35D2F0A8DA63}"/>
+                  </a:ext>
+                </a:extLst>
+              </p:cNvPr>
+              <p:cNvSpPr txBox="1"/>
+              <p:nvPr/>
+            </p:nvSpPr>
+            <p:spPr>
+              <a:xfrm>
+                <a:off x="5863856" y="2722446"/>
+                <a:ext cx="5337544" cy="1200329"/>
+              </a:xfrm>
+              <a:prstGeom prst="rect">
+                <a:avLst/>
+              </a:prstGeom>
+              <a:noFill/>
+            </p:spPr>
+            <p:txBody>
+              <a:bodyPr wrap="square" rtlCol="0">
+                <a:spAutoFit/>
+              </a:bodyPr>
+              <a:lstStyle/>
+              <a:p>
+                <a:r>
+                  <a:rPr lang="fr-FR" b="1" dirty="0">
+                    <a:solidFill>
+                      <a:schemeClr val="tx2">
+                        <a:lumMod val="60000"/>
+                        <a:lumOff val="40000"/>
+                      </a:schemeClr>
+                    </a:solidFill>
+                  </a:rPr>
+                  <a:t>Dans ce régime favorable, la domination noire est observée dans plus de 97 % des simulations. </a:t>
+                </a:r>
+              </a:p>
+              <a:p>
+                <a:r>
+                  <a:rPr lang="fr-FR" b="1" dirty="0">
+                    <a:solidFill>
+                      <a:schemeClr val="tx2">
+                        <a:lumMod val="60000"/>
+                        <a:lumOff val="40000"/>
+                      </a:schemeClr>
+                    </a:solidFill>
+                  </a:rPr>
+                  <a:t>Ce résultat est cohérent avec le théorème de Janson qui affirme que </a:t>
+                </a:r>
+                <a14:m>
+                  <m:oMath xmlns:m="http://schemas.openxmlformats.org/officeDocument/2006/math">
+                    <m:r>
+                      <a:rPr lang="fr-FR" b="1" i="1" smtClean="0">
+                        <a:solidFill>
+                          <a:schemeClr val="tx2">
+                            <a:lumMod val="60000"/>
+                            <a:lumOff val="40000"/>
+                          </a:schemeClr>
+                        </a:solidFill>
+                        <a:latin typeface="Cambria Math" panose="02040503050406030204" pitchFamily="18" charset="0"/>
+                      </a:rPr>
+                      <m:t>𝑷</m:t>
+                    </m:r>
+                    <m:d>
+                      <m:dPr>
+                        <m:ctrlPr>
+                          <a:rPr lang="fr-FR" b="1" i="1">
+                            <a:solidFill>
+                              <a:schemeClr val="tx2">
+                                <a:lumMod val="60000"/>
+                                <a:lumOff val="40000"/>
+                              </a:schemeClr>
+                            </a:solidFill>
+                            <a:latin typeface="Cambria Math" panose="02040503050406030204" pitchFamily="18" charset="0"/>
+                          </a:rPr>
+                        </m:ctrlPr>
+                      </m:dPr>
+                      <m:e>
+                        <m:r>
+                          <a:rPr lang="fr-FR" b="1" i="1" smtClean="0">
+                            <a:solidFill>
+                              <a:schemeClr val="tx2">
+                                <a:lumMod val="60000"/>
+                                <a:lumOff val="40000"/>
+                              </a:schemeClr>
+                            </a:solidFill>
+                            <a:latin typeface="Cambria Math" panose="02040503050406030204" pitchFamily="18" charset="0"/>
+                          </a:rPr>
+                          <m:t>𝑨</m:t>
+                        </m:r>
+                      </m:e>
+                    </m:d>
+                    <m:r>
+                      <a:rPr lang="fr-FR" b="1" smtClean="0">
+                        <a:solidFill>
+                          <a:schemeClr val="tx2">
+                            <a:lumMod val="60000"/>
+                            <a:lumOff val="40000"/>
+                          </a:schemeClr>
+                        </a:solidFill>
+                        <a:latin typeface="Cambria Math" panose="02040503050406030204" pitchFamily="18" charset="0"/>
+                      </a:rPr>
+                      <m:t>&gt;</m:t>
+                    </m:r>
+                    <m:r>
+                      <a:rPr lang="fr-FR" b="1" i="1">
+                        <a:solidFill>
+                          <a:schemeClr val="tx2">
+                            <a:lumMod val="60000"/>
+                            <a:lumOff val="40000"/>
+                          </a:schemeClr>
+                        </a:solidFill>
+                        <a:latin typeface="Cambria Math" panose="02040503050406030204" pitchFamily="18" charset="0"/>
+                      </a:rPr>
+                      <m:t>𝟎</m:t>
+                    </m:r>
+                  </m:oMath>
+                </a14:m>
+                <a:r>
+                  <a:rPr lang="fr-FR" b="1" dirty="0">
+                    <a:solidFill>
+                      <a:schemeClr val="tx2">
+                        <a:lumMod val="60000"/>
+                        <a:lumOff val="40000"/>
+                      </a:schemeClr>
+                    </a:solidFill>
+                  </a:rPr>
+                  <a:t>.</a:t>
+                </a:r>
+              </a:p>
+            </p:txBody>
+          </p:sp>
+        </mc:Choice>
+        <mc:Fallback>
+          <p:sp>
+            <p:nvSpPr>
+              <p:cNvPr id="11" name="ZoneTexte 10">
+                <a:extLst>
+                  <a:ext uri="{FF2B5EF4-FFF2-40B4-BE49-F238E27FC236}">
+                    <a16:creationId xmlns:a16="http://schemas.microsoft.com/office/drawing/2014/main" id="{F0A05157-4E1C-60AE-9DD8-35D2F0A8DA63}"/>
+                  </a:ext>
+                </a:extLst>
+              </p:cNvPr>
+              <p:cNvSpPr txBox="1">
+                <a:spLocks noRot="1" noChangeAspect="1" noMove="1" noResize="1" noEditPoints="1" noAdjustHandles="1" noChangeArrowheads="1" noChangeShapeType="1" noTextEdit="1"/>
+              </p:cNvSpPr>
+              <p:nvPr/>
+            </p:nvSpPr>
+            <p:spPr>
+              <a:xfrm>
+                <a:off x="5863856" y="2722446"/>
+                <a:ext cx="5337544" cy="1200329"/>
+              </a:xfrm>
+              <a:prstGeom prst="rect">
+                <a:avLst/>
+              </a:prstGeom>
+              <a:blipFill>
+                <a:blip r:embed="rId4"/>
+                <a:stretch>
+                  <a:fillRect l="-1027" t="-3061" b="-7653"/>
+                </a:stretch>
+              </a:blipFill>
+            </p:spPr>
+            <p:txBody>
+              <a:bodyPr/>
+              <a:lstStyle/>
+              <a:p>
+                <a:r>
+                  <a:rPr lang="fr-FR">
+                    <a:noFill/>
+                  </a:rPr>
+                  <a:t> </a:t>
+                </a:r>
+              </a:p>
+            </p:txBody>
+          </p:sp>
+        </mc:Fallback>
+      </mc:AlternateContent>
       <p:pic>
         <p:nvPicPr>
-          <p:cNvPr id="10" name="Picture 9" descr="sensitivity_mw.png"/>
+          <p:cNvPr id="14" name="Image 13">
+            <a:extLst>
+              <a:ext uri="{FF2B5EF4-FFF2-40B4-BE49-F238E27FC236}">
+                <a16:creationId xmlns:a16="http://schemas.microsoft.com/office/drawing/2014/main" id="{6B9EA206-E23C-56EB-9E96-F7DDA29E9B4E}"/>
+              </a:ext>
+            </a:extLst>
+          </p:cNvPr>
           <p:cNvPicPr>
             <a:picLocks noChangeAspect="1"/>
           </p:cNvPicPr>
           <p:nvPr/>
         </p:nvPicPr>
         <p:blipFill>
-          <a:blip r:embed="rId4"/>
+          <a:blip r:embed="rId5"/>
           <a:stretch>
             <a:fillRect/>
           </a:stretch>
         </p:blipFill>
         <p:spPr>
           <a:xfrm>
-            <a:off x="6355080" y="1325880"/>
-            <a:ext cx="5212080" cy="2918765"/>
+            <a:off x="1409614" y="1511161"/>
+            <a:ext cx="2952762" cy="519686"/>
           </a:xfrm>
           <a:prstGeom prst="rect">
             <a:avLst/>
           </a:prstGeom>
         </p:spPr>
       </p:pic>
-      <p:sp>
-        <p:nvSpPr>
-          <p:cNvPr id="11" name="TextBox 10"/>
-          <p:cNvSpPr txBox="1"/>
-          <p:nvPr/>
-        </p:nvSpPr>
-        <p:spPr>
-          <a:xfrm>
-            <a:off x="960120" y="5413248"/>
-            <a:ext cx="4892040" cy="457200"/>
-          </a:xfrm>
-          <a:prstGeom prst="rect">
-            <a:avLst/>
-          </a:prstGeom>
-          <a:noFill/>
-        </p:spPr>
-        <p:txBody>
-          <a:bodyPr wrap="square">
-            <a:spAutoFit/>
-          </a:bodyPr>
-          <a:lstStyle/>
-          <a:p>
-            <a:r>
-              <a:rPr>
-                <a:latin typeface="Aptos"/>
-              </a:rPr>
-              <a:t>Un écart initial plus grand éloigne la trajectoire de la frontière B = W.</a:t>
-            </a:r>
-          </a:p>
-        </p:txBody>
-      </p:sp>
-      <p:sp>
-        <p:nvSpPr>
-          <p:cNvPr id="12" name="TextBox 11"/>
-          <p:cNvSpPr txBox="1"/>
-          <p:nvPr/>
-        </p:nvSpPr>
-        <p:spPr>
-          <a:xfrm>
-            <a:off x="6492240" y="5413248"/>
-            <a:ext cx="4892040" cy="502920"/>
-          </a:xfrm>
-          <a:prstGeom prst="rect">
-            <a:avLst/>
-          </a:prstGeom>
-          <a:noFill/>
-        </p:spPr>
-        <p:txBody>
-          <a:bodyPr wrap="square">
-            <a:spAutoFit/>
-          </a:bodyPr>
-          <a:lstStyle/>
-          <a:p>
-            <a:r>
-              <a:rPr>
-                <a:latin typeface="Aptos"/>
-              </a:rPr>
-              <a:t>Quand m_w augmente, chaque tirage blanc devient plus dangereux pour la domination noire.</a:t>
-            </a:r>
-          </a:p>
-        </p:txBody>
-      </p:sp>
-      <p:sp>
-        <p:nvSpPr>
-          <p:cNvPr id="13" name="TextBox 12"/>
-          <p:cNvSpPr txBox="1"/>
-          <p:nvPr/>
-        </p:nvSpPr>
-        <p:spPr>
-          <a:xfrm>
-            <a:off x="11448288" y="6510528"/>
-            <a:ext cx="411480" cy="201168"/>
-          </a:xfrm>
-          <a:prstGeom prst="rect">
-            <a:avLst/>
-          </a:prstGeom>
-          <a:noFill/>
-        </p:spPr>
-        <p:txBody>
-          <a:bodyPr wrap="square">
-            <a:spAutoFit/>
-          </a:bodyPr>
-          <a:lstStyle/>
-          <a:p>
-            <a:pPr algn="r"/>
-            <a:r>
-              <a:rPr sz="850" b="0" i="0">
-                <a:solidFill>
-                  <a:srgbClr val="6E7882"/>
-                </a:solidFill>
-                <a:latin typeface="Aptos"/>
-              </a:rPr>
-              <a:t>13</a:t>
-            </a:r>
-          </a:p>
-        </p:txBody>
-      </p:sp>
     </p:spTree>
+    <p:extLst>
+      <p:ext uri="{BB962C8B-B14F-4D97-AF65-F5344CB8AC3E}">
+        <p14:creationId xmlns:p14="http://schemas.microsoft.com/office/powerpoint/2010/main" val="3612442224"/>
+      </p:ext>
+    </p:extLst>
   </p:cSld>
   <p:clrMapOvr>
     <a:masterClrMapping/>
@@ -5378,7 +6673,13 @@
   <p:cSld>
     <p:spTree>
       <p:nvGrpSpPr>
-        <p:cNvPr id="1" name=""/>
+        <p:cNvPr id="1" name="">
+          <a:extLst>
+            <a:ext uri="{FF2B5EF4-FFF2-40B4-BE49-F238E27FC236}">
+              <a16:creationId xmlns:a16="http://schemas.microsoft.com/office/drawing/2014/main" id="{2484ED7E-AD9E-15CE-C5FF-2A51E909F4D6}"/>
+            </a:ext>
+          </a:extLst>
+        </p:cNvPr>
         <p:cNvGrpSpPr/>
         <p:nvPr/>
       </p:nvGrpSpPr>
@@ -5392,7 +6693,13 @@
       </p:grpSpPr>
       <p:sp>
         <p:nvSpPr>
-          <p:cNvPr id="2" name="Rectangle 1"/>
+          <p:cNvPr id="2" name="Rectangle 1">
+            <a:extLst>
+              <a:ext uri="{FF2B5EF4-FFF2-40B4-BE49-F238E27FC236}">
+                <a16:creationId xmlns:a16="http://schemas.microsoft.com/office/drawing/2014/main" id="{05AFB01A-3DAA-B856-8C04-99D497446AD4}"/>
+              </a:ext>
+            </a:extLst>
+          </p:cNvPr>
           <p:cNvSpPr/>
           <p:nvPr/>
         </p:nvSpPr>
@@ -5436,7 +6743,13 @@
       </p:sp>
       <p:sp>
         <p:nvSpPr>
-          <p:cNvPr id="3" name="TextBox 2"/>
+          <p:cNvPr id="3" name="TextBox 2">
+            <a:extLst>
+              <a:ext uri="{FF2B5EF4-FFF2-40B4-BE49-F238E27FC236}">
+                <a16:creationId xmlns:a16="http://schemas.microsoft.com/office/drawing/2014/main" id="{CA8935ED-925D-B1A8-4275-D6341069871C}"/>
+              </a:ext>
+            </a:extLst>
+          </p:cNvPr>
           <p:cNvSpPr txBox="1"/>
           <p:nvPr/>
         </p:nvSpPr>
@@ -5464,14 +6777,20 @@
                 </a:solidFill>
                 <a:latin typeface="Aptos"/>
               </a:rPr>
-              <a:t>Urnes de Pólya généralisées — domination permanente · Discussion</a:t>
-            </a:r>
-          </a:p>
-        </p:txBody>
-      </p:sp>
-      <p:sp>
-        <p:nvSpPr>
-          <p:cNvPr id="4" name="Rectangle 3"/>
+              <a:t>Urnes de Pólya généralisées — domination permanente · Simulations</a:t>
+            </a:r>
+          </a:p>
+        </p:txBody>
+      </p:sp>
+      <p:sp>
+        <p:nvSpPr>
+          <p:cNvPr id="4" name="Rectangle 3">
+            <a:extLst>
+              <a:ext uri="{FF2B5EF4-FFF2-40B4-BE49-F238E27FC236}">
+                <a16:creationId xmlns:a16="http://schemas.microsoft.com/office/drawing/2014/main" id="{04A0827B-CC23-8BE3-71C9-BB505419999E}"/>
+              </a:ext>
+            </a:extLst>
+          </p:cNvPr>
           <p:cNvSpPr/>
           <p:nvPr/>
         </p:nvSpPr>
@@ -5515,7 +6834,13 @@
       </p:sp>
       <p:sp>
         <p:nvSpPr>
-          <p:cNvPr id="5" name="TextBox 4"/>
+          <p:cNvPr id="5" name="TextBox 4">
+            <a:extLst>
+              <a:ext uri="{FF2B5EF4-FFF2-40B4-BE49-F238E27FC236}">
+                <a16:creationId xmlns:a16="http://schemas.microsoft.com/office/drawing/2014/main" id="{0E55A44A-58F0-88E3-6BE4-A445905C185C}"/>
+              </a:ext>
+            </a:extLst>
+          </p:cNvPr>
           <p:cNvSpPr txBox="1"/>
           <p:nvPr/>
         </p:nvSpPr>
@@ -5550,7 +6875,13 @@
       </p:sp>
       <p:pic>
         <p:nvPicPr>
-          <p:cNvPr id="6" name="Picture 5" descr="LOGO_AMU.png"/>
+          <p:cNvPr id="6" name="Picture 5" descr="LOGO_AMU.png">
+            <a:extLst>
+              <a:ext uri="{FF2B5EF4-FFF2-40B4-BE49-F238E27FC236}">
+                <a16:creationId xmlns:a16="http://schemas.microsoft.com/office/drawing/2014/main" id="{4590036B-4100-9CBB-3925-EE72C9BD9F92}"/>
+              </a:ext>
+            </a:extLst>
+          </p:cNvPr>
           <p:cNvPicPr>
             <a:picLocks noChangeAspect="1"/>
           </p:cNvPicPr>
@@ -5574,14 +6905,20 @@
       </p:pic>
       <p:sp>
         <p:nvSpPr>
-          <p:cNvPr id="7" name="TextBox 6"/>
+          <p:cNvPr id="7" name="TextBox 6">
+            <a:extLst>
+              <a:ext uri="{FF2B5EF4-FFF2-40B4-BE49-F238E27FC236}">
+                <a16:creationId xmlns:a16="http://schemas.microsoft.com/office/drawing/2014/main" id="{A1F7082B-7C49-6729-5B6C-FB9FE666301C}"/>
+              </a:ext>
+            </a:extLst>
+          </p:cNvPr>
           <p:cNvSpPr txBox="1"/>
           <p:nvPr/>
         </p:nvSpPr>
         <p:spPr>
           <a:xfrm>
             <a:off x="658368" y="621792"/>
-            <a:ext cx="10789920" cy="502920"/>
+            <a:ext cx="10789920" cy="523220"/>
           </a:xfrm>
           <a:prstGeom prst="rect">
             <a:avLst/>
@@ -5594,29 +6931,35 @@
           </a:bodyPr>
           <a:lstStyle/>
           <a:p>
-            <a:pPr algn="l"/>
-            <a:r>
-              <a:rPr sz="2800" b="1" i="0">
-                <a:solidFill>
-                  <a:srgbClr val="232D37"/>
-                </a:solidFill>
-                <a:latin typeface="Aptos"/>
-              </a:rPr>
-              <a:t>Validation numérique et limites</a:t>
-            </a:r>
-          </a:p>
-        </p:txBody>
-      </p:sp>
-      <p:sp>
-        <p:nvSpPr>
-          <p:cNvPr id="8" name="TextBox 7"/>
+            <a:r>
+              <a:rPr lang="fr-FR" sz="2800" b="1" dirty="0"/>
+              <a:t>Sensibilité aux paramètres</a:t>
+            </a:r>
+            <a:endParaRPr sz="2800" b="1" i="0" dirty="0">
+              <a:solidFill>
+                <a:srgbClr val="232D37"/>
+              </a:solidFill>
+              <a:latin typeface="Aptos"/>
+            </a:endParaRPr>
+          </a:p>
+        </p:txBody>
+      </p:sp>
+      <p:sp>
+        <p:nvSpPr>
+          <p:cNvPr id="8" name="TextBox 7">
+            <a:extLst>
+              <a:ext uri="{FF2B5EF4-FFF2-40B4-BE49-F238E27FC236}">
+                <a16:creationId xmlns:a16="http://schemas.microsoft.com/office/drawing/2014/main" id="{EA6376E3-1A07-2F72-C525-9F2CC978F00D}"/>
+              </a:ext>
+            </a:extLst>
+          </p:cNvPr>
           <p:cNvSpPr txBox="1"/>
           <p:nvPr/>
         </p:nvSpPr>
         <p:spPr>
           <a:xfrm>
             <a:off x="685800" y="1078992"/>
-            <a:ext cx="10515600" cy="320040"/>
+            <a:ext cx="10515600" cy="307777"/>
           </a:xfrm>
           <a:prstGeom prst="rect">
             <a:avLst/>
@@ -5629,75 +6972,35 @@
           </a:bodyPr>
           <a:lstStyle/>
           <a:p>
-            <a:pPr algn="l"/>
-            <a:r>
-              <a:rPr sz="1400" b="0" i="0">
-                <a:solidFill>
-                  <a:srgbClr val="5F6973"/>
-                </a:solidFill>
-                <a:latin typeface="Aptos"/>
-              </a:rPr>
-              <a:t>Ce que montrent les simulations, ce qu’elles ne prouvent pas</a:t>
-            </a:r>
-          </a:p>
-        </p:txBody>
-      </p:sp>
-      <p:sp>
-        <p:nvSpPr>
-          <p:cNvPr id="9" name="Rounded Rectangle 8"/>
-          <p:cNvSpPr/>
-          <p:nvPr/>
-        </p:nvSpPr>
-        <p:spPr>
-          <a:xfrm>
-            <a:off x="822960" y="1508760"/>
-            <a:ext cx="5120640" cy="4160520"/>
-          </a:xfrm>
-          <a:prstGeom prst="roundRect">
-            <a:avLst/>
-          </a:prstGeom>
-          <a:solidFill>
-            <a:srgbClr val="F0F4F7"/>
-          </a:solidFill>
-          <a:ln>
-            <a:solidFill>
-              <a:srgbClr val="D2DAE1"/>
-            </a:solidFill>
-          </a:ln>
-        </p:spPr>
-        <p:style>
-          <a:lnRef idx="1">
-            <a:schemeClr val="accent1"/>
-          </a:lnRef>
-          <a:fillRef idx="3">
-            <a:schemeClr val="accent1"/>
-          </a:fillRef>
-          <a:effectRef idx="2">
-            <a:schemeClr val="accent1"/>
-          </a:effectRef>
-          <a:fontRef idx="minor">
-            <a:schemeClr val="lt1"/>
-          </a:fontRef>
-        </p:style>
-        <p:txBody>
-          <a:bodyPr rtlCol="0" anchor="ctr"/>
-          <a:lstStyle/>
-          <a:p>
-            <a:pPr algn="ctr"/>
-            <a:endParaRPr/>
-          </a:p>
-        </p:txBody>
-      </p:sp>
-      <p:sp>
-        <p:nvSpPr>
-          <p:cNvPr id="10" name="TextBox 9"/>
+            <a:r>
+              <a:rPr lang="fr-FR" sz="1400" dirty="0"/>
+              <a:t>Quels paramètres favorisent ou défavorisent la domination permanente ?</a:t>
+            </a:r>
+            <a:endParaRPr sz="1400" b="0" i="0" dirty="0">
+              <a:solidFill>
+                <a:srgbClr val="5F6973"/>
+              </a:solidFill>
+              <a:latin typeface="Aptos"/>
+            </a:endParaRPr>
+          </a:p>
+        </p:txBody>
+      </p:sp>
+      <p:sp>
+        <p:nvSpPr>
+          <p:cNvPr id="13" name="TextBox 12">
+            <a:extLst>
+              <a:ext uri="{FF2B5EF4-FFF2-40B4-BE49-F238E27FC236}">
+                <a16:creationId xmlns:a16="http://schemas.microsoft.com/office/drawing/2014/main" id="{742824E8-E8A8-0AB3-AB17-DE786758ACD0}"/>
+              </a:ext>
+            </a:extLst>
+          </p:cNvPr>
           <p:cNvSpPr txBox="1"/>
           <p:nvPr/>
         </p:nvSpPr>
         <p:spPr>
           <a:xfrm>
-            <a:off x="987552" y="1636776"/>
-            <a:ext cx="4791455" cy="256032"/>
+            <a:off x="11448288" y="6510528"/>
+            <a:ext cx="411480" cy="201168"/>
           </a:xfrm>
           <a:prstGeom prst="rect">
             <a:avLst/>
@@ -5710,311 +7013,6 @@
           </a:bodyPr>
           <a:lstStyle/>
           <a:p>
-            <a:pPr algn="l"/>
-            <a:r>
-              <a:rPr sz="1300" b="1" i="0">
-                <a:solidFill>
-                  <a:srgbClr val="232D37"/>
-                </a:solidFill>
-                <a:latin typeface="Aptos"/>
-              </a:rPr>
-              <a:t>Apport des simulations</a:t>
-            </a:r>
-          </a:p>
-        </p:txBody>
-      </p:sp>
-      <p:sp>
-        <p:nvSpPr>
-          <p:cNvPr id="11" name="TextBox 10"/>
-          <p:cNvSpPr txBox="1"/>
-          <p:nvPr/>
-        </p:nvSpPr>
-        <p:spPr>
-          <a:xfrm>
-            <a:off x="1097280" y="1993392"/>
-            <a:ext cx="4572000" cy="2423160"/>
-          </a:xfrm>
-          <a:prstGeom prst="rect">
-            <a:avLst/>
-          </a:prstGeom>
-          <a:noFill/>
-        </p:spPr>
-        <p:txBody>
-          <a:bodyPr wrap="square">
-            <a:spAutoFit/>
-          </a:bodyPr>
-          <a:lstStyle/>
-          <a:p>
-            <a:pPr>
-              <a:spcAft>
-                <a:spcPts val="600"/>
-              </a:spcAft>
-              <a:defRPr sz="1800">
-                <a:solidFill>
-                  <a:srgbClr val="232D37"/>
-                </a:solidFill>
-                <a:latin typeface="Aptos"/>
-              </a:defRPr>
-            </a:pPr>
-            <a:r>
-              <a:rPr>
-                <a:latin typeface="Aptos"/>
-              </a:rPr>
-              <a:t>quantifier des probabilités à horizon fini</a:t>
-            </a:r>
-          </a:p>
-          <a:p>
-            <a:pPr>
-              <a:spcAft>
-                <a:spcPts val="600"/>
-              </a:spcAft>
-              <a:defRPr sz="1800">
-                <a:solidFill>
-                  <a:srgbClr val="232D37"/>
-                </a:solidFill>
-                <a:latin typeface="Aptos"/>
-              </a:defRPr>
-            </a:pPr>
-            <a:r>
-              <a:rPr>
-                <a:latin typeface="Aptos"/>
-              </a:rPr>
-              <a:t>observer la sensibilité aux paramètres</a:t>
-            </a:r>
-          </a:p>
-          <a:p>
-            <a:pPr>
-              <a:spcAft>
-                <a:spcPts val="600"/>
-              </a:spcAft>
-              <a:defRPr sz="1800">
-                <a:solidFill>
-                  <a:srgbClr val="232D37"/>
-                </a:solidFill>
-                <a:latin typeface="Aptos"/>
-              </a:defRPr>
-            </a:pPr>
-            <a:r>
-              <a:rPr>
-                <a:latin typeface="Aptos"/>
-              </a:rPr>
-              <a:t>repérer le rôle des fluctuations précoces</a:t>
-            </a:r>
-          </a:p>
-          <a:p>
-            <a:pPr>
-              <a:spcAft>
-                <a:spcPts val="600"/>
-              </a:spcAft>
-              <a:defRPr sz="1800">
-                <a:solidFill>
-                  <a:srgbClr val="232D37"/>
-                </a:solidFill>
-                <a:latin typeface="Aptos"/>
-              </a:defRPr>
-            </a:pPr>
-            <a:r>
-              <a:rPr>
-                <a:latin typeface="Aptos"/>
-              </a:rPr>
-              <a:t>tester la cohérence théorie / expérience</a:t>
-            </a:r>
-          </a:p>
-        </p:txBody>
-      </p:sp>
-      <p:sp>
-        <p:nvSpPr>
-          <p:cNvPr id="12" name="Rounded Rectangle 11"/>
-          <p:cNvSpPr/>
-          <p:nvPr/>
-        </p:nvSpPr>
-        <p:spPr>
-          <a:xfrm>
-            <a:off x="6309360" y="1508760"/>
-            <a:ext cx="5074920" cy="4160520"/>
-          </a:xfrm>
-          <a:prstGeom prst="roundRect">
-            <a:avLst/>
-          </a:prstGeom>
-          <a:solidFill>
-            <a:srgbClr val="F0F4F7"/>
-          </a:solidFill>
-          <a:ln>
-            <a:solidFill>
-              <a:srgbClr val="D2DAE1"/>
-            </a:solidFill>
-          </a:ln>
-        </p:spPr>
-        <p:style>
-          <a:lnRef idx="1">
-            <a:schemeClr val="accent1"/>
-          </a:lnRef>
-          <a:fillRef idx="3">
-            <a:schemeClr val="accent1"/>
-          </a:fillRef>
-          <a:effectRef idx="2">
-            <a:schemeClr val="accent1"/>
-          </a:effectRef>
-          <a:fontRef idx="minor">
-            <a:schemeClr val="lt1"/>
-          </a:fontRef>
-        </p:style>
-        <p:txBody>
-          <a:bodyPr rtlCol="0" anchor="ctr"/>
-          <a:lstStyle/>
-          <a:p>
-            <a:pPr algn="ctr"/>
-            <a:endParaRPr/>
-          </a:p>
-        </p:txBody>
-      </p:sp>
-      <p:sp>
-        <p:nvSpPr>
-          <p:cNvPr id="13" name="TextBox 12"/>
-          <p:cNvSpPr txBox="1"/>
-          <p:nvPr/>
-        </p:nvSpPr>
-        <p:spPr>
-          <a:xfrm>
-            <a:off x="6473952" y="1636776"/>
-            <a:ext cx="4745736" cy="256032"/>
-          </a:xfrm>
-          <a:prstGeom prst="rect">
-            <a:avLst/>
-          </a:prstGeom>
-          <a:noFill/>
-        </p:spPr>
-        <p:txBody>
-          <a:bodyPr wrap="square">
-            <a:spAutoFit/>
-          </a:bodyPr>
-          <a:lstStyle/>
-          <a:p>
-            <a:pPr algn="l"/>
-            <a:r>
-              <a:rPr sz="1300" b="1" i="0">
-                <a:solidFill>
-                  <a:srgbClr val="232D37"/>
-                </a:solidFill>
-                <a:latin typeface="Aptos"/>
-              </a:rPr>
-              <a:t>Limites</a:t>
-            </a:r>
-          </a:p>
-        </p:txBody>
-      </p:sp>
-      <p:sp>
-        <p:nvSpPr>
-          <p:cNvPr id="14" name="TextBox 13"/>
-          <p:cNvSpPr txBox="1"/>
-          <p:nvPr/>
-        </p:nvSpPr>
-        <p:spPr>
-          <a:xfrm>
-            <a:off x="6583680" y="1993392"/>
-            <a:ext cx="4572000" cy="2423160"/>
-          </a:xfrm>
-          <a:prstGeom prst="rect">
-            <a:avLst/>
-          </a:prstGeom>
-          <a:noFill/>
-        </p:spPr>
-        <p:txBody>
-          <a:bodyPr wrap="square">
-            <a:spAutoFit/>
-          </a:bodyPr>
-          <a:lstStyle/>
-          <a:p>
-            <a:r>
-              <a:rPr>
-                <a:latin typeface="Aptos"/>
-              </a:rPr>
-              <a:t>temps fini : A_T ≠ A</a:t>
-            </a:r>
-          </a:p>
-          <a:p>
-            <a:r>
-              <a:rPr>
-                <a:latin typeface="Aptos"/>
-              </a:rPr>
-              <a:t>nombre fini de trajectoires</a:t>
-            </a:r>
-          </a:p>
-          <a:p>
-            <a:r>
-              <a:rPr>
-                <a:latin typeface="Aptos"/>
-              </a:rPr>
-              <a:t>incertitude Monte Carlo</a:t>
-            </a:r>
-          </a:p>
-          <a:p>
-            <a:r>
-              <a:rPr>
-                <a:latin typeface="Aptos"/>
-              </a:rPr>
-              <a:t>la preuve de P(A)&gt;0 reste mathématique</a:t>
-            </a:r>
-          </a:p>
-        </p:txBody>
-      </p:sp>
-      <p:sp>
-        <p:nvSpPr>
-          <p:cNvPr id="15" name="TextBox 14"/>
-          <p:cNvSpPr txBox="1"/>
-          <p:nvPr/>
-        </p:nvSpPr>
-        <p:spPr>
-          <a:xfrm>
-            <a:off x="1051560" y="5806440"/>
-            <a:ext cx="10058400" cy="320040"/>
-          </a:xfrm>
-          <a:prstGeom prst="rect">
-            <a:avLst/>
-          </a:prstGeom>
-          <a:noFill/>
-        </p:spPr>
-        <p:txBody>
-          <a:bodyPr wrap="square">
-            <a:spAutoFit/>
-          </a:bodyPr>
-          <a:lstStyle/>
-          <a:p>
-            <a:pPr algn="ctr"/>
-            <a:r>
-              <a:rPr sz="1800" b="1" i="0">
-                <a:solidFill>
-                  <a:srgbClr val="0097D6"/>
-                </a:solidFill>
-                <a:latin typeface="Aptos"/>
-              </a:rPr>
-              <a:t>Message central : la simulation illustre le mécanisme ; le théorème établit l’événement infini.</a:t>
-            </a:r>
-          </a:p>
-        </p:txBody>
-      </p:sp>
-      <p:sp>
-        <p:nvSpPr>
-          <p:cNvPr id="16" name="TextBox 15"/>
-          <p:cNvSpPr txBox="1"/>
-          <p:nvPr/>
-        </p:nvSpPr>
-        <p:spPr>
-          <a:xfrm>
-            <a:off x="11448288" y="6510528"/>
-            <a:ext cx="411480" cy="201168"/>
-          </a:xfrm>
-          <a:prstGeom prst="rect">
-            <a:avLst/>
-          </a:prstGeom>
-          <a:noFill/>
-        </p:spPr>
-        <p:txBody>
-          <a:bodyPr wrap="square">
-            <a:spAutoFit/>
-          </a:bodyPr>
-          <a:lstStyle/>
-          <a:p>
             <a:pPr algn="r"/>
             <a:r>
               <a:rPr sz="850" b="0" i="0">
@@ -6023,12 +7021,137 @@
                 </a:solidFill>
                 <a:latin typeface="Aptos"/>
               </a:rPr>
-              <a:t>14</a:t>
-            </a:r>
-          </a:p>
-        </p:txBody>
-      </p:sp>
+              <a:t>11</a:t>
+            </a:r>
+          </a:p>
+        </p:txBody>
+      </p:sp>
+      <p:pic>
+        <p:nvPicPr>
+          <p:cNvPr id="10" name="Image 9">
+            <a:extLst>
+              <a:ext uri="{FF2B5EF4-FFF2-40B4-BE49-F238E27FC236}">
+                <a16:creationId xmlns:a16="http://schemas.microsoft.com/office/drawing/2014/main" id="{C807F026-A4C4-2A8F-0155-9B05CA4FE5EC}"/>
+              </a:ext>
+            </a:extLst>
+          </p:cNvPr>
+          <p:cNvPicPr>
+            <a:picLocks noChangeAspect="1"/>
+          </p:cNvPicPr>
+          <p:nvPr/>
+        </p:nvPicPr>
+        <p:blipFill>
+          <a:blip r:embed="rId3"/>
+          <a:stretch>
+            <a:fillRect/>
+          </a:stretch>
+        </p:blipFill>
+        <p:spPr>
+          <a:xfrm>
+            <a:off x="6464703" y="2739360"/>
+            <a:ext cx="5395065" cy="3643152"/>
+          </a:xfrm>
+          <a:prstGeom prst="rect">
+            <a:avLst/>
+          </a:prstGeom>
+        </p:spPr>
+      </p:pic>
+      <p:pic>
+        <p:nvPicPr>
+          <p:cNvPr id="16" name="Image 15">
+            <a:extLst>
+              <a:ext uri="{FF2B5EF4-FFF2-40B4-BE49-F238E27FC236}">
+                <a16:creationId xmlns:a16="http://schemas.microsoft.com/office/drawing/2014/main" id="{D67F825E-A4ED-CAEE-12C6-ABD738E1A25B}"/>
+              </a:ext>
+            </a:extLst>
+          </p:cNvPr>
+          <p:cNvPicPr>
+            <a:picLocks noChangeAspect="1"/>
+          </p:cNvPicPr>
+          <p:nvPr/>
+        </p:nvPicPr>
+        <p:blipFill>
+          <a:blip r:embed="rId4"/>
+          <a:stretch>
+            <a:fillRect/>
+          </a:stretch>
+        </p:blipFill>
+        <p:spPr>
+          <a:xfrm>
+            <a:off x="193562" y="1520025"/>
+            <a:ext cx="7041490" cy="1272650"/>
+          </a:xfrm>
+          <a:prstGeom prst="rect">
+            <a:avLst/>
+          </a:prstGeom>
+        </p:spPr>
+      </p:pic>
+      <p:pic>
+        <p:nvPicPr>
+          <p:cNvPr id="20" name="Image 19">
+            <a:extLst>
+              <a:ext uri="{FF2B5EF4-FFF2-40B4-BE49-F238E27FC236}">
+                <a16:creationId xmlns:a16="http://schemas.microsoft.com/office/drawing/2014/main" id="{6252D39E-271F-B0DA-BB9D-8C041F836750}"/>
+              </a:ext>
+            </a:extLst>
+          </p:cNvPr>
+          <p:cNvPicPr>
+            <a:picLocks noChangeAspect="1"/>
+          </p:cNvPicPr>
+          <p:nvPr/>
+        </p:nvPicPr>
+        <p:blipFill>
+          <a:blip r:embed="rId5"/>
+          <a:stretch>
+            <a:fillRect/>
+          </a:stretch>
+        </p:blipFill>
+        <p:spPr>
+          <a:xfrm>
+            <a:off x="7409231" y="1602212"/>
+            <a:ext cx="4039057" cy="722160"/>
+          </a:xfrm>
+          <a:prstGeom prst="rect">
+            <a:avLst/>
+          </a:prstGeom>
+        </p:spPr>
+      </p:pic>
+      <p:pic>
+        <p:nvPicPr>
+          <p:cNvPr id="23" name="Image 22">
+            <a:extLst>
+              <a:ext uri="{FF2B5EF4-FFF2-40B4-BE49-F238E27FC236}">
+                <a16:creationId xmlns:a16="http://schemas.microsoft.com/office/drawing/2014/main" id="{19EE9E78-C84C-A717-9CE7-EB829C16F0F5}"/>
+              </a:ext>
+            </a:extLst>
+          </p:cNvPr>
+          <p:cNvPicPr>
+            <a:picLocks noChangeAspect="1"/>
+          </p:cNvPicPr>
+          <p:nvPr/>
+        </p:nvPicPr>
+        <p:blipFill>
+          <a:blip r:embed="rId6"/>
+          <a:stretch>
+            <a:fillRect/>
+          </a:stretch>
+        </p:blipFill>
+        <p:spPr>
+          <a:xfrm>
+            <a:off x="998767" y="4202972"/>
+            <a:ext cx="4932970" cy="712154"/>
+          </a:xfrm>
+          <a:prstGeom prst="rect">
+            <a:avLst/>
+          </a:prstGeom>
+        </p:spPr>
+      </p:pic>
     </p:spTree>
+    <p:extLst>
+      <p:ext uri="{BB962C8B-B14F-4D97-AF65-F5344CB8AC3E}">
+        <p14:creationId xmlns:p14="http://schemas.microsoft.com/office/powerpoint/2010/main" val="3045275682"/>
+      </p:ext>
+    </p:extLst>
   </p:cSld>
   <p:clrMapOvr>
     <a:masterClrMapping/>
@@ -6127,7 +7250,7 @@
                 </a:solidFill>
                 <a:latin typeface="Aptos"/>
               </a:rPr>
-              <a:t>Urnes de Pólya généralisées — domination permanente · Conclusion</a:t>
+              <a:t>Urnes de Pólya généralisées — domination permanente · Discussion</a:t>
             </a:r>
           </a:p>
         </p:txBody>
@@ -6265,7 +7388,7 @@
                 </a:solidFill>
                 <a:latin typeface="Aptos"/>
               </a:rPr>
-              <a:t>Conclusion</a:t>
+              <a:t>Validation numérique et limites</a:t>
             </a:r>
           </a:p>
         </p:txBody>
@@ -6300,7 +7423,7 @@
                 </a:solidFill>
                 <a:latin typeface="Aptos"/>
               </a:rPr>
-              <a:t>Synthèse du TER et ouvertures</a:t>
+              <a:t>Ce que montrent les simulations, ce qu’elles ne prouvent pas</a:t>
             </a:r>
           </a:p>
         </p:txBody>
@@ -6313,8 +7436,8 @@
         </p:nvSpPr>
         <p:spPr>
           <a:xfrm>
-            <a:off x="777240" y="1417320"/>
-            <a:ext cx="5532120" cy="4297680"/>
+            <a:off x="822960" y="1508760"/>
+            <a:ext cx="5120640" cy="4160520"/>
           </a:xfrm>
           <a:prstGeom prst="roundRect">
             <a:avLst/>
@@ -6359,8 +7482,8 @@
         </p:nvSpPr>
         <p:spPr>
           <a:xfrm>
-            <a:off x="941832" y="1545336"/>
-            <a:ext cx="5202936" cy="256032"/>
+            <a:off x="987552" y="1636776"/>
+            <a:ext cx="4791455" cy="256032"/>
           </a:xfrm>
           <a:prstGeom prst="rect">
             <a:avLst/>
@@ -6381,110 +7504,211 @@
                 </a:solidFill>
                 <a:latin typeface="Aptos"/>
               </a:rPr>
-              <a:t>Bilan</a:t>
-            </a:r>
-          </a:p>
-        </p:txBody>
-      </p:sp>
-      <p:sp>
-        <p:nvSpPr>
-          <p:cNvPr id="11" name="TextBox 10"/>
-          <p:cNvSpPr txBox="1"/>
-          <p:nvPr/>
-        </p:nvSpPr>
-        <p:spPr>
-          <a:xfrm>
-            <a:off x="1097280" y="1874519"/>
-            <a:ext cx="4983480" cy="2697480"/>
-          </a:xfrm>
-          <a:prstGeom prst="rect">
-            <a:avLst/>
-          </a:prstGeom>
-          <a:noFill/>
-        </p:spPr>
-        <p:txBody>
-          <a:bodyPr wrap="square">
-            <a:spAutoFit/>
-          </a:bodyPr>
-          <a:lstStyle/>
-          <a:p>
-            <a:pPr>
-              <a:spcAft>
-                <a:spcPts val="600"/>
-              </a:spcAft>
-              <a:defRPr sz="1800">
-                <a:solidFill>
-                  <a:srgbClr val="232D37"/>
-                </a:solidFill>
-                <a:latin typeface="Aptos"/>
-              </a:defRPr>
-            </a:pPr>
-            <a:r>
-              <a:rPr>
-                <a:latin typeface="Aptos"/>
-              </a:rPr>
-              <a:t>modèle discret simple mais comportement riche</a:t>
-            </a:r>
-          </a:p>
-          <a:p>
-            <a:pPr>
-              <a:spcAft>
-                <a:spcPts val="600"/>
-              </a:spcAft>
-              <a:defRPr sz="1800">
-                <a:solidFill>
-                  <a:srgbClr val="232D37"/>
-                </a:solidFill>
-                <a:latin typeface="Aptos"/>
-              </a:defRPr>
-            </a:pPr>
-            <a:r>
-              <a:rPr>
-                <a:latin typeface="Aptos"/>
-              </a:rPr>
-              <a:t>domination permanente : propriété trajectorielle forte</a:t>
-            </a:r>
-          </a:p>
-          <a:p>
-            <a:pPr>
-              <a:spcAft>
-                <a:spcPts val="600"/>
-              </a:spcAft>
-              <a:defRPr sz="1800">
-                <a:solidFill>
-                  <a:srgbClr val="232D37"/>
-                </a:solidFill>
-                <a:latin typeface="Aptos"/>
-              </a:defRPr>
-            </a:pPr>
-            <a:r>
-              <a:rPr>
-                <a:latin typeface="Aptos"/>
-              </a:rPr>
-              <a:t>preuve via plongement en temps continu et processus de branchement</a:t>
-            </a:r>
-          </a:p>
-          <a:p>
-            <a:pPr>
-              <a:spcAft>
-                <a:spcPts val="600"/>
-              </a:spcAft>
-              <a:defRPr sz="1800">
-                <a:solidFill>
-                  <a:srgbClr val="232D37"/>
-                </a:solidFill>
-                <a:latin typeface="Aptos"/>
-              </a:defRPr>
-            </a:pPr>
-            <a:r>
-              <a:rPr>
-                <a:latin typeface="Aptos"/>
-              </a:rPr>
-              <a:t>simulations : lecture empirique à horizon fini</a:t>
-            </a:r>
-          </a:p>
-        </p:txBody>
-      </p:sp>
+              <a:t>Apport des simulations</a:t>
+            </a:r>
+          </a:p>
+        </p:txBody>
+      </p:sp>
+      <mc:AlternateContent xmlns:mc="http://schemas.openxmlformats.org/markup-compatibility/2006">
+        <mc:Choice xmlns:a14="http://schemas.microsoft.com/office/drawing/2010/main" Requires="a14">
+          <p:sp>
+            <p:nvSpPr>
+              <p:cNvPr id="11" name="TextBox 10"/>
+              <p:cNvSpPr txBox="1"/>
+              <p:nvPr/>
+            </p:nvSpPr>
+            <p:spPr>
+              <a:xfrm>
+                <a:off x="1097280" y="1993392"/>
+                <a:ext cx="4572000" cy="2616101"/>
+              </a:xfrm>
+              <a:prstGeom prst="rect">
+                <a:avLst/>
+              </a:prstGeom>
+              <a:noFill/>
+            </p:spPr>
+            <p:txBody>
+              <a:bodyPr wrap="square">
+                <a:spAutoFit/>
+              </a:bodyPr>
+              <a:lstStyle/>
+              <a:p>
+                <a:pPr>
+                  <a:spcAft>
+                    <a:spcPts val="600"/>
+                  </a:spcAft>
+                  <a:defRPr sz="1800">
+                    <a:solidFill>
+                      <a:srgbClr val="232D37"/>
+                    </a:solidFill>
+                    <a:latin typeface="Aptos"/>
+                  </a:defRPr>
+                </a:pPr>
+                <a:r>
+                  <a:rPr lang="fr-FR" dirty="0"/>
+                  <a:t>Les simulations confirment la possibilité de domination permanente.</a:t>
+                </a:r>
+              </a:p>
+              <a:p>
+                <a:pPr>
+                  <a:spcAft>
+                    <a:spcPts val="600"/>
+                  </a:spcAft>
+                  <a:defRPr sz="1800">
+                    <a:solidFill>
+                      <a:srgbClr val="232D37"/>
+                    </a:solidFill>
+                    <a:latin typeface="Aptos"/>
+                  </a:defRPr>
+                </a:pPr>
+                <a:r>
+                  <a:rPr lang="fr-FR" dirty="0"/>
+                  <a:t> </a:t>
+                </a:r>
+              </a:p>
+              <a:p>
+                <a:pPr>
+                  <a:spcAft>
+                    <a:spcPts val="600"/>
+                  </a:spcAft>
+                  <a:defRPr sz="1800">
+                    <a:solidFill>
+                      <a:srgbClr val="232D37"/>
+                    </a:solidFill>
+                    <a:latin typeface="Aptos"/>
+                  </a:defRPr>
+                </a:pPr>
+                <a:r>
+                  <a:rPr lang="fr-FR" dirty="0"/>
+                  <a:t>La domination est fréquente lorsque </a:t>
+                </a:r>
+                <a14:m>
+                  <m:oMath xmlns:m="http://schemas.openxmlformats.org/officeDocument/2006/math">
+                    <m:sSub>
+                      <m:sSubPr>
+                        <m:ctrlPr>
+                          <a:rPr lang="fr-FR"/>
+                        </m:ctrlPr>
+                      </m:sSubPr>
+                      <m:e>
+                        <m:r>
+                          <a:rPr lang="fr-FR" i="1"/>
+                          <m:t>𝑚</m:t>
+                        </m:r>
+                      </m:e>
+                      <m:sub>
+                        <m:r>
+                          <a:rPr lang="fr-FR" i="1"/>
+                          <m:t>𝑏</m:t>
+                        </m:r>
+                      </m:sub>
+                    </m:sSub>
+                    <m:r>
+                      <a:rPr lang="fr-FR"/>
+                      <m:t>&gt;</m:t>
+                    </m:r>
+                    <m:sSub>
+                      <m:sSubPr>
+                        <m:ctrlPr>
+                          <a:rPr lang="fr-FR" i="1"/>
+                        </m:ctrlPr>
+                      </m:sSubPr>
+                      <m:e>
+                        <m:r>
+                          <a:rPr lang="fr-FR" i="1"/>
+                          <m:t>𝑚</m:t>
+                        </m:r>
+                      </m:e>
+                      <m:sub>
+                        <m:r>
+                          <a:rPr lang="fr-FR" i="1"/>
+                          <m:t>𝑤</m:t>
+                        </m:r>
+                      </m:sub>
+                    </m:sSub>
+                  </m:oMath>
+                </a14:m>
+                <a:r>
+                  <a:rPr lang="fr-FR" dirty="0"/>
+                  <a:t>. </a:t>
+                </a:r>
+              </a:p>
+              <a:p>
+                <a:pPr>
+                  <a:spcAft>
+                    <a:spcPts val="600"/>
+                  </a:spcAft>
+                  <a:defRPr sz="1800">
+                    <a:solidFill>
+                      <a:srgbClr val="232D37"/>
+                    </a:solidFill>
+                    <a:latin typeface="Aptos"/>
+                  </a:defRPr>
+                </a:pPr>
+                <a:endParaRPr lang="fr-FR" dirty="0"/>
+              </a:p>
+              <a:p>
+                <a:pPr>
+                  <a:spcAft>
+                    <a:spcPts val="600"/>
+                  </a:spcAft>
+                  <a:defRPr sz="1800">
+                    <a:solidFill>
+                      <a:srgbClr val="232D37"/>
+                    </a:solidFill>
+                    <a:latin typeface="Aptos"/>
+                  </a:defRPr>
+                </a:pPr>
+                <a:r>
+                  <a:rPr lang="fr-FR" dirty="0"/>
+                  <a:t>La probabilité de domination dépend des paramètres initiaux et des renforcements.</a:t>
+                </a:r>
+                <a:endParaRPr dirty="0">
+                  <a:latin typeface="Aptos"/>
+                </a:endParaRPr>
+              </a:p>
+            </p:txBody>
+          </p:sp>
+        </mc:Choice>
+        <mc:Fallback>
+          <p:sp>
+            <p:nvSpPr>
+              <p:cNvPr id="11" name="TextBox 10"/>
+              <p:cNvSpPr txBox="1">
+                <a:spLocks noRot="1" noChangeAspect="1" noMove="1" noResize="1" noEditPoints="1" noAdjustHandles="1" noChangeArrowheads="1" noChangeShapeType="1" noTextEdit="1"/>
+              </p:cNvSpPr>
+              <p:nvPr/>
+            </p:nvSpPr>
+            <p:spPr>
+              <a:xfrm>
+                <a:off x="1097280" y="1993392"/>
+                <a:ext cx="4572000" cy="2616101"/>
+              </a:xfrm>
+              <a:prstGeom prst="rect">
+                <a:avLst/>
+              </a:prstGeom>
+              <a:blipFill>
+                <a:blip r:embed="rId3"/>
+                <a:stretch>
+                  <a:fillRect l="-1067" t="-932" b="-3030"/>
+                </a:stretch>
+              </a:blipFill>
+            </p:spPr>
+            <p:txBody>
+              <a:bodyPr/>
+              <a:lstStyle/>
+              <a:p>
+                <a:r>
+                  <a:rPr lang="fr-FR">
+                    <a:noFill/>
+                  </a:rPr>
+                  <a:t> </a:t>
+                </a:r>
+              </a:p>
+            </p:txBody>
+          </p:sp>
+        </mc:Fallback>
+      </mc:AlternateContent>
       <p:sp>
         <p:nvSpPr>
           <p:cNvPr id="12" name="Rounded Rectangle 11"/>
@@ -6493,8 +7717,8 @@
         </p:nvSpPr>
         <p:spPr>
           <a:xfrm>
-            <a:off x="6629400" y="1417320"/>
-            <a:ext cx="4754880" cy="4297680"/>
+            <a:off x="6309360" y="1508760"/>
+            <a:ext cx="5074920" cy="4160520"/>
           </a:xfrm>
           <a:prstGeom prst="roundRect">
             <a:avLst/>
@@ -6539,8 +7763,8 @@
         </p:nvSpPr>
         <p:spPr>
           <a:xfrm>
-            <a:off x="6793992" y="1545336"/>
-            <a:ext cx="4425696" cy="256032"/>
+            <a:off x="6473952" y="1636776"/>
+            <a:ext cx="4745736" cy="256032"/>
           </a:xfrm>
           <a:prstGeom prst="rect">
             <a:avLst/>
@@ -6561,21 +7785,125 @@
                 </a:solidFill>
                 <a:latin typeface="Aptos"/>
               </a:rPr>
-              <a:t>Perspectives</a:t>
-            </a:r>
-          </a:p>
-        </p:txBody>
-      </p:sp>
-      <p:sp>
-        <p:nvSpPr>
-          <p:cNvPr id="14" name="TextBox 13"/>
+              <a:t>Limites</a:t>
+            </a:r>
+          </a:p>
+        </p:txBody>
+      </p:sp>
+      <mc:AlternateContent xmlns:mc="http://schemas.openxmlformats.org/markup-compatibility/2006">
+        <mc:Choice xmlns:a14="http://schemas.microsoft.com/office/drawing/2010/main" Requires="a14">
+          <p:sp>
+            <p:nvSpPr>
+              <p:cNvPr id="14" name="TextBox 13"/>
+              <p:cNvSpPr txBox="1"/>
+              <p:nvPr/>
+            </p:nvSpPr>
+            <p:spPr>
+              <a:xfrm>
+                <a:off x="6583680" y="1993392"/>
+                <a:ext cx="4572000" cy="1754326"/>
+              </a:xfrm>
+              <a:prstGeom prst="rect">
+                <a:avLst/>
+              </a:prstGeom>
+              <a:noFill/>
+            </p:spPr>
+            <p:txBody>
+              <a:bodyPr wrap="square">
+                <a:spAutoFit/>
+              </a:bodyPr>
+              <a:lstStyle/>
+              <a:p>
+                <a:r>
+                  <a:rPr lang="fr-FR" dirty="0"/>
+                  <a:t>Estimation sur horizon fini </a:t>
+                </a:r>
+                <a14:m>
+                  <m:oMath xmlns:m="http://schemas.openxmlformats.org/officeDocument/2006/math">
+                    <m:r>
+                      <a:rPr lang="fr-FR" i="1"/>
+                      <m:t>𝑇</m:t>
+                    </m:r>
+                  </m:oMath>
+                </a14:m>
+                <a:r>
+                  <a:rPr lang="fr-FR" dirty="0"/>
+                  <a:t>. </a:t>
+                </a:r>
+              </a:p>
+              <a:p>
+                <a:endParaRPr lang="fr-FR" dirty="0"/>
+              </a:p>
+              <a:p>
+                <a:r>
+                  <a:rPr lang="fr-FR" dirty="0"/>
+                  <a:t>Nombre fini de simulations Monte Carlo. </a:t>
+                </a:r>
+              </a:p>
+              <a:p>
+                <a:endParaRPr lang="fr-FR" dirty="0"/>
+              </a:p>
+              <a:p>
+                <a:r>
+                  <a:rPr lang="fr-FR" dirty="0"/>
+                  <a:t>Exploration partielle de l'espace des paramètres.</a:t>
+                </a:r>
+                <a:endParaRPr dirty="0">
+                  <a:latin typeface="Aptos"/>
+                </a:endParaRPr>
+              </a:p>
+            </p:txBody>
+          </p:sp>
+        </mc:Choice>
+        <mc:Fallback>
+          <p:sp>
+            <p:nvSpPr>
+              <p:cNvPr id="14" name="TextBox 13"/>
+              <p:cNvSpPr txBox="1">
+                <a:spLocks noRot="1" noChangeAspect="1" noMove="1" noResize="1" noEditPoints="1" noAdjustHandles="1" noChangeArrowheads="1" noChangeShapeType="1" noTextEdit="1"/>
+              </p:cNvSpPr>
+              <p:nvPr/>
+            </p:nvSpPr>
+            <p:spPr>
+              <a:xfrm>
+                <a:off x="6583680" y="1993392"/>
+                <a:ext cx="4572000" cy="1754326"/>
+              </a:xfrm>
+              <a:prstGeom prst="rect">
+                <a:avLst/>
+              </a:prstGeom>
+              <a:blipFill>
+                <a:blip r:embed="rId4"/>
+                <a:stretch>
+                  <a:fillRect l="-1067" t="-1736" b="-4514"/>
+                </a:stretch>
+              </a:blipFill>
+            </p:spPr>
+            <p:txBody>
+              <a:bodyPr/>
+              <a:lstStyle/>
+              <a:p>
+                <a:r>
+                  <a:rPr lang="fr-FR">
+                    <a:noFill/>
+                  </a:rPr>
+                  <a:t> </a:t>
+                </a:r>
+              </a:p>
+            </p:txBody>
+          </p:sp>
+        </mc:Fallback>
+      </mc:AlternateContent>
+      <p:sp>
+        <p:nvSpPr>
+          <p:cNvPr id="15" name="TextBox 14"/>
           <p:cNvSpPr txBox="1"/>
           <p:nvPr/>
         </p:nvSpPr>
         <p:spPr>
           <a:xfrm>
-            <a:off x="6949440" y="1874519"/>
-            <a:ext cx="4160520" cy="2651760"/>
+            <a:off x="1051560" y="5806440"/>
+            <a:ext cx="10058400" cy="320040"/>
           </a:xfrm>
           <a:prstGeom prst="rect">
             <a:avLst/>
@@ -6588,49 +7916,29 @@
           </a:bodyPr>
           <a:lstStyle/>
           <a:p>
-            <a:r>
-              <a:rPr>
-                <a:latin typeface="Aptos"/>
-              </a:rPr>
-              <a:t>plus de deux couleurs</a:t>
-            </a:r>
-          </a:p>
-          <a:p>
-            <a:r>
-              <a:rPr>
-                <a:latin typeface="Aptos"/>
-              </a:rPr>
-              <a:t>renforcements plus généraux</a:t>
-            </a:r>
-          </a:p>
-          <a:p>
-            <a:r>
-              <a:rPr>
-                <a:latin typeface="Aptos"/>
-              </a:rPr>
-              <a:t>bornes quantitatives pour P(A)</a:t>
-            </a:r>
-          </a:p>
-          <a:p>
-            <a:r>
-              <a:rPr>
-                <a:latin typeface="Aptos"/>
-              </a:rPr>
-              <a:t>étude plus fine des temps de stabilisation</a:t>
-            </a:r>
-          </a:p>
-        </p:txBody>
-      </p:sp>
-      <p:sp>
-        <p:nvSpPr>
-          <p:cNvPr id="15" name="TextBox 14"/>
+            <a:pPr algn="ctr"/>
+            <a:r>
+              <a:rPr sz="1800" b="1" i="0">
+                <a:solidFill>
+                  <a:srgbClr val="0097D6"/>
+                </a:solidFill>
+                <a:latin typeface="Aptos"/>
+              </a:rPr>
+              <a:t>Message central : la simulation illustre le mécanisme ; le théorème établit l’événement infini.</a:t>
+            </a:r>
+          </a:p>
+        </p:txBody>
+      </p:sp>
+      <p:sp>
+        <p:nvSpPr>
+          <p:cNvPr id="16" name="TextBox 15"/>
           <p:cNvSpPr txBox="1"/>
           <p:nvPr/>
         </p:nvSpPr>
         <p:spPr>
           <a:xfrm>
-            <a:off x="2834640" y="5897880"/>
-            <a:ext cx="6400800" cy="320040"/>
+            <a:off x="11448288" y="6510528"/>
+            <a:ext cx="411480" cy="201168"/>
           </a:xfrm>
           <a:prstGeom prst="rect">
             <a:avLst/>
@@ -6643,41 +7951,6 @@
           </a:bodyPr>
           <a:lstStyle/>
           <a:p>
-            <a:pPr algn="ctr"/>
-            <a:r>
-              <a:rPr sz="2600" b="1" i="0">
-                <a:solidFill>
-                  <a:srgbClr val="0097D6"/>
-                </a:solidFill>
-                <a:latin typeface="Aptos"/>
-              </a:rPr>
-              <a:t>Questions</a:t>
-            </a:r>
-          </a:p>
-        </p:txBody>
-      </p:sp>
-      <p:sp>
-        <p:nvSpPr>
-          <p:cNvPr id="16" name="TextBox 15"/>
-          <p:cNvSpPr txBox="1"/>
-          <p:nvPr/>
-        </p:nvSpPr>
-        <p:spPr>
-          <a:xfrm>
-            <a:off x="11448288" y="6510528"/>
-            <a:ext cx="411480" cy="201168"/>
-          </a:xfrm>
-          <a:prstGeom prst="rect">
-            <a:avLst/>
-          </a:prstGeom>
-          <a:noFill/>
-        </p:spPr>
-        <p:txBody>
-          <a:bodyPr wrap="square">
-            <a:spAutoFit/>
-          </a:bodyPr>
-          <a:lstStyle/>
-          <a:p>
             <a:pPr algn="r"/>
             <a:r>
               <a:rPr sz="850" b="0" i="0">
@@ -6686,7 +7959,7 @@
                 </a:solidFill>
                 <a:latin typeface="Aptos"/>
               </a:rPr>
-              <a:t>15</a:t>
+              <a:t>14</a:t>
             </a:r>
           </a:p>
         </p:txBody>
@@ -6700,6 +7973,717 @@
 </file>
 
 <file path=ppt/slides/slide16.xml><?xml version="1.0" encoding="utf-8"?>
+<p:sld xmlns:a="http://schemas.openxmlformats.org/drawingml/2006/main" xmlns:r="http://schemas.openxmlformats.org/officeDocument/2006/relationships" xmlns:p="http://schemas.openxmlformats.org/presentationml/2006/main">
+  <p:cSld>
+    <p:spTree>
+      <p:nvGrpSpPr>
+        <p:cNvPr id="1" name=""/>
+        <p:cNvGrpSpPr/>
+        <p:nvPr/>
+      </p:nvGrpSpPr>
+      <p:grpSpPr>
+        <a:xfrm>
+          <a:off x="0" y="0"/>
+          <a:ext cx="0" cy="0"/>
+          <a:chOff x="0" y="0"/>
+          <a:chExt cx="0" cy="0"/>
+        </a:xfrm>
+      </p:grpSpPr>
+      <p:sp>
+        <p:nvSpPr>
+          <p:cNvPr id="2" name="Rectangle 1"/>
+          <p:cNvSpPr/>
+          <p:nvPr/>
+        </p:nvSpPr>
+        <p:spPr>
+          <a:xfrm>
+            <a:off x="0" y="0"/>
+            <a:ext cx="12191695" cy="109728"/>
+          </a:xfrm>
+          <a:prstGeom prst="rect">
+            <a:avLst/>
+          </a:prstGeom>
+          <a:solidFill>
+            <a:srgbClr val="0097D6"/>
+          </a:solidFill>
+          <a:ln>
+            <a:noFill/>
+          </a:ln>
+        </p:spPr>
+        <p:style>
+          <a:lnRef idx="1">
+            <a:schemeClr val="accent1"/>
+          </a:lnRef>
+          <a:fillRef idx="3">
+            <a:schemeClr val="accent1"/>
+          </a:fillRef>
+          <a:effectRef idx="2">
+            <a:schemeClr val="accent1"/>
+          </a:effectRef>
+          <a:fontRef idx="minor">
+            <a:schemeClr val="lt1"/>
+          </a:fontRef>
+        </p:style>
+        <p:txBody>
+          <a:bodyPr rtlCol="0" anchor="ctr"/>
+          <a:lstStyle/>
+          <a:p>
+            <a:pPr algn="ctr"/>
+            <a:endParaRPr/>
+          </a:p>
+        </p:txBody>
+      </p:sp>
+      <p:sp>
+        <p:nvSpPr>
+          <p:cNvPr id="3" name="TextBox 2"/>
+          <p:cNvSpPr txBox="1"/>
+          <p:nvPr/>
+        </p:nvSpPr>
+        <p:spPr>
+          <a:xfrm>
+            <a:off x="411480" y="201168"/>
+            <a:ext cx="9601200" cy="256032"/>
+          </a:xfrm>
+          <a:prstGeom prst="rect">
+            <a:avLst/>
+          </a:prstGeom>
+          <a:noFill/>
+        </p:spPr>
+        <p:txBody>
+          <a:bodyPr wrap="square">
+            <a:spAutoFit/>
+          </a:bodyPr>
+          <a:lstStyle/>
+          <a:p>
+            <a:pPr algn="l"/>
+            <a:r>
+              <a:rPr sz="900" b="0" i="0">
+                <a:solidFill>
+                  <a:srgbClr val="5F6973"/>
+                </a:solidFill>
+                <a:latin typeface="Aptos"/>
+              </a:rPr>
+              <a:t>Urnes de Pólya généralisées — domination permanente · Conclusion</a:t>
+            </a:r>
+          </a:p>
+        </p:txBody>
+      </p:sp>
+      <p:sp>
+        <p:nvSpPr>
+          <p:cNvPr id="4" name="Rectangle 3"/>
+          <p:cNvSpPr/>
+          <p:nvPr/>
+        </p:nvSpPr>
+        <p:spPr>
+          <a:xfrm>
+            <a:off x="0" y="6446520"/>
+            <a:ext cx="12191695" cy="18288"/>
+          </a:xfrm>
+          <a:prstGeom prst="rect">
+            <a:avLst/>
+          </a:prstGeom>
+          <a:solidFill>
+            <a:srgbClr val="DCE1E6"/>
+          </a:solidFill>
+          <a:ln>
+            <a:noFill/>
+          </a:ln>
+        </p:spPr>
+        <p:style>
+          <a:lnRef idx="1">
+            <a:schemeClr val="accent1"/>
+          </a:lnRef>
+          <a:fillRef idx="3">
+            <a:schemeClr val="accent1"/>
+          </a:fillRef>
+          <a:effectRef idx="2">
+            <a:schemeClr val="accent1"/>
+          </a:effectRef>
+          <a:fontRef idx="minor">
+            <a:schemeClr val="lt1"/>
+          </a:fontRef>
+        </p:style>
+        <p:txBody>
+          <a:bodyPr rtlCol="0" anchor="ctr"/>
+          <a:lstStyle/>
+          <a:p>
+            <a:pPr algn="ctr"/>
+            <a:endParaRPr/>
+          </a:p>
+        </p:txBody>
+      </p:sp>
+      <p:sp>
+        <p:nvSpPr>
+          <p:cNvPr id="5" name="TextBox 4"/>
+          <p:cNvSpPr txBox="1"/>
+          <p:nvPr/>
+        </p:nvSpPr>
+        <p:spPr>
+          <a:xfrm>
+            <a:off x="411480" y="6510528"/>
+            <a:ext cx="9326880" cy="228600"/>
+          </a:xfrm>
+          <a:prstGeom prst="rect">
+            <a:avLst/>
+          </a:prstGeom>
+          <a:noFill/>
+        </p:spPr>
+        <p:txBody>
+          <a:bodyPr wrap="square">
+            <a:spAutoFit/>
+          </a:bodyPr>
+          <a:lstStyle/>
+          <a:p>
+            <a:pPr algn="l"/>
+            <a:r>
+              <a:rPr sz="850" b="0" i="0">
+                <a:solidFill>
+                  <a:srgbClr val="6E7882"/>
+                </a:solidFill>
+                <a:latin typeface="Aptos"/>
+              </a:rPr>
+              <a:t>Henri Vasserot — Master Mathématiques EAD AMU — 2025/2026</a:t>
+            </a:r>
+          </a:p>
+        </p:txBody>
+      </p:sp>
+      <p:pic>
+        <p:nvPicPr>
+          <p:cNvPr id="6" name="Picture 5" descr="LOGO_AMU.png"/>
+          <p:cNvPicPr>
+            <a:picLocks noChangeAspect="1"/>
+          </p:cNvPicPr>
+          <p:nvPr/>
+        </p:nvPicPr>
+        <p:blipFill>
+          <a:blip r:embed="rId2"/>
+          <a:stretch>
+            <a:fillRect/>
+          </a:stretch>
+        </p:blipFill>
+        <p:spPr>
+          <a:xfrm>
+            <a:off x="10241280" y="6446520"/>
+            <a:ext cx="1417320" cy="487059"/>
+          </a:xfrm>
+          <a:prstGeom prst="rect">
+            <a:avLst/>
+          </a:prstGeom>
+        </p:spPr>
+      </p:pic>
+      <p:sp>
+        <p:nvSpPr>
+          <p:cNvPr id="7" name="TextBox 6"/>
+          <p:cNvSpPr txBox="1"/>
+          <p:nvPr/>
+        </p:nvSpPr>
+        <p:spPr>
+          <a:xfrm>
+            <a:off x="658368" y="621792"/>
+            <a:ext cx="10789920" cy="502920"/>
+          </a:xfrm>
+          <a:prstGeom prst="rect">
+            <a:avLst/>
+          </a:prstGeom>
+          <a:noFill/>
+        </p:spPr>
+        <p:txBody>
+          <a:bodyPr wrap="square">
+            <a:spAutoFit/>
+          </a:bodyPr>
+          <a:lstStyle/>
+          <a:p>
+            <a:pPr algn="l"/>
+            <a:r>
+              <a:rPr sz="2800" b="1" i="0">
+                <a:solidFill>
+                  <a:srgbClr val="232D37"/>
+                </a:solidFill>
+                <a:latin typeface="Aptos"/>
+              </a:rPr>
+              <a:t>Conclusion</a:t>
+            </a:r>
+          </a:p>
+        </p:txBody>
+      </p:sp>
+      <p:sp>
+        <p:nvSpPr>
+          <p:cNvPr id="8" name="TextBox 7"/>
+          <p:cNvSpPr txBox="1"/>
+          <p:nvPr/>
+        </p:nvSpPr>
+        <p:spPr>
+          <a:xfrm>
+            <a:off x="685800" y="1078992"/>
+            <a:ext cx="10515600" cy="320040"/>
+          </a:xfrm>
+          <a:prstGeom prst="rect">
+            <a:avLst/>
+          </a:prstGeom>
+          <a:noFill/>
+        </p:spPr>
+        <p:txBody>
+          <a:bodyPr wrap="square">
+            <a:spAutoFit/>
+          </a:bodyPr>
+          <a:lstStyle/>
+          <a:p>
+            <a:pPr algn="l"/>
+            <a:r>
+              <a:rPr sz="1400" b="0" i="0">
+                <a:solidFill>
+                  <a:srgbClr val="5F6973"/>
+                </a:solidFill>
+                <a:latin typeface="Aptos"/>
+              </a:rPr>
+              <a:t>Synthèse du TER et ouvertures</a:t>
+            </a:r>
+          </a:p>
+        </p:txBody>
+      </p:sp>
+      <p:sp>
+        <p:nvSpPr>
+          <p:cNvPr id="9" name="Rounded Rectangle 8"/>
+          <p:cNvSpPr/>
+          <p:nvPr/>
+        </p:nvSpPr>
+        <p:spPr>
+          <a:xfrm>
+            <a:off x="777240" y="1417320"/>
+            <a:ext cx="5532120" cy="4297680"/>
+          </a:xfrm>
+          <a:prstGeom prst="roundRect">
+            <a:avLst/>
+          </a:prstGeom>
+          <a:solidFill>
+            <a:srgbClr val="F0F4F7"/>
+          </a:solidFill>
+          <a:ln>
+            <a:solidFill>
+              <a:srgbClr val="D2DAE1"/>
+            </a:solidFill>
+          </a:ln>
+        </p:spPr>
+        <p:style>
+          <a:lnRef idx="1">
+            <a:schemeClr val="accent1"/>
+          </a:lnRef>
+          <a:fillRef idx="3">
+            <a:schemeClr val="accent1"/>
+          </a:fillRef>
+          <a:effectRef idx="2">
+            <a:schemeClr val="accent1"/>
+          </a:effectRef>
+          <a:fontRef idx="minor">
+            <a:schemeClr val="lt1"/>
+          </a:fontRef>
+        </p:style>
+        <p:txBody>
+          <a:bodyPr rtlCol="0" anchor="ctr"/>
+          <a:lstStyle/>
+          <a:p>
+            <a:pPr algn="ctr"/>
+            <a:endParaRPr dirty="0"/>
+          </a:p>
+        </p:txBody>
+      </p:sp>
+      <p:sp>
+        <p:nvSpPr>
+          <p:cNvPr id="10" name="TextBox 9"/>
+          <p:cNvSpPr txBox="1"/>
+          <p:nvPr/>
+        </p:nvSpPr>
+        <p:spPr>
+          <a:xfrm>
+            <a:off x="941832" y="1545336"/>
+            <a:ext cx="5202936" cy="256032"/>
+          </a:xfrm>
+          <a:prstGeom prst="rect">
+            <a:avLst/>
+          </a:prstGeom>
+          <a:noFill/>
+        </p:spPr>
+        <p:txBody>
+          <a:bodyPr wrap="square">
+            <a:spAutoFit/>
+          </a:bodyPr>
+          <a:lstStyle/>
+          <a:p>
+            <a:pPr algn="l"/>
+            <a:r>
+              <a:rPr sz="1300" b="1" i="0">
+                <a:solidFill>
+                  <a:srgbClr val="232D37"/>
+                </a:solidFill>
+                <a:latin typeface="Aptos"/>
+              </a:rPr>
+              <a:t>Bilan</a:t>
+            </a:r>
+          </a:p>
+        </p:txBody>
+      </p:sp>
+      <p:sp>
+        <p:nvSpPr>
+          <p:cNvPr id="11" name="TextBox 10"/>
+          <p:cNvSpPr txBox="1"/>
+          <p:nvPr/>
+        </p:nvSpPr>
+        <p:spPr>
+          <a:xfrm>
+            <a:off x="1112367" y="3566160"/>
+            <a:ext cx="4983480" cy="1908215"/>
+          </a:xfrm>
+          <a:prstGeom prst="rect">
+            <a:avLst/>
+          </a:prstGeom>
+          <a:noFill/>
+        </p:spPr>
+        <p:txBody>
+          <a:bodyPr wrap="square">
+            <a:spAutoFit/>
+          </a:bodyPr>
+          <a:lstStyle/>
+          <a:p>
+            <a:r>
+              <a:rPr lang="fr-FR" b="1" dirty="0"/>
+              <a:t>Résultat principal</a:t>
+            </a:r>
+          </a:p>
+          <a:p>
+            <a:endParaRPr lang="fr-FR" dirty="0"/>
+          </a:p>
+          <a:p>
+            <a:pPr>
+              <a:spcAft>
+                <a:spcPts val="600"/>
+              </a:spcAft>
+              <a:defRPr sz="1800">
+                <a:solidFill>
+                  <a:srgbClr val="232D37"/>
+                </a:solidFill>
+                <a:latin typeface="Aptos"/>
+              </a:defRPr>
+            </a:pPr>
+            <a:r>
+              <a:rPr lang="fr-FR" dirty="0"/>
+              <a:t>La domination éventuelle implique la domination permanente. </a:t>
+            </a:r>
+          </a:p>
+          <a:p>
+            <a:pPr>
+              <a:spcAft>
+                <a:spcPts val="600"/>
+              </a:spcAft>
+              <a:defRPr sz="1800">
+                <a:solidFill>
+                  <a:srgbClr val="232D37"/>
+                </a:solidFill>
+                <a:latin typeface="Aptos"/>
+              </a:defRPr>
+            </a:pPr>
+            <a:endParaRPr lang="fr-FR" dirty="0"/>
+          </a:p>
+          <a:p>
+            <a:pPr>
+              <a:spcAft>
+                <a:spcPts val="600"/>
+              </a:spcAft>
+              <a:defRPr sz="1800">
+                <a:solidFill>
+                  <a:srgbClr val="232D37"/>
+                </a:solidFill>
+                <a:latin typeface="Aptos"/>
+              </a:defRPr>
+            </a:pPr>
+            <a:r>
+              <a:rPr lang="fr-FR" dirty="0"/>
+              <a:t>Le phénomène est confirmé par les simulations.</a:t>
+            </a:r>
+            <a:endParaRPr dirty="0">
+              <a:latin typeface="Aptos"/>
+            </a:endParaRPr>
+          </a:p>
+        </p:txBody>
+      </p:sp>
+      <p:sp>
+        <p:nvSpPr>
+          <p:cNvPr id="12" name="Rounded Rectangle 11"/>
+          <p:cNvSpPr/>
+          <p:nvPr/>
+        </p:nvSpPr>
+        <p:spPr>
+          <a:xfrm>
+            <a:off x="6629400" y="1417320"/>
+            <a:ext cx="4754880" cy="4297680"/>
+          </a:xfrm>
+          <a:prstGeom prst="roundRect">
+            <a:avLst/>
+          </a:prstGeom>
+          <a:solidFill>
+            <a:srgbClr val="F0F4F7"/>
+          </a:solidFill>
+          <a:ln>
+            <a:solidFill>
+              <a:srgbClr val="D2DAE1"/>
+            </a:solidFill>
+          </a:ln>
+        </p:spPr>
+        <p:style>
+          <a:lnRef idx="1">
+            <a:schemeClr val="accent1"/>
+          </a:lnRef>
+          <a:fillRef idx="3">
+            <a:schemeClr val="accent1"/>
+          </a:fillRef>
+          <a:effectRef idx="2">
+            <a:schemeClr val="accent1"/>
+          </a:effectRef>
+          <a:fontRef idx="minor">
+            <a:schemeClr val="lt1"/>
+          </a:fontRef>
+        </p:style>
+        <p:txBody>
+          <a:bodyPr rtlCol="0" anchor="ctr"/>
+          <a:lstStyle/>
+          <a:p>
+            <a:pPr algn="ctr"/>
+            <a:endParaRPr/>
+          </a:p>
+        </p:txBody>
+      </p:sp>
+      <p:sp>
+        <p:nvSpPr>
+          <p:cNvPr id="13" name="TextBox 12"/>
+          <p:cNvSpPr txBox="1"/>
+          <p:nvPr/>
+        </p:nvSpPr>
+        <p:spPr>
+          <a:xfrm>
+            <a:off x="6793992" y="1545336"/>
+            <a:ext cx="4425696" cy="256032"/>
+          </a:xfrm>
+          <a:prstGeom prst="rect">
+            <a:avLst/>
+          </a:prstGeom>
+          <a:noFill/>
+        </p:spPr>
+        <p:txBody>
+          <a:bodyPr wrap="square">
+            <a:spAutoFit/>
+          </a:bodyPr>
+          <a:lstStyle/>
+          <a:p>
+            <a:pPr algn="l"/>
+            <a:r>
+              <a:rPr sz="1300" b="1" i="0">
+                <a:solidFill>
+                  <a:srgbClr val="232D37"/>
+                </a:solidFill>
+                <a:latin typeface="Aptos"/>
+              </a:rPr>
+              <a:t>Perspectives</a:t>
+            </a:r>
+          </a:p>
+        </p:txBody>
+      </p:sp>
+      <p:sp>
+        <p:nvSpPr>
+          <p:cNvPr id="14" name="TextBox 13"/>
+          <p:cNvSpPr txBox="1"/>
+          <p:nvPr/>
+        </p:nvSpPr>
+        <p:spPr>
+          <a:xfrm>
+            <a:off x="6949440" y="1874519"/>
+            <a:ext cx="4160520" cy="1477328"/>
+          </a:xfrm>
+          <a:prstGeom prst="rect">
+            <a:avLst/>
+          </a:prstGeom>
+          <a:noFill/>
+        </p:spPr>
+        <p:txBody>
+          <a:bodyPr wrap="square">
+            <a:spAutoFit/>
+          </a:bodyPr>
+          <a:lstStyle/>
+          <a:p>
+            <a:r>
+              <a:rPr lang="fr-FR" dirty="0"/>
+              <a:t>Étude du temps de domination. </a:t>
+            </a:r>
+          </a:p>
+          <a:p>
+            <a:endParaRPr lang="fr-FR" dirty="0"/>
+          </a:p>
+          <a:p>
+            <a:r>
+              <a:rPr lang="fr-FR" dirty="0"/>
+              <a:t>Cas multidimensionnels. </a:t>
+            </a:r>
+          </a:p>
+          <a:p>
+            <a:endParaRPr lang="fr-FR" dirty="0"/>
+          </a:p>
+          <a:p>
+            <a:r>
+              <a:rPr lang="fr-FR" dirty="0"/>
+              <a:t>Renforcements aléatoires.</a:t>
+            </a:r>
+            <a:endParaRPr dirty="0">
+              <a:latin typeface="Aptos"/>
+            </a:endParaRPr>
+          </a:p>
+        </p:txBody>
+      </p:sp>
+      <p:sp>
+        <p:nvSpPr>
+          <p:cNvPr id="15" name="TextBox 14"/>
+          <p:cNvSpPr txBox="1"/>
+          <p:nvPr/>
+        </p:nvSpPr>
+        <p:spPr>
+          <a:xfrm>
+            <a:off x="2834640" y="5897880"/>
+            <a:ext cx="6400800" cy="320040"/>
+          </a:xfrm>
+          <a:prstGeom prst="rect">
+            <a:avLst/>
+          </a:prstGeom>
+          <a:noFill/>
+        </p:spPr>
+        <p:txBody>
+          <a:bodyPr wrap="square">
+            <a:spAutoFit/>
+          </a:bodyPr>
+          <a:lstStyle/>
+          <a:p>
+            <a:pPr algn="ctr"/>
+            <a:r>
+              <a:rPr sz="2600" b="1" i="0">
+                <a:solidFill>
+                  <a:srgbClr val="0097D6"/>
+                </a:solidFill>
+                <a:latin typeface="Aptos"/>
+              </a:rPr>
+              <a:t>Questions</a:t>
+            </a:r>
+          </a:p>
+        </p:txBody>
+      </p:sp>
+      <p:sp>
+        <p:nvSpPr>
+          <p:cNvPr id="16" name="TextBox 15"/>
+          <p:cNvSpPr txBox="1"/>
+          <p:nvPr/>
+        </p:nvSpPr>
+        <p:spPr>
+          <a:xfrm>
+            <a:off x="11448288" y="6510528"/>
+            <a:ext cx="411480" cy="201168"/>
+          </a:xfrm>
+          <a:prstGeom prst="rect">
+            <a:avLst/>
+          </a:prstGeom>
+          <a:noFill/>
+        </p:spPr>
+        <p:txBody>
+          <a:bodyPr wrap="square">
+            <a:spAutoFit/>
+          </a:bodyPr>
+          <a:lstStyle/>
+          <a:p>
+            <a:pPr algn="r"/>
+            <a:r>
+              <a:rPr sz="850" b="0" i="0">
+                <a:solidFill>
+                  <a:srgbClr val="6E7882"/>
+                </a:solidFill>
+                <a:latin typeface="Aptos"/>
+              </a:rPr>
+              <a:t>15</a:t>
+            </a:r>
+          </a:p>
+        </p:txBody>
+      </p:sp>
+      <p:sp>
+        <p:nvSpPr>
+          <p:cNvPr id="17" name="ZoneTexte 16">
+            <a:extLst>
+              <a:ext uri="{FF2B5EF4-FFF2-40B4-BE49-F238E27FC236}">
+                <a16:creationId xmlns:a16="http://schemas.microsoft.com/office/drawing/2014/main" id="{92446EC3-7CF0-2C58-8A60-1B91DB3CDFB1}"/>
+              </a:ext>
+            </a:extLst>
+          </p:cNvPr>
+          <p:cNvSpPr txBox="1"/>
+          <p:nvPr/>
+        </p:nvSpPr>
+        <p:spPr>
+          <a:xfrm>
+            <a:off x="1109472" y="1984248"/>
+            <a:ext cx="1962653" cy="646331"/>
+          </a:xfrm>
+          <a:prstGeom prst="rect">
+            <a:avLst/>
+          </a:prstGeom>
+          <a:noFill/>
+        </p:spPr>
+        <p:txBody>
+          <a:bodyPr wrap="none" rtlCol="0">
+            <a:spAutoFit/>
+          </a:bodyPr>
+          <a:lstStyle/>
+          <a:p>
+            <a:r>
+              <a:rPr lang="fr-FR" b="1" dirty="0"/>
+              <a:t>Résultat théorique</a:t>
+            </a:r>
+            <a:endParaRPr lang="fr-FR" dirty="0"/>
+          </a:p>
+          <a:p>
+            <a:endParaRPr lang="fr-FR" dirty="0"/>
+          </a:p>
+        </p:txBody>
+      </p:sp>
+      <p:pic>
+        <p:nvPicPr>
+          <p:cNvPr id="19" name="Image 18">
+            <a:extLst>
+              <a:ext uri="{FF2B5EF4-FFF2-40B4-BE49-F238E27FC236}">
+                <a16:creationId xmlns:a16="http://schemas.microsoft.com/office/drawing/2014/main" id="{2E791DB8-A7E8-C835-3AFC-1285497681C5}"/>
+              </a:ext>
+            </a:extLst>
+          </p:cNvPr>
+          <p:cNvPicPr>
+            <a:picLocks noChangeAspect="1"/>
+          </p:cNvPicPr>
+          <p:nvPr/>
+        </p:nvPicPr>
+        <p:blipFill>
+          <a:blip r:embed="rId3"/>
+          <a:stretch>
+            <a:fillRect/>
+          </a:stretch>
+        </p:blipFill>
+        <p:spPr>
+          <a:xfrm>
+            <a:off x="1848235" y="2504325"/>
+            <a:ext cx="3500891" cy="797790"/>
+          </a:xfrm>
+          <a:prstGeom prst="rect">
+            <a:avLst/>
+          </a:prstGeom>
+        </p:spPr>
+      </p:pic>
+    </p:spTree>
+  </p:cSld>
+  <p:clrMapOvr>
+    <a:masterClrMapping/>
+  </p:clrMapOvr>
+</p:sld>
+</file>
+
+<file path=ppt/slides/slide17.xml><?xml version="1.0" encoding="utf-8"?>
 <p:sld xmlns:a="http://schemas.openxmlformats.org/drawingml/2006/main" xmlns:r="http://schemas.openxmlformats.org/officeDocument/2006/relationships" xmlns:p="http://schemas.openxmlformats.org/presentationml/2006/main">
   <p:cSld>
     <p:spTree>
@@ -8345,7 +10329,7 @@
               <a:blipFill>
                 <a:blip r:embed="rId5"/>
                 <a:stretch>
-                  <a:fillRect l="-1224" t="-5660" r="-816" b="-14151"/>
+                  <a:fillRect l="-1224" t="-5660" r="-1224" b="-14151"/>
                 </a:stretch>
               </a:blipFill>
             </p:spPr>
@@ -10012,7 +11996,9 @@
             <a:r>
               <a:rPr sz="1400" b="0" i="0" dirty="0">
                 <a:solidFill>
-                  <a:srgbClr val="5F6973"/>
+                  <a:schemeClr val="bg1">
+                    <a:lumMod val="50000"/>
+                  </a:schemeClr>
                 </a:solidFill>
                 <a:latin typeface="Aptos"/>
               </a:rPr>
@@ -10021,7 +12007,9 @@
             <a:r>
               <a:rPr sz="1400" b="0" i="0" dirty="0" err="1">
                 <a:solidFill>
-                  <a:srgbClr val="5F6973"/>
+                  <a:schemeClr val="bg1">
+                    <a:lumMod val="50000"/>
+                  </a:schemeClr>
                 </a:solidFill>
                 <a:latin typeface="Aptos"/>
               </a:rPr>
@@ -10030,7 +12018,9 @@
             <a:r>
               <a:rPr sz="1400" b="0" i="0" dirty="0">
                 <a:solidFill>
-                  <a:srgbClr val="5F6973"/>
+                  <a:schemeClr val="bg1">
+                    <a:lumMod val="50000"/>
+                  </a:schemeClr>
                 </a:solidFill>
                 <a:latin typeface="Aptos"/>
               </a:rPr>
@@ -10039,7 +12029,9 @@
             <a:r>
               <a:rPr sz="1400" b="0" i="0" dirty="0" err="1">
                 <a:solidFill>
-                  <a:srgbClr val="5F6973"/>
+                  <a:schemeClr val="bg1">
+                    <a:lumMod val="50000"/>
+                  </a:schemeClr>
                 </a:solidFill>
                 <a:latin typeface="Aptos"/>
               </a:rPr>
@@ -10048,7 +12040,9 @@
             <a:r>
               <a:rPr sz="1400" b="0" i="0" dirty="0">
                 <a:solidFill>
-                  <a:srgbClr val="5F6973"/>
+                  <a:schemeClr val="bg1">
+                    <a:lumMod val="50000"/>
+                  </a:schemeClr>
                 </a:solidFill>
                 <a:latin typeface="Aptos"/>
               </a:rPr>
@@ -10057,7 +12051,9 @@
             <a:r>
               <a:rPr sz="1400" b="0" i="0" dirty="0" err="1">
                 <a:solidFill>
-                  <a:srgbClr val="5F6973"/>
+                  <a:schemeClr val="bg1">
+                    <a:lumMod val="50000"/>
+                  </a:schemeClr>
                 </a:solidFill>
                 <a:latin typeface="Aptos"/>
               </a:rPr>
@@ -10066,7 +12062,9 @@
             <a:r>
               <a:rPr sz="1400" b="0" i="0" dirty="0">
                 <a:solidFill>
-                  <a:srgbClr val="5F6973"/>
+                  <a:schemeClr val="bg1">
+                    <a:lumMod val="50000"/>
+                  </a:schemeClr>
                 </a:solidFill>
                 <a:latin typeface="Aptos"/>
               </a:rPr>
@@ -10075,14 +12073,22 @@
             <a:r>
               <a:rPr lang="es-ES" sz="1400" b="0" i="0" dirty="0">
                 <a:solidFill>
-                  <a:srgbClr val="5F6973"/>
+                  <a:schemeClr val="bg1">
+                    <a:lumMod val="50000"/>
+                  </a:schemeClr>
                 </a:solidFill>
                 <a:latin typeface="Aptos"/>
               </a:rPr>
               <a:t> - </a:t>
             </a:r>
             <a:r>
-              <a:rPr lang="fr-FR" sz="1400" dirty="0"/>
+              <a:rPr lang="fr-FR" sz="1400" dirty="0">
+                <a:solidFill>
+                  <a:schemeClr val="bg1">
+                    <a:lumMod val="50000"/>
+                  </a:schemeClr>
+                </a:solidFill>
+              </a:rPr>
               <a:t>Condition suffisante de domination permanente</a:t>
             </a:r>
           </a:p>
@@ -10895,13 +12901,40 @@
           <a:p>
             <a:pPr algn="l"/>
             <a:r>
-              <a:rPr sz="2800" b="1" i="0">
+              <a:rPr sz="2800" b="1" i="0" dirty="0" err="1">
                 <a:solidFill>
                   <a:srgbClr val="232D37"/>
                 </a:solidFill>
                 <a:latin typeface="Aptos"/>
               </a:rPr>
-              <a:t>Pourquoi le résultat est non trivial ?</a:t>
+              <a:t>Pourquoi</a:t>
+            </a:r>
+            <a:r>
+              <a:rPr sz="2800" b="1" i="0" dirty="0">
+                <a:solidFill>
+                  <a:srgbClr val="232D37"/>
+                </a:solidFill>
+                <a:latin typeface="Aptos"/>
+              </a:rPr>
+              <a:t> le </a:t>
+            </a:r>
+            <a:r>
+              <a:rPr sz="2800" b="1" i="0" dirty="0" err="1">
+                <a:solidFill>
+                  <a:srgbClr val="232D37"/>
+                </a:solidFill>
+                <a:latin typeface="Aptos"/>
+              </a:rPr>
+              <a:t>résultat</a:t>
+            </a:r>
+            <a:r>
+              <a:rPr sz="2800" b="1" i="0" dirty="0">
+                <a:solidFill>
+                  <a:srgbClr val="232D37"/>
+                </a:solidFill>
+                <a:latin typeface="Aptos"/>
+              </a:rPr>
+              <a:t> est non trivial ?</a:t>
             </a:r>
           </a:p>
         </p:txBody>
@@ -11022,37 +13055,115 @@
           </a:p>
         </p:txBody>
       </p:sp>
-      <p:sp>
-        <p:nvSpPr>
-          <p:cNvPr id="11" name="TextBox 10"/>
-          <p:cNvSpPr txBox="1"/>
-          <p:nvPr/>
-        </p:nvSpPr>
-        <p:spPr>
-          <a:xfrm>
-            <a:off x="1005840" y="2057400"/>
-            <a:ext cx="2971800" cy="731520"/>
-          </a:xfrm>
-          <a:prstGeom prst="rect">
-            <a:avLst/>
-          </a:prstGeom>
-          <a:noFill/>
-        </p:spPr>
-        <p:txBody>
-          <a:bodyPr wrap="square">
-            <a:spAutoFit/>
-          </a:bodyPr>
-          <a:lstStyle/>
-          <a:p>
-            <a:r>
-              <a:rPr>
-                <a:latin typeface="Aptos"/>
-              </a:rPr>
-              <a:t>b₀ − w₀ éloigne l’état initial de la diagonale.</a:t>
-            </a:r>
-          </a:p>
-        </p:txBody>
-      </p:sp>
+      <mc:AlternateContent xmlns:mc="http://schemas.openxmlformats.org/markup-compatibility/2006">
+        <mc:Choice xmlns:a14="http://schemas.microsoft.com/office/drawing/2010/main" Requires="a14">
+          <p:sp>
+            <p:nvSpPr>
+              <p:cNvPr id="11" name="TextBox 10"/>
+              <p:cNvSpPr txBox="1"/>
+              <p:nvPr/>
+            </p:nvSpPr>
+            <p:spPr>
+              <a:xfrm>
+                <a:off x="1005840" y="2057400"/>
+                <a:ext cx="2971800" cy="2585323"/>
+              </a:xfrm>
+              <a:prstGeom prst="rect">
+                <a:avLst/>
+              </a:prstGeom>
+              <a:noFill/>
+            </p:spPr>
+            <p:txBody>
+              <a:bodyPr wrap="square">
+                <a:spAutoFit/>
+              </a:bodyPr>
+              <a:lstStyle/>
+              <a:p>
+                <a:endParaRPr lang="fr-FR" dirty="0"/>
+              </a:p>
+              <a:p>
+                <a:endParaRPr lang="fr-FR" dirty="0"/>
+              </a:p>
+              <a:p>
+                <a:r>
+                  <a:rPr lang="fr-FR" dirty="0"/>
+                  <a:t>Eloigne l'état initial de la diagonale </a:t>
+                </a:r>
+                <a14:m>
+                  <m:oMath xmlns:m="http://schemas.openxmlformats.org/officeDocument/2006/math">
+                    <m:r>
+                      <a:rPr lang="fr-FR" i="1"/>
+                      <m:t>𝐵</m:t>
+                    </m:r>
+                    <m:r>
+                      <a:rPr lang="fr-FR"/>
+                      <m:t>=</m:t>
+                    </m:r>
+                    <m:r>
+                      <a:rPr lang="fr-FR" i="1"/>
+                      <m:t>𝑊</m:t>
+                    </m:r>
+                  </m:oMath>
+                </a14:m>
+                <a:r>
+                  <a:rPr lang="fr-FR" dirty="0"/>
+                  <a:t>; </a:t>
+                </a:r>
+              </a:p>
+              <a:p>
+                <a:endParaRPr lang="fr-FR" dirty="0"/>
+              </a:p>
+              <a:p>
+                <a:endParaRPr lang="fr-FR" dirty="0"/>
+              </a:p>
+              <a:p>
+                <a:r>
+                  <a:rPr lang="fr-FR" dirty="0"/>
+                  <a:t>Plus l'avance est grande, plus elle est difficile à perdre immédiatement.</a:t>
+                </a:r>
+              </a:p>
+            </p:txBody>
+          </p:sp>
+        </mc:Choice>
+        <mc:Fallback>
+          <p:sp>
+            <p:nvSpPr>
+              <p:cNvPr id="11" name="TextBox 10"/>
+              <p:cNvSpPr txBox="1">
+                <a:spLocks noRot="1" noChangeAspect="1" noMove="1" noResize="1" noEditPoints="1" noAdjustHandles="1" noChangeArrowheads="1" noChangeShapeType="1" noTextEdit="1"/>
+              </p:cNvSpPr>
+              <p:nvPr/>
+            </p:nvSpPr>
+            <p:spPr>
+              <a:xfrm>
+                <a:off x="1005840" y="2057400"/>
+                <a:ext cx="2971800" cy="2585323"/>
+              </a:xfrm>
+              <a:prstGeom prst="rect">
+                <a:avLst/>
+              </a:prstGeom>
+              <a:blipFill>
+                <a:blip r:embed="rId3"/>
+                <a:stretch>
+                  <a:fillRect l="-1639" r="-410" b="-2594"/>
+                </a:stretch>
+              </a:blipFill>
+            </p:spPr>
+            <p:txBody>
+              <a:bodyPr/>
+              <a:lstStyle/>
+              <a:p>
+                <a:r>
+                  <a:rPr lang="fr-FR">
+                    <a:noFill/>
+                  </a:rPr>
+                  <a:t> </a:t>
+                </a:r>
+              </a:p>
+            </p:txBody>
+          </p:sp>
+        </mc:Fallback>
+      </mc:AlternateContent>
       <p:sp>
         <p:nvSpPr>
           <p:cNvPr id="12" name="Rounded Rectangle 11"/>
@@ -11143,7 +13254,7 @@
         <p:spPr>
           <a:xfrm>
             <a:off x="4617720" y="2057400"/>
-            <a:ext cx="2971800" cy="731520"/>
+            <a:ext cx="2971800" cy="2308324"/>
           </a:xfrm>
           <a:prstGeom prst="rect">
             <a:avLst/>
@@ -11156,12 +13267,28 @@
           </a:bodyPr>
           <a:lstStyle/>
           <a:p>
-            <a:r>
-              <a:rPr>
-                <a:latin typeface="Aptos"/>
-              </a:rPr>
-              <a:t>m_b − m_w contrôle l’avantage structurel de croissance.</a:t>
-            </a:r>
+            <a:endParaRPr lang="fr-FR" dirty="0"/>
+          </a:p>
+          <a:p>
+            <a:endParaRPr lang="fr-FR" dirty="0"/>
+          </a:p>
+          <a:p>
+            <a:r>
+              <a:rPr lang="fr-FR" dirty="0"/>
+              <a:t>Chaque tirage noir consolide au moins autant l'avance ; </a:t>
+            </a:r>
+          </a:p>
+          <a:p>
+            <a:endParaRPr lang="fr-FR" dirty="0"/>
+          </a:p>
+          <a:p>
+            <a:r>
+              <a:rPr lang="fr-FR" dirty="0"/>
+              <a:t>Le mécanisme favorise la conservation de la domination.</a:t>
+            </a:r>
+            <a:endParaRPr dirty="0">
+              <a:latin typeface="Aptos"/>
+            </a:endParaRPr>
           </a:p>
         </p:txBody>
       </p:sp>
@@ -11220,7 +13347,7 @@
         <p:spPr>
           <a:xfrm>
             <a:off x="8119871" y="1545336"/>
-            <a:ext cx="3191256" cy="256032"/>
+            <a:ext cx="3191256" cy="307777"/>
           </a:xfrm>
           <a:prstGeom prst="rect">
             <a:avLst/>
@@ -11233,16 +13360,25 @@
           </a:bodyPr>
           <a:lstStyle/>
           <a:p>
-            <a:pPr algn="l"/>
-            <a:r>
-              <a:rPr sz="1300" b="1" i="0">
+            <a:r>
+              <a:rPr sz="1300" b="1" i="0" dirty="0">
                 <a:solidFill>
                   <a:srgbClr val="232D37"/>
                 </a:solidFill>
                 <a:latin typeface="Aptos"/>
               </a:rPr>
-              <a:t>3. Ordre des tirages</a:t>
-            </a:r>
+              <a:t>3. </a:t>
+            </a:r>
+            <a:r>
+              <a:rPr lang="fr-FR" sz="1400" b="1" dirty="0"/>
+              <a:t>Fluctuations aléatoires</a:t>
+            </a:r>
+            <a:endParaRPr sz="1300" b="1" i="0" dirty="0">
+              <a:solidFill>
+                <a:srgbClr val="232D37"/>
+              </a:solidFill>
+              <a:latin typeface="Aptos"/>
+            </a:endParaRPr>
           </a:p>
         </p:txBody>
       </p:sp>
@@ -11254,8 +13390,8 @@
         </p:nvSpPr>
         <p:spPr>
           <a:xfrm>
-            <a:off x="8229600" y="2057400"/>
-            <a:ext cx="2971800" cy="1051560"/>
+            <a:off x="8229599" y="2057400"/>
+            <a:ext cx="3081527" cy="2246769"/>
           </a:xfrm>
           <a:prstGeom prst="rect">
             <a:avLst/>
@@ -11268,16 +13404,28 @@
           </a:bodyPr>
           <a:lstStyle/>
           <a:p>
-            <a:pPr algn="l"/>
-            <a:r>
-              <a:rPr sz="2000" b="0" i="0">
-                <a:solidFill>
-                  <a:srgbClr val="232D37"/>
-                </a:solidFill>
-                <a:latin typeface="Aptos"/>
-              </a:rPr>
-              <a:t>Des tirages blancs précoces peuvent annuler l’avance avant que l’asymptotique domine.</a:t>
-            </a:r>
+            <a:endParaRPr lang="fr-FR" sz="2000" dirty="0"/>
+          </a:p>
+          <a:p>
+            <a:r>
+              <a:rPr lang="fr-FR" sz="2000" dirty="0"/>
+              <a:t>Les premiers tirages peuvent être défavorables ; </a:t>
+            </a:r>
+          </a:p>
+          <a:p>
+            <a:endParaRPr lang="fr-FR" sz="2000" dirty="0"/>
+          </a:p>
+          <a:p>
+            <a:r>
+              <a:rPr lang="fr-FR" sz="2000" dirty="0"/>
+              <a:t>Quelques tirages blancs successifs peuvent annuler l'avance initiale.</a:t>
+            </a:r>
+            <a:endParaRPr sz="2000" b="0" i="0" dirty="0">
+              <a:solidFill>
+                <a:srgbClr val="232D37"/>
+              </a:solidFill>
+              <a:latin typeface="Aptos"/>
+            </a:endParaRPr>
           </a:p>
         </p:txBody>
       </p:sp>
@@ -11290,7 +13438,7 @@
         <p:spPr>
           <a:xfrm>
             <a:off x="1051560" y="5806440"/>
-            <a:ext cx="10149840" cy="320040"/>
+            <a:ext cx="10149840" cy="369332"/>
           </a:xfrm>
           <a:prstGeom prst="rect">
             <a:avLst/>
@@ -11305,14 +13453,25 @@
           <a:p>
             <a:pPr algn="ctr"/>
             <a:r>
-              <a:rPr sz="1800" b="1" i="0">
-                <a:solidFill>
-                  <a:srgbClr val="0097D6"/>
-                </a:solidFill>
-                <a:latin typeface="Aptos"/>
-              </a:rPr>
-              <a:t>La preuve doit donc relier une information asymptotique à une contrainte valable dès le temps 0.</a:t>
-            </a:r>
+              <a:rPr lang="fr-FR" b="1" dirty="0">
+                <a:solidFill>
+                  <a:schemeClr val="tx2">
+                    <a:lumMod val="60000"/>
+                    <a:lumOff val="40000"/>
+                  </a:schemeClr>
+                </a:solidFill>
+              </a:rPr>
+              <a:t>Le défi est de contrôler simultanément les fluctuations initiales et le comportement à long terme.</a:t>
+            </a:r>
+            <a:endParaRPr sz="1800" b="1" i="0" dirty="0">
+              <a:solidFill>
+                <a:schemeClr val="tx2">
+                  <a:lumMod val="60000"/>
+                  <a:lumOff val="40000"/>
+                </a:schemeClr>
+              </a:solidFill>
+              <a:latin typeface="Aptos"/>
+            </a:endParaRPr>
           </a:p>
         </p:txBody>
       </p:sp>
@@ -11351,6 +13510,66 @@
           </a:p>
         </p:txBody>
       </p:sp>
+      <p:pic>
+        <p:nvPicPr>
+          <p:cNvPr id="27" name="Image 26">
+            <a:extLst>
+              <a:ext uri="{FF2B5EF4-FFF2-40B4-BE49-F238E27FC236}">
+                <a16:creationId xmlns:a16="http://schemas.microsoft.com/office/drawing/2014/main" id="{86163F6E-92A3-9393-740F-727C3CB2D4EA}"/>
+              </a:ext>
+            </a:extLst>
+          </p:cNvPr>
+          <p:cNvPicPr>
+            <a:picLocks noChangeAspect="1"/>
+          </p:cNvPicPr>
+          <p:nvPr/>
+        </p:nvPicPr>
+        <p:blipFill>
+          <a:blip r:embed="rId4"/>
+          <a:stretch>
+            <a:fillRect/>
+          </a:stretch>
+        </p:blipFill>
+        <p:spPr>
+          <a:xfrm>
+            <a:off x="5507630" y="1929384"/>
+            <a:ext cx="1176740" cy="517766"/>
+          </a:xfrm>
+          <a:prstGeom prst="rect">
+            <a:avLst/>
+          </a:prstGeom>
+        </p:spPr>
+      </p:pic>
+      <p:pic>
+        <p:nvPicPr>
+          <p:cNvPr id="29" name="Image 28">
+            <a:extLst>
+              <a:ext uri="{FF2B5EF4-FFF2-40B4-BE49-F238E27FC236}">
+                <a16:creationId xmlns:a16="http://schemas.microsoft.com/office/drawing/2014/main" id="{7120DDA0-2D2A-2469-AD7E-2007696943F2}"/>
+              </a:ext>
+            </a:extLst>
+          </p:cNvPr>
+          <p:cNvPicPr>
+            <a:picLocks noChangeAspect="1"/>
+          </p:cNvPicPr>
+          <p:nvPr/>
+        </p:nvPicPr>
+        <p:blipFill>
+          <a:blip r:embed="rId5"/>
+          <a:stretch>
+            <a:fillRect/>
+          </a:stretch>
+        </p:blipFill>
+        <p:spPr>
+          <a:xfrm>
+            <a:off x="1765921" y="1929384"/>
+            <a:ext cx="1151034" cy="504386"/>
+          </a:xfrm>
+          <a:prstGeom prst="rect">
+            <a:avLst/>
+          </a:prstGeom>
+        </p:spPr>
+      </p:pic>
     </p:spTree>
   </p:cSld>
   <p:clrMapOvr>
@@ -11362,6 +13581,14 @@
 <file path=ppt/slides/slide7.xml><?xml version="1.0" encoding="utf-8"?>
 <p:sld xmlns:a="http://schemas.openxmlformats.org/drawingml/2006/main" xmlns:r="http://schemas.openxmlformats.org/officeDocument/2006/relationships" xmlns:p="http://schemas.openxmlformats.org/presentationml/2006/main">
   <p:cSld>
+    <p:bg>
+      <p:bgPr>
+        <a:solidFill>
+          <a:schemeClr val="bg1"/>
+        </a:solidFill>
+        <a:effectLst/>
+      </p:bgPr>
+    </p:bg>
     <p:spTree>
       <p:nvGrpSpPr>
         <p:cNvPr id="1" name=""/>
@@ -11376,35 +13603,51 @@
           <a:chExt cx="0" cy="0"/>
         </a:xfrm>
       </p:grpSpPr>
-      <p:sp>
-        <p:nvSpPr>
-          <p:cNvPr id="2" name="Rectangle 1"/>
-          <p:cNvSpPr/>
-          <p:nvPr/>
-        </p:nvSpPr>
-        <p:spPr>
-          <a:xfrm>
-            <a:off x="0" y="0"/>
-            <a:ext cx="12191695" cy="109728"/>
-          </a:xfrm>
-          <a:prstGeom prst="rect">
-            <a:avLst/>
-          </a:prstGeom>
-          <a:solidFill>
-            <a:srgbClr val="0097D6"/>
-          </a:solidFill>
+      <p:sp useBgFill="1">
+        <p:nvSpPr>
+          <p:cNvPr id="30" name="Rectangle 29">
+            <a:extLst>
+              <a:ext uri="{FF2B5EF4-FFF2-40B4-BE49-F238E27FC236}">
+                <a16:creationId xmlns:a16="http://schemas.microsoft.com/office/drawing/2014/main" id="{AF2A46FC-A8BE-4771-BE51-D9123E91856E}"/>
+              </a:ext>
+              <a:ext uri="{C183D7F6-B498-43B3-948B-1728B52AA6E4}">
+                <adec:decorative xmlns:adec="http://schemas.microsoft.com/office/drawing/2017/decorative" val="1"/>
+              </a:ext>
+            </a:extLst>
+          </p:cNvPr>
+          <p:cNvSpPr>
+            <a:spLocks noGrp="1" noRot="1" noChangeAspect="1" noMove="1" noResize="1" noEditPoints="1" noAdjustHandles="1" noChangeArrowheads="1" noChangeShapeType="1" noTextEdit="1"/>
+          </p:cNvSpPr>
+          <p:nvPr>
+            <p:extLst>
+              <p:ext uri="{386F3935-93C4-4BCD-93E2-E3B085C9AB24}">
+                <p16:designElem xmlns:p16="http://schemas.microsoft.com/office/powerpoint/2015/main" val="1"/>
+              </p:ext>
+            </p:extLst>
+          </p:nvPr>
+        </p:nvSpPr>
+        <p:spPr>
+          <a:xfrm>
+            <a:off x="0" y="-12612"/>
+            <a:ext cx="12188952" cy="6858000"/>
+          </a:xfrm>
+          <a:prstGeom prst="rect">
+            <a:avLst/>
+          </a:prstGeom>
           <a:ln>
             <a:noFill/>
           </a:ln>
         </p:spPr>
         <p:style>
-          <a:lnRef idx="1">
-            <a:schemeClr val="accent1"/>
+          <a:lnRef idx="2">
+            <a:schemeClr val="accent1">
+              <a:shade val="50000"/>
+            </a:schemeClr>
           </a:lnRef>
-          <a:fillRef idx="3">
+          <a:fillRef idx="1">
             <a:schemeClr val="accent1"/>
           </a:fillRef>
-          <a:effectRef idx="2">
+          <a:effectRef idx="0">
             <a:schemeClr val="accent1"/>
           </a:effectRef>
           <a:fontRef idx="minor">
@@ -11416,127 +13659,19 @@
           <a:lstStyle/>
           <a:p>
             <a:pPr algn="ctr"/>
-            <a:endParaRPr/>
-          </a:p>
-        </p:txBody>
-      </p:sp>
-      <p:sp>
-        <p:nvSpPr>
-          <p:cNvPr id="3" name="TextBox 2"/>
-          <p:cNvSpPr txBox="1"/>
-          <p:nvPr/>
-        </p:nvSpPr>
-        <p:spPr>
-          <a:xfrm>
-            <a:off x="411480" y="201168"/>
-            <a:ext cx="9601200" cy="256032"/>
-          </a:xfrm>
-          <a:prstGeom prst="rect">
-            <a:avLst/>
-          </a:prstGeom>
-          <a:noFill/>
-        </p:spPr>
-        <p:txBody>
-          <a:bodyPr wrap="square">
-            <a:spAutoFit/>
-          </a:bodyPr>
-          <a:lstStyle/>
-          <a:p>
-            <a:pPr algn="l"/>
-            <a:r>
-              <a:rPr sz="900" b="0" i="0">
-                <a:solidFill>
-                  <a:srgbClr val="5F6973"/>
-                </a:solidFill>
-                <a:latin typeface="Aptos"/>
-              </a:rPr>
-              <a:t>Urnes de Pólya généralisées — domination permanente · Preuve</a:t>
-            </a:r>
-          </a:p>
-        </p:txBody>
-      </p:sp>
-      <p:sp>
-        <p:nvSpPr>
-          <p:cNvPr id="4" name="Rectangle 3"/>
-          <p:cNvSpPr/>
-          <p:nvPr/>
-        </p:nvSpPr>
-        <p:spPr>
-          <a:xfrm>
-            <a:off x="0" y="6446520"/>
-            <a:ext cx="12191695" cy="18288"/>
-          </a:xfrm>
-          <a:prstGeom prst="rect">
-            <a:avLst/>
-          </a:prstGeom>
-          <a:solidFill>
-            <a:srgbClr val="DCE1E6"/>
-          </a:solidFill>
-          <a:ln>
-            <a:noFill/>
-          </a:ln>
-        </p:spPr>
-        <p:style>
-          <a:lnRef idx="1">
-            <a:schemeClr val="accent1"/>
-          </a:lnRef>
-          <a:fillRef idx="3">
-            <a:schemeClr val="accent1"/>
-          </a:fillRef>
-          <a:effectRef idx="2">
-            <a:schemeClr val="accent1"/>
-          </a:effectRef>
-          <a:fontRef idx="minor">
-            <a:schemeClr val="lt1"/>
-          </a:fontRef>
-        </p:style>
-        <p:txBody>
-          <a:bodyPr rtlCol="0" anchor="ctr"/>
-          <a:lstStyle/>
-          <a:p>
-            <a:pPr algn="ctr"/>
-            <a:endParaRPr/>
-          </a:p>
-        </p:txBody>
-      </p:sp>
-      <p:sp>
-        <p:nvSpPr>
-          <p:cNvPr id="5" name="TextBox 4"/>
-          <p:cNvSpPr txBox="1"/>
-          <p:nvPr/>
-        </p:nvSpPr>
-        <p:spPr>
-          <a:xfrm>
-            <a:off x="411480" y="6510528"/>
-            <a:ext cx="9326880" cy="228600"/>
-          </a:xfrm>
-          <a:prstGeom prst="rect">
-            <a:avLst/>
-          </a:prstGeom>
-          <a:noFill/>
-        </p:spPr>
-        <p:txBody>
-          <a:bodyPr wrap="square">
-            <a:spAutoFit/>
-          </a:bodyPr>
-          <a:lstStyle/>
-          <a:p>
-            <a:pPr algn="l"/>
-            <a:r>
-              <a:rPr sz="850" b="0" i="0">
-                <a:solidFill>
-                  <a:srgbClr val="6E7882"/>
-                </a:solidFill>
-                <a:latin typeface="Aptos"/>
-              </a:rPr>
-              <a:t>Henri Vasserot — Master Mathématiques EAD AMU — 2025/2026</a:t>
-            </a:r>
+            <a:endParaRPr lang="en-US"/>
           </a:p>
         </p:txBody>
       </p:sp>
       <p:pic>
         <p:nvPicPr>
-          <p:cNvPr id="6" name="Picture 5" descr="LOGO_AMU.png"/>
+          <p:cNvPr id="18" name="Image 17">
+            <a:extLst>
+              <a:ext uri="{FF2B5EF4-FFF2-40B4-BE49-F238E27FC236}">
+                <a16:creationId xmlns:a16="http://schemas.microsoft.com/office/drawing/2014/main" id="{F211FBB0-D978-8C71-B1E4-6ECEE140D4FD}"/>
+              </a:ext>
+            </a:extLst>
+          </p:cNvPr>
           <p:cNvPicPr>
             <a:picLocks noChangeAspect="1"/>
           </p:cNvPicPr>
@@ -11544,30 +13679,455 @@
         </p:nvPicPr>
         <p:blipFill>
           <a:blip r:embed="rId2"/>
+          <a:srcRect t="13875" b="6947"/>
           <a:stretch>
             <a:fillRect/>
           </a:stretch>
         </p:blipFill>
         <p:spPr>
           <a:xfrm>
-            <a:off x="10241280" y="6446520"/>
-            <a:ext cx="1417320" cy="487059"/>
-          </a:xfrm>
-          <a:prstGeom prst="rect">
-            <a:avLst/>
-          </a:prstGeom>
+            <a:off x="615790" y="783823"/>
+            <a:ext cx="10960420" cy="5792694"/>
+          </a:xfrm>
+          <a:custGeom>
+            <a:avLst/>
+            <a:gdLst/>
+            <a:ahLst/>
+            <a:cxnLst/>
+            <a:rect l="l" t="t" r="r" b="b"/>
+            <a:pathLst>
+              <a:path w="10485104" h="5523506">
+                <a:moveTo>
+                  <a:pt x="5949681" y="536"/>
+                </a:moveTo>
+                <a:cubicBezTo>
+                  <a:pt x="6074035" y="-2131"/>
+                  <a:pt x="6198411" y="5173"/>
+                  <a:pt x="6321822" y="22405"/>
+                </a:cubicBezTo>
+                <a:cubicBezTo>
+                  <a:pt x="6498937" y="51493"/>
+                  <a:pt x="6677824" y="73364"/>
+                  <a:pt x="6857694" y="55210"/>
+                </a:cubicBezTo>
+                <a:cubicBezTo>
+                  <a:pt x="6981675" y="42526"/>
+                  <a:pt x="7105459" y="35089"/>
+                  <a:pt x="7230031" y="35528"/>
+                </a:cubicBezTo>
+                <a:cubicBezTo>
+                  <a:pt x="7516370" y="35528"/>
+                  <a:pt x="7802902" y="38152"/>
+                  <a:pt x="8089242" y="32684"/>
+                </a:cubicBezTo>
+                <a:cubicBezTo>
+                  <a:pt x="8344090" y="27873"/>
+                  <a:pt x="8597956" y="17377"/>
+                  <a:pt x="8853003" y="43837"/>
+                </a:cubicBezTo>
+                <a:cubicBezTo>
+                  <a:pt x="9229472" y="82767"/>
+                  <a:pt x="9607909" y="70300"/>
+                  <a:pt x="9985559" y="65708"/>
+                </a:cubicBezTo>
+                <a:cubicBezTo>
+                  <a:pt x="10083101" y="64320"/>
+                  <a:pt x="10180599" y="61132"/>
+                  <a:pt x="10278047" y="56140"/>
+                </a:cubicBezTo>
+                <a:lnTo>
+                  <a:pt x="10449151" y="44199"/>
+                </a:lnTo>
+                <a:lnTo>
+                  <a:pt x="10468533" y="198724"/>
+                </a:lnTo>
+                <a:cubicBezTo>
+                  <a:pt x="10475933" y="234109"/>
+                  <a:pt x="10480462" y="270161"/>
+                  <a:pt x="10482057" y="306442"/>
+                </a:cubicBezTo>
+                <a:cubicBezTo>
+                  <a:pt x="10492136" y="438884"/>
+                  <a:pt x="10475168" y="569479"/>
+                  <a:pt x="10461007" y="700359"/>
+                </a:cubicBezTo>
+                <a:cubicBezTo>
+                  <a:pt x="10451566" y="783776"/>
+                  <a:pt x="10437150" y="868045"/>
+                  <a:pt x="10461007" y="950608"/>
+                </a:cubicBezTo>
+                <a:cubicBezTo>
+                  <a:pt x="10477350" y="1008147"/>
+                  <a:pt x="10480985" y="1069224"/>
+                  <a:pt x="10471595" y="1128666"/>
+                </a:cubicBezTo>
+                <a:cubicBezTo>
+                  <a:pt x="10455763" y="1234166"/>
+                  <a:pt x="10452459" y="1341527"/>
+                  <a:pt x="10461772" y="1447979"/>
+                </a:cubicBezTo>
+                <a:cubicBezTo>
+                  <a:pt x="10467921" y="1518165"/>
+                  <a:pt x="10466977" y="1588906"/>
+                  <a:pt x="10458965" y="1658865"/>
+                </a:cubicBezTo>
+                <a:cubicBezTo>
+                  <a:pt x="10448377" y="1752939"/>
+                  <a:pt x="10431919" y="1848719"/>
+                  <a:pt x="10451949" y="1943076"/>
+                </a:cubicBezTo>
+                <a:cubicBezTo>
+                  <a:pt x="10483843" y="2092999"/>
+                  <a:pt x="10477464" y="2242779"/>
+                  <a:pt x="10464706" y="2393837"/>
+                </a:cubicBezTo>
+                <a:cubicBezTo>
+                  <a:pt x="10455138" y="2506243"/>
+                  <a:pt x="10444549" y="2619928"/>
+                  <a:pt x="10463686" y="2733613"/>
+                </a:cubicBezTo>
+                <a:cubicBezTo>
+                  <a:pt x="10471914" y="2786362"/>
+                  <a:pt x="10471914" y="2840306"/>
+                  <a:pt x="10463686" y="2893056"/>
+                </a:cubicBezTo>
+                <a:cubicBezTo>
+                  <a:pt x="10453735" y="2964109"/>
+                  <a:pt x="10444294" y="3034452"/>
+                  <a:pt x="10457052" y="3106215"/>
+                </a:cubicBezTo>
+                <a:cubicBezTo>
+                  <a:pt x="10462665" y="3137479"/>
+                  <a:pt x="10466875" y="3169026"/>
+                  <a:pt x="10469810" y="3200574"/>
+                </a:cubicBezTo>
+                <a:cubicBezTo>
+                  <a:pt x="10475653" y="3281119"/>
+                  <a:pt x="10473561" y="3362120"/>
+                  <a:pt x="10463559" y="3442154"/>
+                </a:cubicBezTo>
+                <a:cubicBezTo>
+                  <a:pt x="10453990" y="3535091"/>
+                  <a:pt x="10469554" y="3628597"/>
+                  <a:pt x="10456797" y="3721250"/>
+                </a:cubicBezTo>
+                <a:cubicBezTo>
+                  <a:pt x="10447738" y="3795870"/>
+                  <a:pt x="10447394" y="3871485"/>
+                  <a:pt x="10455776" y="3946204"/>
+                </a:cubicBezTo>
+                <a:cubicBezTo>
+                  <a:pt x="10470855" y="4087457"/>
+                  <a:pt x="10469912" y="4230260"/>
+                  <a:pt x="10452970" y="4371244"/>
+                </a:cubicBezTo>
+                <a:cubicBezTo>
+                  <a:pt x="10442508" y="4453523"/>
+                  <a:pt x="10436512" y="4538218"/>
+                  <a:pt x="10455266" y="4618934"/>
+                </a:cubicBezTo>
+                <a:cubicBezTo>
+                  <a:pt x="10499408" y="4808646"/>
+                  <a:pt x="10473637" y="4998642"/>
+                  <a:pt x="10455266" y="5187359"/>
+                </a:cubicBezTo>
+                <a:cubicBezTo>
+                  <a:pt x="10444103" y="5288708"/>
+                  <a:pt x="10443847" y="5391181"/>
+                  <a:pt x="10454500" y="5492602"/>
+                </a:cubicBezTo>
+                <a:lnTo>
+                  <a:pt x="10454510" y="5492731"/>
+                </a:lnTo>
+                <a:lnTo>
+                  <a:pt x="10414967" y="5491139"/>
+                </a:lnTo>
+                <a:cubicBezTo>
+                  <a:pt x="10117611" y="5495732"/>
+                  <a:pt x="9820450" y="5526349"/>
+                  <a:pt x="9523092" y="5507105"/>
+                </a:cubicBezTo>
+                <a:cubicBezTo>
+                  <a:pt x="9272964" y="5490920"/>
+                  <a:pt x="9023034" y="5477142"/>
+                  <a:pt x="8772711" y="5490483"/>
+                </a:cubicBezTo>
+                <a:cubicBezTo>
+                  <a:pt x="8636774" y="5499549"/>
+                  <a:pt x="8500636" y="5503107"/>
+                  <a:pt x="8364561" y="5501172"/>
+                </a:cubicBezTo>
+                <a:lnTo>
+                  <a:pt x="8196562" y="5491993"/>
+                </a:lnTo>
+                <a:lnTo>
+                  <a:pt x="8077075" y="5475562"/>
+                </a:lnTo>
+                <a:lnTo>
+                  <a:pt x="7915670" y="5468917"/>
+                </a:lnTo>
+                <a:lnTo>
+                  <a:pt x="7914092" y="5467957"/>
+                </a:lnTo>
+                <a:lnTo>
+                  <a:pt x="7894412" y="5467957"/>
+                </a:lnTo>
+                <a:lnTo>
+                  <a:pt x="7892834" y="5468758"/>
+                </a:lnTo>
+                <a:lnTo>
+                  <a:pt x="7727602" y="5475562"/>
+                </a:lnTo>
+                <a:lnTo>
+                  <a:pt x="7690606" y="5480649"/>
+                </a:lnTo>
+                <a:lnTo>
+                  <a:pt x="7624212" y="5484579"/>
+                </a:lnTo>
+                <a:cubicBezTo>
+                  <a:pt x="7434738" y="5508001"/>
+                  <a:pt x="7243868" y="5514147"/>
+                  <a:pt x="7053506" y="5502949"/>
+                </a:cubicBezTo>
+                <a:cubicBezTo>
+                  <a:pt x="6777009" y="5485453"/>
+                  <a:pt x="6500117" y="5474737"/>
+                  <a:pt x="6223029" y="5498574"/>
+                </a:cubicBezTo>
+                <a:cubicBezTo>
+                  <a:pt x="6065592" y="5511916"/>
+                  <a:pt x="5908157" y="5526131"/>
+                  <a:pt x="5750720" y="5507761"/>
+                </a:cubicBezTo>
+                <a:cubicBezTo>
+                  <a:pt x="5616170" y="5490965"/>
+                  <a:pt x="5480520" y="5488253"/>
+                  <a:pt x="5345518" y="5499668"/>
+                </a:cubicBezTo>
+                <a:cubicBezTo>
+                  <a:pt x="5197844" y="5511040"/>
+                  <a:pt x="5049616" y="5511040"/>
+                  <a:pt x="4901942" y="5499668"/>
+                </a:cubicBezTo>
+                <a:cubicBezTo>
+                  <a:pt x="4760445" y="5490920"/>
+                  <a:pt x="4618556" y="5476268"/>
+                  <a:pt x="4477454" y="5492013"/>
+                </a:cubicBezTo>
+                <a:cubicBezTo>
+                  <a:pt x="4279085" y="5513884"/>
+                  <a:pt x="4081305" y="5506667"/>
+                  <a:pt x="3883329" y="5493326"/>
+                </a:cubicBezTo>
+                <a:cubicBezTo>
+                  <a:pt x="3719792" y="5482391"/>
+                  <a:pt x="3555664" y="5466425"/>
+                  <a:pt x="3392914" y="5492233"/>
+                </a:cubicBezTo>
+                <a:cubicBezTo>
+                  <a:pt x="3175771" y="5523222"/>
+                  <a:pt x="2956480" y="5531206"/>
+                  <a:pt x="2737979" y="5516072"/>
+                </a:cubicBezTo>
+                <a:cubicBezTo>
+                  <a:pt x="2289680" y="5492670"/>
+                  <a:pt x="1840986" y="5498574"/>
+                  <a:pt x="1392489" y="5480641"/>
+                </a:cubicBezTo>
+                <a:cubicBezTo>
+                  <a:pt x="1244499" y="5474519"/>
+                  <a:pt x="1097296" y="5507322"/>
+                  <a:pt x="949699" y="5509072"/>
+                </a:cubicBezTo>
+                <a:cubicBezTo>
+                  <a:pt x="684469" y="5512352"/>
+                  <a:pt x="418241" y="5493120"/>
+                  <a:pt x="151598" y="5492249"/>
+                </a:cubicBezTo>
+                <a:lnTo>
+                  <a:pt x="1415" y="5496057"/>
+                </a:lnTo>
+                <a:lnTo>
+                  <a:pt x="3772" y="5431261"/>
+                </a:lnTo>
+                <a:cubicBezTo>
+                  <a:pt x="7163" y="5398149"/>
+                  <a:pt x="12808" y="5364994"/>
+                  <a:pt x="20909" y="5331792"/>
+                </a:cubicBezTo>
+                <a:cubicBezTo>
+                  <a:pt x="51502" y="5208362"/>
+                  <a:pt x="50009" y="5079152"/>
+                  <a:pt x="16572" y="4956462"/>
+                </a:cubicBezTo>
+                <a:cubicBezTo>
+                  <a:pt x="9172" y="4924695"/>
+                  <a:pt x="4643" y="4892329"/>
+                  <a:pt x="3048" y="4859758"/>
+                </a:cubicBezTo>
+                <a:cubicBezTo>
+                  <a:pt x="-7031" y="4740857"/>
+                  <a:pt x="9937" y="4623614"/>
+                  <a:pt x="24098" y="4506116"/>
+                </a:cubicBezTo>
+                <a:cubicBezTo>
+                  <a:pt x="33539" y="4431228"/>
+                  <a:pt x="47955" y="4355575"/>
+                  <a:pt x="24098" y="4281453"/>
+                </a:cubicBezTo>
+                <a:cubicBezTo>
+                  <a:pt x="7755" y="4229797"/>
+                  <a:pt x="4120" y="4174965"/>
+                  <a:pt x="13510" y="4121600"/>
+                </a:cubicBezTo>
+                <a:cubicBezTo>
+                  <a:pt x="29342" y="4026887"/>
+                  <a:pt x="32646" y="3930503"/>
+                  <a:pt x="23333" y="3834935"/>
+                </a:cubicBezTo>
+                <a:cubicBezTo>
+                  <a:pt x="17184" y="3771925"/>
+                  <a:pt x="18128" y="3708417"/>
+                  <a:pt x="26140" y="3645611"/>
+                </a:cubicBezTo>
+                <a:cubicBezTo>
+                  <a:pt x="36728" y="3561155"/>
+                  <a:pt x="53186" y="3475168"/>
+                  <a:pt x="33156" y="3390458"/>
+                </a:cubicBezTo>
+                <a:cubicBezTo>
+                  <a:pt x="1262" y="3255864"/>
+                  <a:pt x="7641" y="3121398"/>
+                  <a:pt x="20399" y="2985784"/>
+                </a:cubicBezTo>
+                <a:cubicBezTo>
+                  <a:pt x="29967" y="2884871"/>
+                  <a:pt x="40556" y="2782810"/>
+                  <a:pt x="21419" y="2680748"/>
+                </a:cubicBezTo>
+                <a:cubicBezTo>
+                  <a:pt x="13191" y="2633392"/>
+                  <a:pt x="13191" y="2584964"/>
+                  <a:pt x="21419" y="2537607"/>
+                </a:cubicBezTo>
+                <a:cubicBezTo>
+                  <a:pt x="31370" y="2473819"/>
+                  <a:pt x="40811" y="2410668"/>
+                  <a:pt x="28053" y="2346242"/>
+                </a:cubicBezTo>
+                <a:cubicBezTo>
+                  <a:pt x="22440" y="2318175"/>
+                  <a:pt x="18230" y="2289853"/>
+                  <a:pt x="15295" y="2261531"/>
+                </a:cubicBezTo>
+                <a:cubicBezTo>
+                  <a:pt x="9452" y="2189221"/>
+                  <a:pt x="11544" y="2116502"/>
+                  <a:pt x="21546" y="2044651"/>
+                </a:cubicBezTo>
+                <a:cubicBezTo>
+                  <a:pt x="31115" y="1961216"/>
+                  <a:pt x="15551" y="1877270"/>
+                  <a:pt x="28308" y="1794090"/>
+                </a:cubicBezTo>
+                <a:cubicBezTo>
+                  <a:pt x="37367" y="1727100"/>
+                  <a:pt x="37711" y="1659216"/>
+                  <a:pt x="29329" y="1592136"/>
+                </a:cubicBezTo>
+                <a:cubicBezTo>
+                  <a:pt x="14250" y="1465325"/>
+                  <a:pt x="15193" y="1337123"/>
+                  <a:pt x="32135" y="1210554"/>
+                </a:cubicBezTo>
+                <a:cubicBezTo>
+                  <a:pt x="42597" y="1136687"/>
+                  <a:pt x="48593" y="1060652"/>
+                  <a:pt x="29839" y="988188"/>
+                </a:cubicBezTo>
+                <a:cubicBezTo>
+                  <a:pt x="-14303" y="817873"/>
+                  <a:pt x="11468" y="647303"/>
+                  <a:pt x="29839" y="477881"/>
+                </a:cubicBezTo>
+                <a:cubicBezTo>
+                  <a:pt x="41002" y="386894"/>
+                  <a:pt x="41258" y="294898"/>
+                  <a:pt x="30605" y="203847"/>
+                </a:cubicBezTo>
+                <a:lnTo>
+                  <a:pt x="17136" y="42362"/>
+                </a:lnTo>
+                <a:lnTo>
+                  <a:pt x="155390" y="51827"/>
+                </a:lnTo>
+                <a:cubicBezTo>
+                  <a:pt x="380715" y="63616"/>
+                  <a:pt x="606095" y="63411"/>
+                  <a:pt x="831032" y="41432"/>
+                </a:cubicBezTo>
+                <a:cubicBezTo>
+                  <a:pt x="1107234" y="18075"/>
+                  <a:pt x="1384519" y="14708"/>
+                  <a:pt x="1661115" y="31372"/>
+                </a:cubicBezTo>
+                <a:cubicBezTo>
+                  <a:pt x="1911045" y="42962"/>
+                  <a:pt x="2160581" y="71395"/>
+                  <a:pt x="2411103" y="47120"/>
+                </a:cubicBezTo>
+                <a:cubicBezTo>
+                  <a:pt x="2497298" y="38807"/>
+                  <a:pt x="2581920" y="18689"/>
+                  <a:pt x="2668707" y="14096"/>
+                </a:cubicBezTo>
+                <a:cubicBezTo>
+                  <a:pt x="3075287" y="-7775"/>
+                  <a:pt x="3480488" y="25030"/>
+                  <a:pt x="3885690" y="51930"/>
+                </a:cubicBezTo>
+                <a:cubicBezTo>
+                  <a:pt x="4033287" y="61770"/>
+                  <a:pt x="4180883" y="73799"/>
+                  <a:pt x="4328480" y="46900"/>
+                </a:cubicBezTo>
+                <a:cubicBezTo>
+                  <a:pt x="4453032" y="25577"/>
+                  <a:pt x="4579453" y="21181"/>
+                  <a:pt x="4704949" y="33778"/>
+                </a:cubicBezTo>
+                <a:cubicBezTo>
+                  <a:pt x="4816098" y="46376"/>
+                  <a:pt x="4927939" y="49371"/>
+                  <a:pt x="5039501" y="42745"/>
+                </a:cubicBezTo>
+                <a:cubicBezTo>
+                  <a:pt x="5342568" y="15407"/>
+                  <a:pt x="5645828" y="318"/>
+                  <a:pt x="5949681" y="536"/>
+                </a:cubicBezTo>
+                <a:close/>
+              </a:path>
+            </a:pathLst>
+          </a:custGeom>
         </p:spPr>
       </p:pic>
       <p:sp>
         <p:nvSpPr>
-          <p:cNvPr id="7" name="TextBox 6"/>
+          <p:cNvPr id="19" name="TextBox 6">
+            <a:extLst>
+              <a:ext uri="{FF2B5EF4-FFF2-40B4-BE49-F238E27FC236}">
+                <a16:creationId xmlns:a16="http://schemas.microsoft.com/office/drawing/2014/main" id="{6FFD9FBA-AB8B-4CCA-ED2C-F94B153C9B55}"/>
+              </a:ext>
+            </a:extLst>
+          </p:cNvPr>
           <p:cNvSpPr txBox="1"/>
           <p:nvPr/>
         </p:nvSpPr>
         <p:spPr>
           <a:xfrm>
-            <a:off x="658368" y="621792"/>
-            <a:ext cx="10789920" cy="502920"/>
+            <a:off x="615790" y="260603"/>
+            <a:ext cx="10789920" cy="523220"/>
           </a:xfrm>
           <a:prstGeom prst="rect">
             <a:avLst/>
@@ -11580,374 +14140,9 @@
           </a:bodyPr>
           <a:lstStyle/>
           <a:p>
-            <a:pPr algn="l"/>
-            <a:r>
-              <a:rPr sz="2800" b="1" i="0">
-                <a:solidFill>
-                  <a:srgbClr val="232D37"/>
-                </a:solidFill>
-                <a:latin typeface="Aptos"/>
-              </a:rPr>
+            <a:r>
+              <a:rPr lang="fr-FR" sz="2800" b="1" dirty="0"/>
               <a:t>Plongement en temps continu</a:t>
-            </a:r>
-          </a:p>
-        </p:txBody>
-      </p:sp>
-      <p:sp>
-        <p:nvSpPr>
-          <p:cNvPr id="8" name="TextBox 7"/>
-          <p:cNvSpPr txBox="1"/>
-          <p:nvPr/>
-        </p:nvSpPr>
-        <p:spPr>
-          <a:xfrm>
-            <a:off x="685800" y="1078992"/>
-            <a:ext cx="10515600" cy="320040"/>
-          </a:xfrm>
-          <a:prstGeom prst="rect">
-            <a:avLst/>
-          </a:prstGeom>
-          <a:noFill/>
-        </p:spPr>
-        <p:txBody>
-          <a:bodyPr wrap="square">
-            <a:spAutoFit/>
-          </a:bodyPr>
-          <a:lstStyle/>
-          <a:p>
-            <a:pPr algn="l"/>
-            <a:r>
-              <a:rPr sz="1400" b="0" i="0">
-                <a:solidFill>
-                  <a:srgbClr val="5F6973"/>
-                </a:solidFill>
-                <a:latin typeface="Aptos"/>
-              </a:rPr>
-              <a:t>Transformer l’urne discrète en chaîne de saut</a:t>
-            </a:r>
-          </a:p>
-        </p:txBody>
-      </p:sp>
-      <p:sp>
-        <p:nvSpPr>
-          <p:cNvPr id="9" name="Rounded Rectangle 8"/>
-          <p:cNvSpPr/>
-          <p:nvPr/>
-        </p:nvSpPr>
-        <p:spPr>
-          <a:xfrm>
-            <a:off x="777240" y="1417320"/>
-            <a:ext cx="5257800" cy="4297680"/>
-          </a:xfrm>
-          <a:prstGeom prst="roundRect">
-            <a:avLst/>
-          </a:prstGeom>
-          <a:solidFill>
-            <a:srgbClr val="F0F4F7"/>
-          </a:solidFill>
-          <a:ln>
-            <a:solidFill>
-              <a:srgbClr val="D2DAE1"/>
-            </a:solidFill>
-          </a:ln>
-        </p:spPr>
-        <p:style>
-          <a:lnRef idx="1">
-            <a:schemeClr val="accent1"/>
-          </a:lnRef>
-          <a:fillRef idx="3">
-            <a:schemeClr val="accent1"/>
-          </a:fillRef>
-          <a:effectRef idx="2">
-            <a:schemeClr val="accent1"/>
-          </a:effectRef>
-          <a:fontRef idx="minor">
-            <a:schemeClr val="lt1"/>
-          </a:fontRef>
-        </p:style>
-        <p:txBody>
-          <a:bodyPr rtlCol="0" anchor="ctr"/>
-          <a:lstStyle/>
-          <a:p>
-            <a:pPr algn="ctr"/>
-            <a:endParaRPr/>
-          </a:p>
-        </p:txBody>
-      </p:sp>
-      <p:sp>
-        <p:nvSpPr>
-          <p:cNvPr id="10" name="TextBox 9"/>
-          <p:cNvSpPr txBox="1"/>
-          <p:nvPr/>
-        </p:nvSpPr>
-        <p:spPr>
-          <a:xfrm>
-            <a:off x="941832" y="1545336"/>
-            <a:ext cx="4928616" cy="256032"/>
-          </a:xfrm>
-          <a:prstGeom prst="rect">
-            <a:avLst/>
-          </a:prstGeom>
-          <a:noFill/>
-        </p:spPr>
-        <p:txBody>
-          <a:bodyPr wrap="square">
-            <a:spAutoFit/>
-          </a:bodyPr>
-          <a:lstStyle/>
-          <a:p>
-            <a:pPr algn="l"/>
-            <a:r>
-              <a:rPr sz="1300" b="1" i="0">
-                <a:solidFill>
-                  <a:srgbClr val="232D37"/>
-                </a:solidFill>
-                <a:latin typeface="Aptos"/>
-              </a:rPr>
-              <a:t>Construction</a:t>
-            </a:r>
-          </a:p>
-        </p:txBody>
-      </p:sp>
-      <p:sp>
-        <p:nvSpPr>
-          <p:cNvPr id="11" name="TextBox 10"/>
-          <p:cNvSpPr txBox="1"/>
-          <p:nvPr/>
-        </p:nvSpPr>
-        <p:spPr>
-          <a:xfrm>
-            <a:off x="1051560" y="1874519"/>
-            <a:ext cx="4709160" cy="2377440"/>
-          </a:xfrm>
-          <a:prstGeom prst="rect">
-            <a:avLst/>
-          </a:prstGeom>
-          <a:noFill/>
-        </p:spPr>
-        <p:txBody>
-          <a:bodyPr wrap="square">
-            <a:spAutoFit/>
-          </a:bodyPr>
-          <a:lstStyle/>
-          <a:p>
-            <a:r>
-              <a:rPr>
-                <a:latin typeface="Aptos"/>
-              </a:rPr>
-              <a:t>chaque boule reçoit une horloge exponentielle indépendante</a:t>
-            </a:r>
-          </a:p>
-          <a:p>
-            <a:r>
-              <a:rPr>
-                <a:latin typeface="Aptos"/>
-              </a:rPr>
-              <a:t>quand l’horloge sonne, la boule est remplacée par m_i + 1 boules de même couleur</a:t>
-            </a:r>
-          </a:p>
-          <a:p>
-            <a:r>
-              <a:rPr>
-                <a:latin typeface="Aptos"/>
-              </a:rPr>
-              <a:t>la chaîne observée aux temps de saut a la même loi que l’urne discrète</a:t>
-            </a:r>
-          </a:p>
-        </p:txBody>
-      </p:sp>
-      <p:sp>
-        <p:nvSpPr>
-          <p:cNvPr id="12" name="Rounded Rectangle 11"/>
-          <p:cNvSpPr/>
-          <p:nvPr/>
-        </p:nvSpPr>
-        <p:spPr>
-          <a:xfrm>
-            <a:off x="6400800" y="1417320"/>
-            <a:ext cx="4983480" cy="4297680"/>
-          </a:xfrm>
-          <a:prstGeom prst="roundRect">
-            <a:avLst/>
-          </a:prstGeom>
-          <a:solidFill>
-            <a:srgbClr val="F0F4F7"/>
-          </a:solidFill>
-          <a:ln>
-            <a:solidFill>
-              <a:srgbClr val="D2DAE1"/>
-            </a:solidFill>
-          </a:ln>
-        </p:spPr>
-        <p:style>
-          <a:lnRef idx="1">
-            <a:schemeClr val="accent1"/>
-          </a:lnRef>
-          <a:fillRef idx="3">
-            <a:schemeClr val="accent1"/>
-          </a:fillRef>
-          <a:effectRef idx="2">
-            <a:schemeClr val="accent1"/>
-          </a:effectRef>
-          <a:fontRef idx="minor">
-            <a:schemeClr val="lt1"/>
-          </a:fontRef>
-        </p:style>
-        <p:txBody>
-          <a:bodyPr rtlCol="0" anchor="ctr"/>
-          <a:lstStyle/>
-          <a:p>
-            <a:pPr algn="ctr"/>
-            <a:endParaRPr/>
-          </a:p>
-        </p:txBody>
-      </p:sp>
-      <p:sp>
-        <p:nvSpPr>
-          <p:cNvPr id="13" name="TextBox 12"/>
-          <p:cNvSpPr txBox="1"/>
-          <p:nvPr/>
-        </p:nvSpPr>
-        <p:spPr>
-          <a:xfrm>
-            <a:off x="6565392" y="1545336"/>
-            <a:ext cx="4654296" cy="256032"/>
-          </a:xfrm>
-          <a:prstGeom prst="rect">
-            <a:avLst/>
-          </a:prstGeom>
-          <a:noFill/>
-        </p:spPr>
-        <p:txBody>
-          <a:bodyPr wrap="square">
-            <a:spAutoFit/>
-          </a:bodyPr>
-          <a:lstStyle/>
-          <a:p>
-            <a:pPr algn="l"/>
-            <a:r>
-              <a:rPr sz="1300" b="1" i="0">
-                <a:solidFill>
-                  <a:srgbClr val="232D37"/>
-                </a:solidFill>
-                <a:latin typeface="Aptos"/>
-              </a:rPr>
-              <a:t>Gain mathématique</a:t>
-            </a:r>
-          </a:p>
-        </p:txBody>
-      </p:sp>
-      <p:sp>
-        <p:nvSpPr>
-          <p:cNvPr id="14" name="TextBox 13"/>
-          <p:cNvSpPr txBox="1"/>
-          <p:nvPr/>
-        </p:nvSpPr>
-        <p:spPr>
-          <a:xfrm>
-            <a:off x="6720840" y="1874519"/>
-            <a:ext cx="4389120" cy="2331720"/>
-          </a:xfrm>
-          <a:prstGeom prst="rect">
-            <a:avLst/>
-          </a:prstGeom>
-          <a:noFill/>
-        </p:spPr>
-        <p:txBody>
-          <a:bodyPr wrap="square">
-            <a:spAutoFit/>
-          </a:bodyPr>
-          <a:lstStyle/>
-          <a:p>
-            <a:pPr>
-              <a:spcAft>
-                <a:spcPts val="600"/>
-              </a:spcAft>
-              <a:defRPr sz="1800">
-                <a:solidFill>
-                  <a:srgbClr val="232D37"/>
-                </a:solidFill>
-                <a:latin typeface="Aptos"/>
-              </a:defRPr>
-            </a:pPr>
-            <a:r>
-              <a:rPr>
-                <a:latin typeface="Aptos"/>
-              </a:rPr>
-              <a:t>le noir et le blanc deviennent deux processus de branchement indépendants en temps continu</a:t>
-            </a:r>
-          </a:p>
-          <a:p>
-            <a:pPr>
-              <a:spcAft>
-                <a:spcPts val="600"/>
-              </a:spcAft>
-              <a:defRPr sz="1800">
-                <a:solidFill>
-                  <a:srgbClr val="232D37"/>
-                </a:solidFill>
-                <a:latin typeface="Aptos"/>
-              </a:defRPr>
-            </a:pPr>
-            <a:r>
-              <a:rPr>
-                <a:latin typeface="Aptos"/>
-              </a:rPr>
-              <a:t>on peut utiliser des résultats de croissance exponentielle</a:t>
-            </a:r>
-          </a:p>
-          <a:p>
-            <a:pPr>
-              <a:spcAft>
-                <a:spcPts val="600"/>
-              </a:spcAft>
-              <a:defRPr sz="1800">
-                <a:solidFill>
-                  <a:srgbClr val="232D37"/>
-                </a:solidFill>
-                <a:latin typeface="Aptos"/>
-              </a:defRPr>
-            </a:pPr>
-            <a:r>
-              <a:rPr>
-                <a:latin typeface="Aptos"/>
-              </a:rPr>
-              <a:t>le discret est récupéré par la chaîne de saut</a:t>
-            </a:r>
-          </a:p>
-        </p:txBody>
-      </p:sp>
-      <p:sp>
-        <p:nvSpPr>
-          <p:cNvPr id="15" name="TextBox 14"/>
-          <p:cNvSpPr txBox="1"/>
-          <p:nvPr/>
-        </p:nvSpPr>
-        <p:spPr>
-          <a:xfrm>
-            <a:off x="11448288" y="6510528"/>
-            <a:ext cx="411480" cy="201168"/>
-          </a:xfrm>
-          <a:prstGeom prst="rect">
-            <a:avLst/>
-          </a:prstGeom>
-          <a:noFill/>
-        </p:spPr>
-        <p:txBody>
-          <a:bodyPr wrap="square">
-            <a:spAutoFit/>
-          </a:bodyPr>
-          <a:lstStyle/>
-          <a:p>
-            <a:pPr algn="r"/>
-            <a:r>
-              <a:rPr sz="850" b="0" i="0">
-                <a:solidFill>
-                  <a:srgbClr val="6E7882"/>
-                </a:solidFill>
-                <a:latin typeface="Aptos"/>
-              </a:rPr>
-              <a:t>7</a:t>
             </a:r>
           </a:p>
         </p:txBody>
@@ -12279,60 +14474,14 @@
       </p:pic>
       <p:sp>
         <p:nvSpPr>
-          <p:cNvPr id="11" name="Rounded Rectangle 10"/>
-          <p:cNvSpPr/>
-          <p:nvPr/>
-        </p:nvSpPr>
-        <p:spPr>
-          <a:xfrm>
-            <a:off x="914400" y="4251960"/>
-            <a:ext cx="10378440" cy="1325880"/>
-          </a:xfrm>
-          <a:prstGeom prst="roundRect">
-            <a:avLst/>
-          </a:prstGeom>
-          <a:solidFill>
-            <a:srgbClr val="F0F4F7"/>
-          </a:solidFill>
-          <a:ln>
-            <a:solidFill>
-              <a:srgbClr val="D2DAE1"/>
-            </a:solidFill>
-          </a:ln>
-        </p:spPr>
-        <p:style>
-          <a:lnRef idx="1">
-            <a:schemeClr val="accent1"/>
-          </a:lnRef>
-          <a:fillRef idx="3">
-            <a:schemeClr val="accent1"/>
-          </a:fillRef>
-          <a:effectRef idx="2">
-            <a:schemeClr val="accent1"/>
-          </a:effectRef>
-          <a:fontRef idx="minor">
-            <a:schemeClr val="lt1"/>
-          </a:fontRef>
-        </p:style>
-        <p:txBody>
-          <a:bodyPr rtlCol="0" anchor="ctr"/>
-          <a:lstStyle/>
-          <a:p>
-            <a:pPr algn="ctr"/>
-            <a:endParaRPr/>
-          </a:p>
-        </p:txBody>
-      </p:sp>
-      <p:sp>
-        <p:nvSpPr>
-          <p:cNvPr id="12" name="TextBox 11"/>
+          <p:cNvPr id="14" name="TextBox 13"/>
           <p:cNvSpPr txBox="1"/>
           <p:nvPr/>
         </p:nvSpPr>
         <p:spPr>
           <a:xfrm>
-            <a:off x="1078992" y="4379976"/>
-            <a:ext cx="10049256" cy="256032"/>
+            <a:off x="11448288" y="6510528"/>
+            <a:ext cx="411480" cy="201168"/>
           </a:xfrm>
           <a:prstGeom prst="rect">
             <a:avLst/>
@@ -12345,29 +14494,65 @@
           </a:bodyPr>
           <a:lstStyle/>
           <a:p>
-            <a:pPr algn="l"/>
-            <a:r>
-              <a:rPr sz="1300" b="1" i="0">
-                <a:solidFill>
-                  <a:srgbClr val="232D37"/>
-                </a:solidFill>
-                <a:latin typeface="Aptos"/>
-              </a:rPr>
-              <a:t>Lecture</a:t>
-            </a:r>
-          </a:p>
-        </p:txBody>
-      </p:sp>
-      <p:sp>
-        <p:nvSpPr>
-          <p:cNvPr id="13" name="TextBox 12"/>
+            <a:pPr algn="r"/>
+            <a:r>
+              <a:rPr sz="850" b="0" i="0">
+                <a:solidFill>
+                  <a:srgbClr val="6E7882"/>
+                </a:solidFill>
+                <a:latin typeface="Aptos"/>
+              </a:rPr>
+              <a:t>8</a:t>
+            </a:r>
+          </a:p>
+        </p:txBody>
+      </p:sp>
+      <p:pic>
+        <p:nvPicPr>
+          <p:cNvPr id="16" name="Image 15">
+            <a:extLst>
+              <a:ext uri="{FF2B5EF4-FFF2-40B4-BE49-F238E27FC236}">
+                <a16:creationId xmlns:a16="http://schemas.microsoft.com/office/drawing/2014/main" id="{5EC6DBC4-3E24-0F48-064A-DA20C6EE1CCD}"/>
+              </a:ext>
+            </a:extLst>
+          </p:cNvPr>
+          <p:cNvPicPr>
+            <a:picLocks noChangeAspect="1"/>
+          </p:cNvPicPr>
+          <p:nvPr/>
+        </p:nvPicPr>
+        <p:blipFill>
+          <a:blip r:embed="rId5"/>
+          <a:stretch>
+            <a:fillRect/>
+          </a:stretch>
+        </p:blipFill>
+        <p:spPr>
+          <a:xfrm>
+            <a:off x="633227" y="4149466"/>
+            <a:ext cx="10925240" cy="1154471"/>
+          </a:xfrm>
+          <a:prstGeom prst="rect">
+            <a:avLst/>
+          </a:prstGeom>
+        </p:spPr>
+      </p:pic>
+      <p:sp>
+        <p:nvSpPr>
+          <p:cNvPr id="17" name="ZoneTexte 16">
+            <a:extLst>
+              <a:ext uri="{FF2B5EF4-FFF2-40B4-BE49-F238E27FC236}">
+                <a16:creationId xmlns:a16="http://schemas.microsoft.com/office/drawing/2014/main" id="{818EE878-3848-C39C-BFA5-BF25516DD87D}"/>
+              </a:ext>
+            </a:extLst>
+          </p:cNvPr>
           <p:cNvSpPr txBox="1"/>
           <p:nvPr/>
         </p:nvSpPr>
         <p:spPr>
           <a:xfrm>
-            <a:off x="1234440" y="4617720"/>
-            <a:ext cx="9738360" cy="530352"/>
+            <a:off x="1386865" y="5670067"/>
+            <a:ext cx="9417963" cy="400110"/>
           </a:xfrm>
           <a:prstGeom prst="rect">
             <a:avLst/>
@@ -12375,51 +14560,21 @@
           <a:noFill/>
         </p:spPr>
         <p:txBody>
-          <a:bodyPr wrap="square">
+          <a:bodyPr wrap="none" rtlCol="0">
             <a:spAutoFit/>
           </a:bodyPr>
           <a:lstStyle/>
           <a:p>
             <a:r>
-              <a:rPr>
-                <a:latin typeface="Aptos"/>
-              </a:rPr>
-              <a:t>Si m_b &gt; m_w, le facteur exponentiel e^{−(m_b−m_w)t} force le rapport blanc/noir vers 0 sur l’événement asymptotique favorable.</a:t>
-            </a:r>
-          </a:p>
-        </p:txBody>
-      </p:sp>
-      <p:sp>
-        <p:nvSpPr>
-          <p:cNvPr id="14" name="TextBox 13"/>
-          <p:cNvSpPr txBox="1"/>
-          <p:nvPr/>
-        </p:nvSpPr>
-        <p:spPr>
-          <a:xfrm>
-            <a:off x="11448288" y="6510528"/>
-            <a:ext cx="411480" cy="201168"/>
-          </a:xfrm>
-          <a:prstGeom prst="rect">
-            <a:avLst/>
-          </a:prstGeom>
-          <a:noFill/>
-        </p:spPr>
-        <p:txBody>
-          <a:bodyPr wrap="square">
-            <a:spAutoFit/>
-          </a:bodyPr>
-          <a:lstStyle/>
-          <a:p>
-            <a:pPr algn="r"/>
-            <a:r>
-              <a:rPr sz="850" b="0" i="0">
-                <a:solidFill>
-                  <a:srgbClr val="6E7882"/>
-                </a:solidFill>
-                <a:latin typeface="Aptos"/>
-              </a:rPr>
-              <a:t>8</a:t>
+              <a:rPr lang="fr-FR" sz="2000" b="1" dirty="0">
+                <a:solidFill>
+                  <a:schemeClr val="tx2">
+                    <a:lumMod val="60000"/>
+                    <a:lumOff val="40000"/>
+                  </a:schemeClr>
+                </a:solidFill>
+              </a:rPr>
+              <a:t>Ce lemme donne une domination éventuelle, pas encore une domination permanente.</a:t>
             </a:r>
           </a:p>
         </p:txBody>
@@ -12709,8 +14864,8 @@
         </p:nvSpPr>
         <p:spPr>
           <a:xfrm>
-            <a:off x="777240" y="1600200"/>
-            <a:ext cx="3291840" cy="2880360"/>
+            <a:off x="75492" y="1856232"/>
+            <a:ext cx="2406149" cy="2606039"/>
           </a:xfrm>
           <a:prstGeom prst="roundRect">
             <a:avLst/>
@@ -12755,8 +14910,8 @@
         </p:nvSpPr>
         <p:spPr>
           <a:xfrm>
-            <a:off x="941832" y="1728216"/>
-            <a:ext cx="2962656" cy="256032"/>
+            <a:off x="240084" y="1714486"/>
+            <a:ext cx="2165534" cy="307777"/>
           </a:xfrm>
           <a:prstGeom prst="rect">
             <a:avLst/>
@@ -12769,16 +14924,16 @@
           </a:bodyPr>
           <a:lstStyle/>
           <a:p>
-            <a:pPr algn="l"/>
-            <a:r>
-              <a:rPr sz="1300" b="1" i="0">
-                <a:solidFill>
-                  <a:srgbClr val="232D37"/>
-                </a:solidFill>
-                <a:latin typeface="Aptos"/>
-              </a:rPr>
-              <a:t>Queue favorable</a:t>
-            </a:r>
+            <a:r>
+              <a:rPr lang="fr-FR" sz="1400" b="1" dirty="0"/>
+              <a:t>Domination éventuelle</a:t>
+            </a:r>
+            <a:endParaRPr sz="1300" b="1" i="0" dirty="0">
+              <a:solidFill>
+                <a:srgbClr val="232D37"/>
+              </a:solidFill>
+              <a:latin typeface="Aptos"/>
+            </a:endParaRPr>
           </a:p>
         </p:txBody>
       </p:sp>
@@ -12790,8 +14945,8 @@
         </p:nvSpPr>
         <p:spPr>
           <a:xfrm>
-            <a:off x="1005840" y="2240280"/>
-            <a:ext cx="2834640" cy="1188720"/>
+            <a:off x="304092" y="2788120"/>
+            <a:ext cx="2071962" cy="1754326"/>
           </a:xfrm>
           <a:prstGeom prst="rect">
             <a:avLst/>
@@ -12804,16 +14959,16 @@
           </a:bodyPr>
           <a:lstStyle/>
           <a:p>
-            <a:pPr algn="l"/>
-            <a:r>
-              <a:rPr sz="1800" b="0" i="0">
-                <a:solidFill>
-                  <a:srgbClr val="232D37"/>
-                </a:solidFill>
-                <a:latin typeface="Aptos"/>
-              </a:rPr>
-              <a:t>À long terme, le noir domine grâce à la comparaison asymptotique.</a:t>
-            </a:r>
+            <a:r>
+              <a:rPr lang="fr-FR" dirty="0"/>
+              <a:t>Le plongement en temps continu montre que le noir peut finir par dominer pour toujours.</a:t>
+            </a:r>
+            <a:endParaRPr sz="1800" b="0" i="0" dirty="0">
+              <a:solidFill>
+                <a:srgbClr val="232D37"/>
+              </a:solidFill>
+              <a:latin typeface="Aptos"/>
+            </a:endParaRPr>
           </a:p>
         </p:txBody>
       </p:sp>
@@ -12825,8 +14980,8 @@
         </p:nvSpPr>
         <p:spPr>
           <a:xfrm>
-            <a:off x="4251960" y="1600200"/>
-            <a:ext cx="3291840" cy="2880360"/>
+            <a:off x="3080999" y="1856232"/>
+            <a:ext cx="2406149" cy="2606039"/>
           </a:xfrm>
           <a:prstGeom prst="roundRect">
             <a:avLst/>
@@ -12871,8 +15026,8 @@
         </p:nvSpPr>
         <p:spPr>
           <a:xfrm>
-            <a:off x="4416552" y="1728216"/>
-            <a:ext cx="2962656" cy="256032"/>
+            <a:off x="3245591" y="1714486"/>
+            <a:ext cx="2165534" cy="307777"/>
           </a:xfrm>
           <a:prstGeom prst="rect">
             <a:avLst/>
@@ -12885,50 +15040,108 @@
           </a:bodyPr>
           <a:lstStyle/>
           <a:p>
-            <a:pPr algn="l"/>
-            <a:r>
-              <a:rPr sz="1300" b="1" i="0">
+            <a:r>
+              <a:rPr lang="fr-FR" sz="1400" b="1" dirty="0"/>
+              <a:t>Temps fini</a:t>
+            </a:r>
+            <a:r>
+              <a:rPr sz="1300" b="1" i="0" dirty="0">
                 <a:solidFill>
                   <a:srgbClr val="232D37"/>
                 </a:solidFill>
                 <a:latin typeface="Aptos"/>
               </a:rPr>
-              <a:t>État favorable</a:t>
-            </a:r>
-          </a:p>
-        </p:txBody>
-      </p:sp>
-      <p:sp>
-        <p:nvSpPr>
-          <p:cNvPr id="14" name="TextBox 13"/>
-          <p:cNvSpPr txBox="1"/>
-          <p:nvPr/>
-        </p:nvSpPr>
-        <p:spPr>
-          <a:xfrm>
-            <a:off x="4480560" y="2240280"/>
-            <a:ext cx="2834640" cy="1188720"/>
-          </a:xfrm>
-          <a:prstGeom prst="rect">
-            <a:avLst/>
-          </a:prstGeom>
-          <a:noFill/>
-        </p:spPr>
-        <p:txBody>
-          <a:bodyPr wrap="square">
-            <a:spAutoFit/>
-          </a:bodyPr>
-          <a:lstStyle/>
-          <a:p>
-            <a:r>
-              <a:rPr>
-                <a:latin typeface="Aptos"/>
-              </a:rPr>
-              <a:t>On choisit un temps fini N et un état atteignable où la suite reste favorable.</a:t>
-            </a:r>
-          </a:p>
-        </p:txBody>
-      </p:sp>
+              <a:t> favorable</a:t>
+            </a:r>
+          </a:p>
+        </p:txBody>
+      </p:sp>
+      <mc:AlternateContent xmlns:mc="http://schemas.openxmlformats.org/markup-compatibility/2006">
+        <mc:Choice xmlns:a14="http://schemas.microsoft.com/office/drawing/2010/main" Requires="a14">
+          <p:sp>
+            <p:nvSpPr>
+              <p:cNvPr id="14" name="TextBox 13"/>
+              <p:cNvSpPr txBox="1"/>
+              <p:nvPr/>
+            </p:nvSpPr>
+            <p:spPr>
+              <a:xfrm>
+                <a:off x="3196993" y="2788120"/>
+                <a:ext cx="2071962" cy="923330"/>
+              </a:xfrm>
+              <a:prstGeom prst="rect">
+                <a:avLst/>
+              </a:prstGeom>
+              <a:noFill/>
+            </p:spPr>
+            <p:txBody>
+              <a:bodyPr wrap="square">
+                <a:spAutoFit/>
+              </a:bodyPr>
+              <a:lstStyle/>
+              <a:p>
+                <a:r>
+                  <a:rPr lang="fr-FR" dirty="0"/>
+                  <a:t>On fixe un rang fini </a:t>
+                </a:r>
+                <a14:m>
+                  <m:oMath xmlns:m="http://schemas.openxmlformats.org/officeDocument/2006/math">
+                    <m:r>
+                      <a:rPr lang="fr-FR" i="1"/>
+                      <m:t>𝑁</m:t>
+                    </m:r>
+                  </m:oMath>
+                </a14:m>
+                <a:r>
+                  <a:rPr lang="fr-FR" dirty="0"/>
+                  <a:t>où une queue favorable existe.</a:t>
+                </a:r>
+                <a:endParaRPr dirty="0">
+                  <a:latin typeface="Aptos"/>
+                </a:endParaRPr>
+              </a:p>
+            </p:txBody>
+          </p:sp>
+        </mc:Choice>
+        <mc:Fallback>
+          <p:sp>
+            <p:nvSpPr>
+              <p:cNvPr id="14" name="TextBox 13"/>
+              <p:cNvSpPr txBox="1">
+                <a:spLocks noRot="1" noChangeAspect="1" noMove="1" noResize="1" noEditPoints="1" noAdjustHandles="1" noChangeArrowheads="1" noChangeShapeType="1" noTextEdit="1"/>
+              </p:cNvSpPr>
+              <p:nvPr/>
+            </p:nvSpPr>
+            <p:spPr>
+              <a:xfrm>
+                <a:off x="3196993" y="2788120"/>
+                <a:ext cx="2071962" cy="923330"/>
+              </a:xfrm>
+              <a:prstGeom prst="rect">
+                <a:avLst/>
+              </a:prstGeom>
+              <a:blipFill>
+                <a:blip r:embed="rId3"/>
+                <a:stretch>
+                  <a:fillRect l="-2353" t="-3289" b="-9211"/>
+                </a:stretch>
+              </a:blipFill>
+            </p:spPr>
+            <p:txBody>
+              <a:bodyPr/>
+              <a:lstStyle/>
+              <a:p>
+                <a:r>
+                  <a:rPr lang="fr-FR">
+                    <a:noFill/>
+                  </a:rPr>
+                  <a:t> </a:t>
+                </a:r>
+              </a:p>
+            </p:txBody>
+          </p:sp>
+        </mc:Fallback>
+      </mc:AlternateContent>
       <p:sp>
         <p:nvSpPr>
           <p:cNvPr id="15" name="Rounded Rectangle 14"/>
@@ -12937,8 +15150,8 @@
         </p:nvSpPr>
         <p:spPr>
           <a:xfrm>
-            <a:off x="7726679" y="1600200"/>
-            <a:ext cx="3291840" cy="2880360"/>
+            <a:off x="6096420" y="1856232"/>
+            <a:ext cx="2406149" cy="2606039"/>
           </a:xfrm>
           <a:prstGeom prst="roundRect">
             <a:avLst/>
@@ -12983,8 +15196,8 @@
         </p:nvSpPr>
         <p:spPr>
           <a:xfrm>
-            <a:off x="7891271" y="1728216"/>
-            <a:ext cx="2962656" cy="256032"/>
+            <a:off x="6251098" y="1722695"/>
+            <a:ext cx="2165534" cy="307777"/>
           </a:xfrm>
           <a:prstGeom prst="rect">
             <a:avLst/>
@@ -12997,15 +15210,18 @@
           </a:bodyPr>
           <a:lstStyle/>
           <a:p>
-            <a:pPr algn="l"/>
-            <a:r>
-              <a:rPr sz="1300" b="1" i="0">
+            <a:r>
+              <a:rPr lang="fr-FR" sz="1400" b="1" dirty="0"/>
+              <a:t>État </a:t>
+            </a:r>
+            <a:r>
+              <a:rPr sz="1300" b="1" i="0" dirty="0">
                 <a:solidFill>
                   <a:srgbClr val="232D37"/>
                 </a:solidFill>
                 <a:latin typeface="Aptos"/>
               </a:rPr>
-              <a:t>Préfixe favorable</a:t>
+              <a:t> favorable</a:t>
             </a:r>
           </a:p>
         </p:txBody>
@@ -13018,8 +15234,8 @@
         </p:nvSpPr>
         <p:spPr>
           <a:xfrm>
-            <a:off x="7955279" y="2240280"/>
-            <a:ext cx="2834640" cy="1188720"/>
+            <a:off x="6297884" y="2783367"/>
+            <a:ext cx="2071962" cy="1477328"/>
           </a:xfrm>
           <a:prstGeom prst="rect">
             <a:avLst/>
@@ -13033,11 +15249,12 @@
           <a:lstStyle/>
           <a:p>
             <a:r>
-              <a:rPr>
-                <a:latin typeface="Aptos"/>
-              </a:rPr>
-              <a:t>On réordonne les premiers tirages pour atteindre cet état sans traverser B = W.</a:t>
-            </a:r>
+              <a:rPr lang="fr-FR" dirty="0"/>
+              <a:t>Depuis cet état, la trajectoire a une probabilité positive de rester dominante.</a:t>
+            </a:r>
+            <a:endParaRPr dirty="0">
+              <a:latin typeface="Aptos"/>
+            </a:endParaRPr>
           </a:p>
         </p:txBody>
       </p:sp>
@@ -13049,8 +15266,8 @@
         </p:nvSpPr>
         <p:spPr>
           <a:xfrm>
-            <a:off x="3749039" y="2761488"/>
-            <a:ext cx="411480" cy="347472"/>
+            <a:off x="2578078" y="2776292"/>
+            <a:ext cx="300769" cy="314379"/>
           </a:xfrm>
           <a:prstGeom prst="rightArrow">
             <a:avLst/>
@@ -13093,8 +15310,8 @@
         </p:nvSpPr>
         <p:spPr>
           <a:xfrm>
-            <a:off x="7223760" y="2761488"/>
-            <a:ext cx="411480" cy="347472"/>
+            <a:off x="5593501" y="2776292"/>
+            <a:ext cx="300769" cy="314379"/>
           </a:xfrm>
           <a:prstGeom prst="rightArrow">
             <a:avLst/>
@@ -13212,14 +15429,14 @@
       </p:sp>
       <p:sp>
         <p:nvSpPr>
-          <p:cNvPr id="22" name="TextBox 21"/>
+          <p:cNvPr id="23" name="TextBox 22"/>
           <p:cNvSpPr txBox="1"/>
           <p:nvPr/>
         </p:nvSpPr>
         <p:spPr>
           <a:xfrm>
-            <a:off x="1600200" y="5120640"/>
-            <a:ext cx="9052560" cy="274320"/>
+            <a:off x="11448288" y="6510528"/>
+            <a:ext cx="411480" cy="201168"/>
           </a:xfrm>
           <a:prstGeom prst="rect">
             <a:avLst/>
@@ -13232,29 +15449,87 @@
           </a:bodyPr>
           <a:lstStyle/>
           <a:p>
+            <a:pPr algn="r"/>
+            <a:r>
+              <a:rPr sz="850" b="0" i="0">
+                <a:solidFill>
+                  <a:srgbClr val="6E7882"/>
+                </a:solidFill>
+                <a:latin typeface="Aptos"/>
+              </a:rPr>
+              <a:t>9</a:t>
+            </a:r>
+          </a:p>
+        </p:txBody>
+      </p:sp>
+      <p:sp>
+        <p:nvSpPr>
+          <p:cNvPr id="24" name="Rounded Rectangle 14">
+            <a:extLst>
+              <a:ext uri="{FF2B5EF4-FFF2-40B4-BE49-F238E27FC236}">
+                <a16:creationId xmlns:a16="http://schemas.microsoft.com/office/drawing/2014/main" id="{B1ED8F8D-D3AF-3054-AC3F-737C9C851578}"/>
+              </a:ext>
+            </a:extLst>
+          </p:cNvPr>
+          <p:cNvSpPr/>
+          <p:nvPr/>
+        </p:nvSpPr>
+        <p:spPr>
+          <a:xfrm>
+            <a:off x="9131984" y="1851167"/>
+            <a:ext cx="2406149" cy="2606039"/>
+          </a:xfrm>
+          <a:prstGeom prst="roundRect">
+            <a:avLst/>
+          </a:prstGeom>
+          <a:solidFill>
+            <a:srgbClr val="F0F4F7"/>
+          </a:solidFill>
+          <a:ln>
+            <a:solidFill>
+              <a:srgbClr val="D2DAE1"/>
+            </a:solidFill>
+          </a:ln>
+        </p:spPr>
+        <p:style>
+          <a:lnRef idx="1">
+            <a:schemeClr val="accent1"/>
+          </a:lnRef>
+          <a:fillRef idx="3">
+            <a:schemeClr val="accent1"/>
+          </a:fillRef>
+          <a:effectRef idx="2">
+            <a:schemeClr val="accent1"/>
+          </a:effectRef>
+          <a:fontRef idx="minor">
+            <a:schemeClr val="lt1"/>
+          </a:fontRef>
+        </p:style>
+        <p:txBody>
+          <a:bodyPr rtlCol="0" anchor="ctr"/>
+          <a:lstStyle/>
+          <a:p>
             <a:pPr algn="ctr"/>
-            <a:r>
-              <a:rPr sz="1800" b="1" i="0">
-                <a:solidFill>
-                  <a:srgbClr val="0097D6"/>
-                </a:solidFill>
-                <a:latin typeface="Aptos"/>
-              </a:rPr>
-              <a:t>domination permanente = bon début ∩ domination durable ensuite, avec probabilité positive</a:t>
-            </a:r>
-          </a:p>
-        </p:txBody>
-      </p:sp>
-      <p:sp>
-        <p:nvSpPr>
-          <p:cNvPr id="23" name="TextBox 22"/>
+            <a:endParaRPr/>
+          </a:p>
+        </p:txBody>
+      </p:sp>
+      <p:sp>
+        <p:nvSpPr>
+          <p:cNvPr id="25" name="TextBox 15">
+            <a:extLst>
+              <a:ext uri="{FF2B5EF4-FFF2-40B4-BE49-F238E27FC236}">
+                <a16:creationId xmlns:a16="http://schemas.microsoft.com/office/drawing/2014/main" id="{3AA95E3A-060A-CCAB-9C4E-D0D8419290D4}"/>
+              </a:ext>
+            </a:extLst>
+          </p:cNvPr>
           <p:cNvSpPr txBox="1"/>
           <p:nvPr/>
         </p:nvSpPr>
         <p:spPr>
           <a:xfrm>
-            <a:off x="11448288" y="6510528"/>
-            <a:ext cx="411480" cy="201168"/>
+            <a:off x="9296576" y="1709421"/>
+            <a:ext cx="2165534" cy="292388"/>
           </a:xfrm>
           <a:prstGeom prst="rect">
             <a:avLst/>
@@ -13267,19 +15542,287 @@
           </a:bodyPr>
           <a:lstStyle/>
           <a:p>
-            <a:pPr algn="r"/>
-            <a:r>
-              <a:rPr sz="850" b="0" i="0">
-                <a:solidFill>
-                  <a:srgbClr val="6E7882"/>
-                </a:solidFill>
-                <a:latin typeface="Aptos"/>
-              </a:rPr>
-              <a:t>9</a:t>
-            </a:r>
-          </a:p>
-        </p:txBody>
-      </p:sp>
+            <a:pPr algn="l"/>
+            <a:r>
+              <a:rPr sz="1300" b="1" i="0">
+                <a:solidFill>
+                  <a:srgbClr val="232D37"/>
+                </a:solidFill>
+                <a:latin typeface="Aptos"/>
+              </a:rPr>
+              <a:t>Préfixe favorable</a:t>
+            </a:r>
+          </a:p>
+        </p:txBody>
+      </p:sp>
+      <p:sp>
+        <p:nvSpPr>
+          <p:cNvPr id="26" name="TextBox 16">
+            <a:extLst>
+              <a:ext uri="{FF2B5EF4-FFF2-40B4-BE49-F238E27FC236}">
+                <a16:creationId xmlns:a16="http://schemas.microsoft.com/office/drawing/2014/main" id="{ACC0D238-9858-F126-3F0A-68F04603EEB1}"/>
+              </a:ext>
+            </a:extLst>
+          </p:cNvPr>
+          <p:cNvSpPr txBox="1"/>
+          <p:nvPr/>
+        </p:nvSpPr>
+        <p:spPr>
+          <a:xfrm>
+            <a:off x="9385655" y="2779049"/>
+            <a:ext cx="2071962" cy="1754326"/>
+          </a:xfrm>
+          <a:prstGeom prst="rect">
+            <a:avLst/>
+          </a:prstGeom>
+          <a:noFill/>
+        </p:spPr>
+        <p:txBody>
+          <a:bodyPr wrap="square">
+            <a:spAutoFit/>
+          </a:bodyPr>
+          <a:lstStyle/>
+          <a:p>
+            <a:r>
+              <a:rPr lang="fr-FR" dirty="0"/>
+              <a:t>On tire d’abord les noirs puis les blancs : l’avance reste toujours strictement positive.</a:t>
+            </a:r>
+            <a:endParaRPr dirty="0">
+              <a:latin typeface="Aptos"/>
+            </a:endParaRPr>
+          </a:p>
+        </p:txBody>
+      </p:sp>
+      <p:sp>
+        <p:nvSpPr>
+          <p:cNvPr id="27" name="Right Arrow 18">
+            <a:extLst>
+              <a:ext uri="{FF2B5EF4-FFF2-40B4-BE49-F238E27FC236}">
+                <a16:creationId xmlns:a16="http://schemas.microsoft.com/office/drawing/2014/main" id="{E1DDD6EF-0731-8B72-DFAD-6DE035D6956E}"/>
+              </a:ext>
+            </a:extLst>
+          </p:cNvPr>
+          <p:cNvSpPr/>
+          <p:nvPr/>
+        </p:nvSpPr>
+        <p:spPr>
+          <a:xfrm>
+            <a:off x="8629065" y="2771227"/>
+            <a:ext cx="300769" cy="314379"/>
+          </a:xfrm>
+          <a:prstGeom prst="rightArrow">
+            <a:avLst/>
+          </a:prstGeom>
+          <a:solidFill>
+            <a:srgbClr val="0097D6"/>
+          </a:solidFill>
+          <a:ln>
+            <a:noFill/>
+          </a:ln>
+        </p:spPr>
+        <p:style>
+          <a:lnRef idx="1">
+            <a:schemeClr val="accent1"/>
+          </a:lnRef>
+          <a:fillRef idx="3">
+            <a:schemeClr val="accent1"/>
+          </a:fillRef>
+          <a:effectRef idx="2">
+            <a:schemeClr val="accent1"/>
+          </a:effectRef>
+          <a:fontRef idx="minor">
+            <a:schemeClr val="lt1"/>
+          </a:fontRef>
+        </p:style>
+        <p:txBody>
+          <a:bodyPr rtlCol="0" anchor="ctr"/>
+          <a:lstStyle/>
+          <a:p>
+            <a:pPr algn="ctr"/>
+            <a:endParaRPr/>
+          </a:p>
+        </p:txBody>
+      </p:sp>
+      <p:pic>
+        <p:nvPicPr>
+          <p:cNvPr id="29" name="Image 28">
+            <a:extLst>
+              <a:ext uri="{FF2B5EF4-FFF2-40B4-BE49-F238E27FC236}">
+                <a16:creationId xmlns:a16="http://schemas.microsoft.com/office/drawing/2014/main" id="{13FC966D-AB15-B5F6-4CBC-23C04BBFEDDD}"/>
+              </a:ext>
+            </a:extLst>
+          </p:cNvPr>
+          <p:cNvPicPr>
+            <a:picLocks noChangeAspect="1"/>
+          </p:cNvPicPr>
+          <p:nvPr/>
+        </p:nvPicPr>
+        <p:blipFill>
+          <a:blip r:embed="rId4"/>
+          <a:stretch>
+            <a:fillRect/>
+          </a:stretch>
+        </p:blipFill>
+        <p:spPr>
+          <a:xfrm>
+            <a:off x="136190" y="2235582"/>
+            <a:ext cx="2287939" cy="291909"/>
+          </a:xfrm>
+          <a:prstGeom prst="rect">
+            <a:avLst/>
+          </a:prstGeom>
+        </p:spPr>
+      </p:pic>
+      <p:pic>
+        <p:nvPicPr>
+          <p:cNvPr id="31" name="Image 30">
+            <a:extLst>
+              <a:ext uri="{FF2B5EF4-FFF2-40B4-BE49-F238E27FC236}">
+                <a16:creationId xmlns:a16="http://schemas.microsoft.com/office/drawing/2014/main" id="{567D1311-1E2D-C0F9-F826-977BDCDCB5A5}"/>
+              </a:ext>
+            </a:extLst>
+          </p:cNvPr>
+          <p:cNvPicPr>
+            <a:picLocks noChangeAspect="1"/>
+          </p:cNvPicPr>
+          <p:nvPr/>
+        </p:nvPicPr>
+        <p:blipFill>
+          <a:blip r:embed="rId5"/>
+          <a:stretch>
+            <a:fillRect/>
+          </a:stretch>
+        </p:blipFill>
+        <p:spPr>
+          <a:xfrm>
+            <a:off x="3100480" y="2230285"/>
+            <a:ext cx="2354784" cy="297206"/>
+          </a:xfrm>
+          <a:prstGeom prst="rect">
+            <a:avLst/>
+          </a:prstGeom>
+        </p:spPr>
+      </p:pic>
+      <p:pic>
+        <p:nvPicPr>
+          <p:cNvPr id="33" name="Image 32">
+            <a:extLst>
+              <a:ext uri="{FF2B5EF4-FFF2-40B4-BE49-F238E27FC236}">
+                <a16:creationId xmlns:a16="http://schemas.microsoft.com/office/drawing/2014/main" id="{C5EDD997-494E-3F73-A6E5-FB6E8D182E72}"/>
+              </a:ext>
+            </a:extLst>
+          </p:cNvPr>
+          <p:cNvPicPr>
+            <a:picLocks noChangeAspect="1"/>
+          </p:cNvPicPr>
+          <p:nvPr/>
+        </p:nvPicPr>
+        <p:blipFill>
+          <a:blip r:embed="rId6"/>
+          <a:stretch>
+            <a:fillRect/>
+          </a:stretch>
+        </p:blipFill>
+        <p:spPr>
+          <a:xfrm>
+            <a:off x="6003981" y="2155421"/>
+            <a:ext cx="2591025" cy="297206"/>
+          </a:xfrm>
+          <a:prstGeom prst="rect">
+            <a:avLst/>
+          </a:prstGeom>
+        </p:spPr>
+      </p:pic>
+      <p:pic>
+        <p:nvPicPr>
+          <p:cNvPr id="35" name="Image 34">
+            <a:extLst>
+              <a:ext uri="{FF2B5EF4-FFF2-40B4-BE49-F238E27FC236}">
+                <a16:creationId xmlns:a16="http://schemas.microsoft.com/office/drawing/2014/main" id="{5E39E336-2D17-DB91-4D6A-3B0D67AB0D60}"/>
+              </a:ext>
+            </a:extLst>
+          </p:cNvPr>
+          <p:cNvPicPr>
+            <a:picLocks noChangeAspect="1"/>
+          </p:cNvPicPr>
+          <p:nvPr/>
+        </p:nvPicPr>
+        <p:blipFill>
+          <a:blip r:embed="rId7"/>
+          <a:stretch>
+            <a:fillRect/>
+          </a:stretch>
+        </p:blipFill>
+        <p:spPr>
+          <a:xfrm>
+            <a:off x="9344634" y="2083408"/>
+            <a:ext cx="1983724" cy="631633"/>
+          </a:xfrm>
+          <a:prstGeom prst="rect">
+            <a:avLst/>
+          </a:prstGeom>
+        </p:spPr>
+      </p:pic>
+      <p:pic>
+        <p:nvPicPr>
+          <p:cNvPr id="37" name="Image 36">
+            <a:extLst>
+              <a:ext uri="{FF2B5EF4-FFF2-40B4-BE49-F238E27FC236}">
+                <a16:creationId xmlns:a16="http://schemas.microsoft.com/office/drawing/2014/main" id="{72279742-4410-A184-BDBE-AB1CC60DE69C}"/>
+              </a:ext>
+            </a:extLst>
+          </p:cNvPr>
+          <p:cNvPicPr>
+            <a:picLocks noChangeAspect="1"/>
+          </p:cNvPicPr>
+          <p:nvPr/>
+        </p:nvPicPr>
+        <p:blipFill>
+          <a:blip r:embed="rId8"/>
+          <a:stretch>
+            <a:fillRect/>
+          </a:stretch>
+        </p:blipFill>
+        <p:spPr>
+          <a:xfrm>
+            <a:off x="3043626" y="5143514"/>
+            <a:ext cx="6020529" cy="491238"/>
+          </a:xfrm>
+          <a:prstGeom prst="rect">
+            <a:avLst/>
+          </a:prstGeom>
+        </p:spPr>
+      </p:pic>
+      <p:pic>
+        <p:nvPicPr>
+          <p:cNvPr id="39" name="Image 38">
+            <a:extLst>
+              <a:ext uri="{FF2B5EF4-FFF2-40B4-BE49-F238E27FC236}">
+                <a16:creationId xmlns:a16="http://schemas.microsoft.com/office/drawing/2014/main" id="{01B00390-1753-4E14-B8D9-682D9391569B}"/>
+              </a:ext>
+            </a:extLst>
+          </p:cNvPr>
+          <p:cNvPicPr>
+            <a:picLocks noChangeAspect="1"/>
+          </p:cNvPicPr>
+          <p:nvPr/>
+        </p:nvPicPr>
+        <p:blipFill>
+          <a:blip r:embed="rId9"/>
+          <a:stretch>
+            <a:fillRect/>
+          </a:stretch>
+        </p:blipFill>
+        <p:spPr>
+          <a:xfrm>
+            <a:off x="4232974" y="5945635"/>
+            <a:ext cx="2895196" cy="480480"/>
+          </a:xfrm>
+          <a:prstGeom prst="rect">
+            <a:avLst/>
+          </a:prstGeom>
+        </p:spPr>
+      </p:pic>
     </p:spTree>
   </p:cSld>
   <p:clrMapOvr>
